--- a/templates/decks/zh/nl-job-market-2026/template.pptx
+++ b/templates/decks/zh/nl-job-market-2026/template.pptx
@@ -4602,17 +4602,256 @@
       </p:sp>
       <p:sp>
         <p:nvSpPr>
-          <p:cNvPr id="5" name="Rectangle 4"/>
+          <p:cNvPr id="5" name="TextBox 4"/>
+          <p:cNvSpPr txBox="1"/>
+          <p:nvPr/>
+        </p:nvSpPr>
+        <p:spPr>
+          <a:xfrm>
+            <a:off x="365760" y="1508760"/>
+            <a:ext cx="4548146" cy="274320"/>
+          </a:xfrm>
+          <a:prstGeom prst="rect">
+            <a:avLst/>
+          </a:prstGeom>
+          <a:noFill/>
+          <a:ln/>
+        </p:spPr>
+        <p:txBody>
+          <a:bodyPr wrap="square" anchor="t" lIns="25400" rIns="25400" tIns="25400" bIns="25400">
+            <a:spAutoFit/>
+          </a:bodyPr>
+          <a:lstStyle/>
+          <a:p>
+            <a:pPr algn="l">
+              <a:lnSpc>
+                <a:spcPct val="112000"/>
+              </a:lnSpc>
+              <a:spcBef>
+                <a:spcPts val="0"/>
+              </a:spcBef>
+              <a:spcAft>
+                <a:spcPts val="0"/>
+              </a:spcAft>
+            </a:pPr>
+            <a:r>
+              <a:rPr sz="950" b="1" i="0">
+                <a:solidFill>
+                  <a:srgbClr val="8A8478"/>
+                </a:solidFill>
+                <a:latin typeface="Courier New"/>
+              </a:rPr>
+              <a:t>30% 外籍税收优惠，逐步下调</a:t>
+            </a:r>
+          </a:p>
+        </p:txBody>
+      </p:sp>
+      <p:sp>
+        <p:nvSpPr>
+          <p:cNvPr id="6" name="Rectangle 5"/>
           <p:cNvSpPr/>
           <p:nvPr/>
         </p:nvSpPr>
         <p:spPr>
           <a:xfrm>
-            <a:off x="566928" y="1191006"/>
-            <a:ext cx="1097280" cy="45720"/>
-          </a:xfrm>
-          <a:prstGeom prst="rect">
-            <a:avLst/>
+            <a:off x="464515" y="2011680"/>
+            <a:ext cx="21945" cy="1280160"/>
+          </a:xfrm>
+          <a:prstGeom prst="rect">
+            <a:avLst/>
+          </a:prstGeom>
+          <a:solidFill>
+            <a:srgbClr val="9AA0AE"/>
+          </a:solidFill>
+          <a:ln>
+            <a:noFill/>
+          </a:ln>
+          <a:effectLst/>
+        </p:spPr>
+        <p:style>
+          <a:lnRef idx="1">
+            <a:schemeClr val="accent1"/>
+          </a:lnRef>
+          <a:fillRef idx="3">
+            <a:schemeClr val="accent1"/>
+          </a:fillRef>
+          <a:effectRef idx="2">
+            <a:schemeClr val="accent1"/>
+          </a:effectRef>
+          <a:fontRef idx="minor">
+            <a:schemeClr val="lt1"/>
+          </a:fontRef>
+        </p:style>
+        <p:txBody>
+          <a:bodyPr rtlCol="0" anchor="ctr"/>
+          <a:lstStyle/>
+          <a:p>
+            <a:pPr algn="ctr"/>
+          </a:p>
+        </p:txBody>
+      </p:sp>
+      <p:sp>
+        <p:nvSpPr>
+          <p:cNvPr id="7" name="Rounded Rectangle 6"/>
+          <p:cNvSpPr/>
+          <p:nvPr/>
+        </p:nvSpPr>
+        <p:spPr>
+          <a:xfrm>
+            <a:off x="393192" y="2020824"/>
+            <a:ext cx="164592" cy="164592"/>
+          </a:xfrm>
+          <a:prstGeom prst="roundRect">
+            <a:avLst>
+              <a:gd name="adj" fmla="val 50000"/>
+            </a:avLst>
+          </a:prstGeom>
+          <a:solidFill>
+            <a:srgbClr val="9AA0AE"/>
+          </a:solidFill>
+          <a:ln>
+            <a:noFill/>
+          </a:ln>
+          <a:effectLst/>
+        </p:spPr>
+        <p:style>
+          <a:lnRef idx="1">
+            <a:schemeClr val="accent1"/>
+          </a:lnRef>
+          <a:fillRef idx="3">
+            <a:schemeClr val="accent1"/>
+          </a:fillRef>
+          <a:effectRef idx="2">
+            <a:schemeClr val="accent1"/>
+          </a:effectRef>
+          <a:fontRef idx="minor">
+            <a:schemeClr val="lt1"/>
+          </a:fontRef>
+        </p:style>
+        <p:txBody>
+          <a:bodyPr rtlCol="0" anchor="ctr"/>
+          <a:lstStyle/>
+          <a:p>
+            <a:pPr algn="ctr"/>
+          </a:p>
+        </p:txBody>
+      </p:sp>
+      <p:sp>
+        <p:nvSpPr>
+          <p:cNvPr id="8" name="TextBox 7"/>
+          <p:cNvSpPr txBox="1"/>
+          <p:nvPr/>
+        </p:nvSpPr>
+        <p:spPr>
+          <a:xfrm>
+            <a:off x="795528" y="1956816"/>
+            <a:ext cx="4090946" cy="274320"/>
+          </a:xfrm>
+          <a:prstGeom prst="rect">
+            <a:avLst/>
+          </a:prstGeom>
+          <a:noFill/>
+          <a:ln/>
+        </p:spPr>
+        <p:txBody>
+          <a:bodyPr wrap="square" anchor="t" lIns="25400" rIns="25400" tIns="25400" bIns="25400">
+            <a:spAutoFit/>
+          </a:bodyPr>
+          <a:lstStyle/>
+          <a:p>
+            <a:pPr algn="l">
+              <a:lnSpc>
+                <a:spcPct val="112000"/>
+              </a:lnSpc>
+              <a:spcBef>
+                <a:spcPts val="0"/>
+              </a:spcBef>
+              <a:spcAft>
+                <a:spcPts val="0"/>
+              </a:spcAft>
+            </a:pPr>
+            <a:r>
+              <a:rPr sz="1300" b="1" i="0">
+                <a:solidFill>
+                  <a:srgbClr val="8A8478"/>
+                </a:solidFill>
+                <a:latin typeface="Helvetica Neue"/>
+              </a:rPr>
+              <a:t>2024–26  </a:t>
+            </a:r>
+            <a:r>
+              <a:rPr sz="1300" b="1" i="0">
+                <a:solidFill>
+                  <a:srgbClr val="20242A"/>
+                </a:solidFill>
+                <a:latin typeface="Helvetica Neue"/>
+              </a:rPr>
+              <a:t>30% 免税</a:t>
+            </a:r>
+          </a:p>
+        </p:txBody>
+      </p:sp>
+      <p:sp>
+        <p:nvSpPr>
+          <p:cNvPr id="9" name="TextBox 8"/>
+          <p:cNvSpPr txBox="1"/>
+          <p:nvPr/>
+        </p:nvSpPr>
+        <p:spPr>
+          <a:xfrm>
+            <a:off x="795528" y="2249424"/>
+            <a:ext cx="4090946" cy="365760"/>
+          </a:xfrm>
+          <a:prstGeom prst="rect">
+            <a:avLst/>
+          </a:prstGeom>
+          <a:noFill/>
+          <a:ln/>
+        </p:spPr>
+        <p:txBody>
+          <a:bodyPr wrap="square" anchor="t" lIns="25400" rIns="25400" tIns="25400" bIns="25400">
+            <a:spAutoFit/>
+          </a:bodyPr>
+          <a:lstStyle/>
+          <a:p>
+            <a:pPr algn="l">
+              <a:lnSpc>
+                <a:spcPct val="112000"/>
+              </a:lnSpc>
+              <a:spcBef>
+                <a:spcPts val="0"/>
+              </a:spcBef>
+              <a:spcAft>
+                <a:spcPts val="0"/>
+              </a:spcAft>
+            </a:pPr>
+            <a:r>
+              <a:rPr sz="1050" b="0" i="0">
+                <a:solidFill>
+                  <a:srgbClr val="8A8478"/>
+                </a:solidFill>
+                <a:latin typeface="Helvetica Neue"/>
+              </a:rPr>
+              <a:t>收入标准 €46,107</a:t>
+            </a:r>
+          </a:p>
+        </p:txBody>
+      </p:sp>
+      <p:sp>
+        <p:nvSpPr>
+          <p:cNvPr id="10" name="Rounded Rectangle 9"/>
+          <p:cNvSpPr/>
+          <p:nvPr/>
+        </p:nvSpPr>
+        <p:spPr>
+          <a:xfrm>
+            <a:off x="393192" y="2447544"/>
+            <a:ext cx="164592" cy="164592"/>
+          </a:xfrm>
+          <a:prstGeom prst="roundRect">
+            <a:avLst>
+              <a:gd name="adj" fmla="val 50000"/>
+            </a:avLst>
           </a:prstGeom>
           <a:solidFill>
             <a:srgbClr val="D8542A"/>
@@ -4646,14 +4885,14 @@
       </p:sp>
       <p:sp>
         <p:nvSpPr>
-          <p:cNvPr id="6" name="TextBox 5"/>
-          <p:cNvSpPr txBox="1"/>
-          <p:nvPr/>
-        </p:nvSpPr>
-        <p:spPr>
-          <a:xfrm>
-            <a:off x="365760" y="1508760"/>
-            <a:ext cx="4548146" cy="274320"/>
+          <p:cNvPr id="11" name="TextBox 10"/>
+          <p:cNvSpPr txBox="1"/>
+          <p:nvPr/>
+        </p:nvSpPr>
+        <p:spPr>
+          <a:xfrm>
+            <a:off x="795528" y="2383536"/>
+            <a:ext cx="4090946" cy="274320"/>
           </a:xfrm>
           <a:prstGeom prst="rect">
             <a:avLst/>
@@ -4679,30 +4918,87 @@
               </a:spcAft>
             </a:pPr>
             <a:r>
-              <a:rPr sz="950" b="1" i="0">
+              <a:rPr sz="1300" b="1" i="0">
+                <a:solidFill>
+                  <a:srgbClr val="D8542A"/>
+                </a:solidFill>
+                <a:latin typeface="Helvetica Neue"/>
+              </a:rPr>
+              <a:t>2027 年 1 月 1 日  </a:t>
+            </a:r>
+            <a:r>
+              <a:rPr sz="1300" b="1" i="0">
+                <a:solidFill>
+                  <a:srgbClr val="20242A"/>
+                </a:solidFill>
+                <a:latin typeface="Helvetica Neue"/>
+              </a:rPr>
+              <a:t>→ 27% 免税</a:t>
+            </a:r>
+          </a:p>
+        </p:txBody>
+      </p:sp>
+      <p:sp>
+        <p:nvSpPr>
+          <p:cNvPr id="12" name="TextBox 11"/>
+          <p:cNvSpPr txBox="1"/>
+          <p:nvPr/>
+        </p:nvSpPr>
+        <p:spPr>
+          <a:xfrm>
+            <a:off x="795528" y="2676144"/>
+            <a:ext cx="4090946" cy="365760"/>
+          </a:xfrm>
+          <a:prstGeom prst="rect">
+            <a:avLst/>
+          </a:prstGeom>
+          <a:noFill/>
+          <a:ln/>
+        </p:spPr>
+        <p:txBody>
+          <a:bodyPr wrap="square" anchor="t" lIns="25400" rIns="25400" tIns="25400" bIns="25400">
+            <a:spAutoFit/>
+          </a:bodyPr>
+          <a:lstStyle/>
+          <a:p>
+            <a:pPr algn="l">
+              <a:lnSpc>
+                <a:spcPct val="112000"/>
+              </a:lnSpc>
+              <a:spcBef>
+                <a:spcPts val="0"/>
+              </a:spcBef>
+              <a:spcAft>
+                <a:spcPts val="0"/>
+              </a:spcAft>
+            </a:pPr>
+            <a:r>
+              <a:rPr sz="1050" b="0" i="0">
                 <a:solidFill>
                   <a:srgbClr val="8A8478"/>
                 </a:solidFill>
-                <a:latin typeface="Courier New"/>
-              </a:rPr>
-              <a:t>30% 外籍税收优惠，逐步下调</a:t>
-            </a:r>
-          </a:p>
-        </p:txBody>
-      </p:sp>
-      <p:sp>
-        <p:nvSpPr>
-          <p:cNvPr id="7" name="Rectangle 6"/>
+                <a:latin typeface="Helvetica Neue"/>
+              </a:rPr>
+              <a:t>标准升至 €50,436</a:t>
+            </a:r>
+          </a:p>
+        </p:txBody>
+      </p:sp>
+      <p:sp>
+        <p:nvSpPr>
+          <p:cNvPr id="13" name="Rounded Rectangle 12"/>
           <p:cNvSpPr/>
           <p:nvPr/>
         </p:nvSpPr>
         <p:spPr>
           <a:xfrm>
-            <a:off x="464515" y="2011680"/>
-            <a:ext cx="21945" cy="1280160"/>
-          </a:xfrm>
-          <a:prstGeom prst="rect">
-            <a:avLst/>
+            <a:off x="393192" y="2874264"/>
+            <a:ext cx="164592" cy="164592"/>
+          </a:xfrm>
+          <a:prstGeom prst="roundRect">
+            <a:avLst>
+              <a:gd name="adj" fmla="val 50000"/>
+            </a:avLst>
           </a:prstGeom>
           <a:solidFill>
             <a:srgbClr val="9AA0AE"/>
@@ -4736,347 +5032,7 @@
       </p:sp>
       <p:sp>
         <p:nvSpPr>
-          <p:cNvPr id="8" name="Rounded Rectangle 7"/>
-          <p:cNvSpPr/>
-          <p:nvPr/>
-        </p:nvSpPr>
-        <p:spPr>
-          <a:xfrm>
-            <a:off x="393192" y="2020824"/>
-            <a:ext cx="164592" cy="164592"/>
-          </a:xfrm>
-          <a:prstGeom prst="roundRect">
-            <a:avLst>
-              <a:gd name="adj" fmla="val 50000"/>
-            </a:avLst>
-          </a:prstGeom>
-          <a:solidFill>
-            <a:srgbClr val="9AA0AE"/>
-          </a:solidFill>
-          <a:ln>
-            <a:noFill/>
-          </a:ln>
-          <a:effectLst/>
-        </p:spPr>
-        <p:style>
-          <a:lnRef idx="1">
-            <a:schemeClr val="accent1"/>
-          </a:lnRef>
-          <a:fillRef idx="3">
-            <a:schemeClr val="accent1"/>
-          </a:fillRef>
-          <a:effectRef idx="2">
-            <a:schemeClr val="accent1"/>
-          </a:effectRef>
-          <a:fontRef idx="minor">
-            <a:schemeClr val="lt1"/>
-          </a:fontRef>
-        </p:style>
-        <p:txBody>
-          <a:bodyPr rtlCol="0" anchor="ctr"/>
-          <a:lstStyle/>
-          <a:p>
-            <a:pPr algn="ctr"/>
-          </a:p>
-        </p:txBody>
-      </p:sp>
-      <p:sp>
-        <p:nvSpPr>
-          <p:cNvPr id="9" name="TextBox 8"/>
-          <p:cNvSpPr txBox="1"/>
-          <p:nvPr/>
-        </p:nvSpPr>
-        <p:spPr>
-          <a:xfrm>
-            <a:off x="795528" y="1956816"/>
-            <a:ext cx="4090946" cy="274320"/>
-          </a:xfrm>
-          <a:prstGeom prst="rect">
-            <a:avLst/>
-          </a:prstGeom>
-          <a:noFill/>
-          <a:ln/>
-        </p:spPr>
-        <p:txBody>
-          <a:bodyPr wrap="square" anchor="t" lIns="25400" rIns="25400" tIns="25400" bIns="25400">
-            <a:spAutoFit/>
-          </a:bodyPr>
-          <a:lstStyle/>
-          <a:p>
-            <a:pPr algn="l">
-              <a:lnSpc>
-                <a:spcPct val="112000"/>
-              </a:lnSpc>
-              <a:spcBef>
-                <a:spcPts val="0"/>
-              </a:spcBef>
-              <a:spcAft>
-                <a:spcPts val="0"/>
-              </a:spcAft>
-            </a:pPr>
-            <a:r>
-              <a:rPr sz="1300" b="1" i="0">
-                <a:solidFill>
-                  <a:srgbClr val="8A8478"/>
-                </a:solidFill>
-                <a:latin typeface="Helvetica Neue"/>
-              </a:rPr>
-              <a:t>2024–26  </a:t>
-            </a:r>
-            <a:r>
-              <a:rPr sz="1300" b="1" i="0">
-                <a:solidFill>
-                  <a:srgbClr val="20242A"/>
-                </a:solidFill>
-                <a:latin typeface="Helvetica Neue"/>
-              </a:rPr>
-              <a:t>30% 免税</a:t>
-            </a:r>
-          </a:p>
-        </p:txBody>
-      </p:sp>
-      <p:sp>
-        <p:nvSpPr>
-          <p:cNvPr id="10" name="TextBox 9"/>
-          <p:cNvSpPr txBox="1"/>
-          <p:nvPr/>
-        </p:nvSpPr>
-        <p:spPr>
-          <a:xfrm>
-            <a:off x="795528" y="2249424"/>
-            <a:ext cx="4090946" cy="365760"/>
-          </a:xfrm>
-          <a:prstGeom prst="rect">
-            <a:avLst/>
-          </a:prstGeom>
-          <a:noFill/>
-          <a:ln/>
-        </p:spPr>
-        <p:txBody>
-          <a:bodyPr wrap="square" anchor="t" lIns="25400" rIns="25400" tIns="25400" bIns="25400">
-            <a:spAutoFit/>
-          </a:bodyPr>
-          <a:lstStyle/>
-          <a:p>
-            <a:pPr algn="l">
-              <a:lnSpc>
-                <a:spcPct val="112000"/>
-              </a:lnSpc>
-              <a:spcBef>
-                <a:spcPts val="0"/>
-              </a:spcBef>
-              <a:spcAft>
-                <a:spcPts val="0"/>
-              </a:spcAft>
-            </a:pPr>
-            <a:r>
-              <a:rPr sz="1050" b="0" i="0">
-                <a:solidFill>
-                  <a:srgbClr val="8A8478"/>
-                </a:solidFill>
-                <a:latin typeface="Helvetica Neue"/>
-              </a:rPr>
-              <a:t>收入标准 €46,107</a:t>
-            </a:r>
-          </a:p>
-        </p:txBody>
-      </p:sp>
-      <p:sp>
-        <p:nvSpPr>
-          <p:cNvPr id="11" name="Rounded Rectangle 10"/>
-          <p:cNvSpPr/>
-          <p:nvPr/>
-        </p:nvSpPr>
-        <p:spPr>
-          <a:xfrm>
-            <a:off x="393192" y="2447544"/>
-            <a:ext cx="164592" cy="164592"/>
-          </a:xfrm>
-          <a:prstGeom prst="roundRect">
-            <a:avLst>
-              <a:gd name="adj" fmla="val 50000"/>
-            </a:avLst>
-          </a:prstGeom>
-          <a:solidFill>
-            <a:srgbClr val="D8542A"/>
-          </a:solidFill>
-          <a:ln>
-            <a:noFill/>
-          </a:ln>
-          <a:effectLst/>
-        </p:spPr>
-        <p:style>
-          <a:lnRef idx="1">
-            <a:schemeClr val="accent1"/>
-          </a:lnRef>
-          <a:fillRef idx="3">
-            <a:schemeClr val="accent1"/>
-          </a:fillRef>
-          <a:effectRef idx="2">
-            <a:schemeClr val="accent1"/>
-          </a:effectRef>
-          <a:fontRef idx="minor">
-            <a:schemeClr val="lt1"/>
-          </a:fontRef>
-        </p:style>
-        <p:txBody>
-          <a:bodyPr rtlCol="0" anchor="ctr"/>
-          <a:lstStyle/>
-          <a:p>
-            <a:pPr algn="ctr"/>
-          </a:p>
-        </p:txBody>
-      </p:sp>
-      <p:sp>
-        <p:nvSpPr>
-          <p:cNvPr id="12" name="TextBox 11"/>
-          <p:cNvSpPr txBox="1"/>
-          <p:nvPr/>
-        </p:nvSpPr>
-        <p:spPr>
-          <a:xfrm>
-            <a:off x="795528" y="2383536"/>
-            <a:ext cx="4090946" cy="274320"/>
-          </a:xfrm>
-          <a:prstGeom prst="rect">
-            <a:avLst/>
-          </a:prstGeom>
-          <a:noFill/>
-          <a:ln/>
-        </p:spPr>
-        <p:txBody>
-          <a:bodyPr wrap="square" anchor="t" lIns="25400" rIns="25400" tIns="25400" bIns="25400">
-            <a:spAutoFit/>
-          </a:bodyPr>
-          <a:lstStyle/>
-          <a:p>
-            <a:pPr algn="l">
-              <a:lnSpc>
-                <a:spcPct val="112000"/>
-              </a:lnSpc>
-              <a:spcBef>
-                <a:spcPts val="0"/>
-              </a:spcBef>
-              <a:spcAft>
-                <a:spcPts val="0"/>
-              </a:spcAft>
-            </a:pPr>
-            <a:r>
-              <a:rPr sz="1300" b="1" i="0">
-                <a:solidFill>
-                  <a:srgbClr val="D8542A"/>
-                </a:solidFill>
-                <a:latin typeface="Helvetica Neue"/>
-              </a:rPr>
-              <a:t>2027 年 1 月 1 日  </a:t>
-            </a:r>
-            <a:r>
-              <a:rPr sz="1300" b="1" i="0">
-                <a:solidFill>
-                  <a:srgbClr val="20242A"/>
-                </a:solidFill>
-                <a:latin typeface="Helvetica Neue"/>
-              </a:rPr>
-              <a:t>→ 27% 免税</a:t>
-            </a:r>
-          </a:p>
-        </p:txBody>
-      </p:sp>
-      <p:sp>
-        <p:nvSpPr>
-          <p:cNvPr id="13" name="TextBox 12"/>
-          <p:cNvSpPr txBox="1"/>
-          <p:nvPr/>
-        </p:nvSpPr>
-        <p:spPr>
-          <a:xfrm>
-            <a:off x="795528" y="2676144"/>
-            <a:ext cx="4090946" cy="365760"/>
-          </a:xfrm>
-          <a:prstGeom prst="rect">
-            <a:avLst/>
-          </a:prstGeom>
-          <a:noFill/>
-          <a:ln/>
-        </p:spPr>
-        <p:txBody>
-          <a:bodyPr wrap="square" anchor="t" lIns="25400" rIns="25400" tIns="25400" bIns="25400">
-            <a:spAutoFit/>
-          </a:bodyPr>
-          <a:lstStyle/>
-          <a:p>
-            <a:pPr algn="l">
-              <a:lnSpc>
-                <a:spcPct val="112000"/>
-              </a:lnSpc>
-              <a:spcBef>
-                <a:spcPts val="0"/>
-              </a:spcBef>
-              <a:spcAft>
-                <a:spcPts val="0"/>
-              </a:spcAft>
-            </a:pPr>
-            <a:r>
-              <a:rPr sz="1050" b="0" i="0">
-                <a:solidFill>
-                  <a:srgbClr val="8A8478"/>
-                </a:solidFill>
-                <a:latin typeface="Helvetica Neue"/>
-              </a:rPr>
-              <a:t>标准升至 €50,436</a:t>
-            </a:r>
-          </a:p>
-        </p:txBody>
-      </p:sp>
-      <p:sp>
-        <p:nvSpPr>
-          <p:cNvPr id="14" name="Rounded Rectangle 13"/>
-          <p:cNvSpPr/>
-          <p:nvPr/>
-        </p:nvSpPr>
-        <p:spPr>
-          <a:xfrm>
-            <a:off x="393192" y="2874264"/>
-            <a:ext cx="164592" cy="164592"/>
-          </a:xfrm>
-          <a:prstGeom prst="roundRect">
-            <a:avLst>
-              <a:gd name="adj" fmla="val 50000"/>
-            </a:avLst>
-          </a:prstGeom>
-          <a:solidFill>
-            <a:srgbClr val="9AA0AE"/>
-          </a:solidFill>
-          <a:ln>
-            <a:noFill/>
-          </a:ln>
-          <a:effectLst/>
-        </p:spPr>
-        <p:style>
-          <a:lnRef idx="1">
-            <a:schemeClr val="accent1"/>
-          </a:lnRef>
-          <a:fillRef idx="3">
-            <a:schemeClr val="accent1"/>
-          </a:fillRef>
-          <a:effectRef idx="2">
-            <a:schemeClr val="accent1"/>
-          </a:effectRef>
-          <a:fontRef idx="minor">
-            <a:schemeClr val="lt1"/>
-          </a:fontRef>
-        </p:style>
-        <p:txBody>
-          <a:bodyPr rtlCol="0" anchor="ctr"/>
-          <a:lstStyle/>
-          <a:p>
-            <a:pPr algn="ctr"/>
-          </a:p>
-        </p:txBody>
-      </p:sp>
-      <p:sp>
-        <p:nvSpPr>
-          <p:cNvPr id="15" name="TextBox 14"/>
+          <p:cNvPr id="14" name="TextBox 13"/>
           <p:cNvSpPr txBox="1"/>
           <p:nvPr/>
         </p:nvSpPr>
@@ -5131,7 +5087,7 @@
       </p:sp>
       <p:sp>
         <p:nvSpPr>
-          <p:cNvPr id="16" name="TextBox 15"/>
+          <p:cNvPr id="15" name="TextBox 14"/>
           <p:cNvSpPr txBox="1"/>
           <p:nvPr/>
         </p:nvSpPr>
@@ -5177,7 +5133,7 @@
       </p:sp>
       <p:sp>
         <p:nvSpPr>
-          <p:cNvPr id="17" name="TextBox 16"/>
+          <p:cNvPr id="16" name="TextBox 15"/>
           <p:cNvSpPr txBox="1"/>
           <p:nvPr/>
         </p:nvSpPr>
@@ -5223,7 +5179,7 @@
       </p:sp>
       <p:graphicFrame>
         <p:nvGraphicFramePr>
-          <p:cNvPr id="18" name="Chart 17"/>
+          <p:cNvPr id="17" name="Chart 16"/>
           <p:cNvGraphicFramePr>
             <a:graphicFrameLocks noGrp="1"/>
           </p:cNvGraphicFramePr>
@@ -5241,7 +5197,7 @@
       </p:graphicFrame>
       <p:sp>
         <p:nvSpPr>
-          <p:cNvPr id="19" name="TextBox 18"/>
+          <p:cNvPr id="18" name="TextBox 17"/>
           <p:cNvSpPr txBox="1"/>
           <p:nvPr/>
         </p:nvSpPr>
@@ -5287,7 +5243,7 @@
       </p:sp>
       <p:sp>
         <p:nvSpPr>
-          <p:cNvPr id="20" name="TextBox 19"/>
+          <p:cNvPr id="19" name="TextBox 18"/>
           <p:cNvSpPr txBox="1"/>
           <p:nvPr/>
         </p:nvSpPr>
@@ -5333,7 +5289,7 @@
       </p:sp>
       <p:sp>
         <p:nvSpPr>
-          <p:cNvPr id="21" name="TextBox 20"/>
+          <p:cNvPr id="20" name="TextBox 19"/>
           <p:cNvSpPr txBox="1"/>
           <p:nvPr/>
         </p:nvSpPr>
@@ -5388,7 +5344,7 @@
       </p:sp>
       <p:sp>
         <p:nvSpPr>
-          <p:cNvPr id="22" name="TextBox 21"/>
+          <p:cNvPr id="21" name="TextBox 20"/>
           <p:cNvSpPr txBox="1"/>
           <p:nvPr/>
         </p:nvSpPr>
@@ -5434,7 +5390,7 @@
       </p:sp>
       <p:sp>
         <p:nvSpPr>
-          <p:cNvPr id="23" name="TextBox 22"/>
+          <p:cNvPr id="22" name="TextBox 21"/>
           <p:cNvSpPr txBox="1"/>
           <p:nvPr/>
         </p:nvSpPr>
@@ -5634,17 +5590,525 @@
       </p:sp>
       <p:sp>
         <p:nvSpPr>
-          <p:cNvPr id="5" name="Rectangle 4"/>
+          <p:cNvPr id="5" name="TextBox 4"/>
+          <p:cNvSpPr txBox="1"/>
+          <p:nvPr/>
+        </p:nvSpPr>
+        <p:spPr>
+          <a:xfrm>
+            <a:off x="365760" y="1508760"/>
+            <a:ext cx="4251097" cy="274320"/>
+          </a:xfrm>
+          <a:prstGeom prst="rect">
+            <a:avLst/>
+          </a:prstGeom>
+          <a:noFill/>
+          <a:ln/>
+        </p:spPr>
+        <p:txBody>
+          <a:bodyPr wrap="square" anchor="t" lIns="25400" rIns="25400" tIns="25400" bIns="25400">
+            <a:spAutoFit/>
+          </a:bodyPr>
+          <a:lstStyle/>
+          <a:p>
+            <a:pPr algn="l">
+              <a:lnSpc>
+                <a:spcPct val="112000"/>
+              </a:lnSpc>
+              <a:spcBef>
+                <a:spcPts val="0"/>
+              </a:spcBef>
+              <a:spcAft>
+                <a:spcPts val="0"/>
+              </a:spcAft>
+            </a:pPr>
+            <a:r>
+              <a:rPr sz="950" b="1" i="0">
+                <a:solidFill>
+                  <a:srgbClr val="8A8478"/>
+                </a:solidFill>
+                <a:latin typeface="Courier New"/>
+              </a:rPr>
+              <a:t>每 100 名失业者对应的空缺数</a:t>
+            </a:r>
+          </a:p>
+        </p:txBody>
+      </p:sp>
+      <p:sp>
+        <p:nvSpPr>
+          <p:cNvPr id="6" name="TextBox 5"/>
+          <p:cNvSpPr txBox="1"/>
+          <p:nvPr/>
+        </p:nvSpPr>
+        <p:spPr>
+          <a:xfrm>
+            <a:off x="365760" y="1965960"/>
+            <a:ext cx="3108097" cy="256032"/>
+          </a:xfrm>
+          <a:prstGeom prst="rect">
+            <a:avLst/>
+          </a:prstGeom>
+          <a:noFill/>
+          <a:ln/>
+        </p:spPr>
+        <p:txBody>
+          <a:bodyPr wrap="square" anchor="b" lIns="25400" rIns="25400" tIns="25400" bIns="25400">
+            <a:spAutoFit/>
+          </a:bodyPr>
+          <a:lstStyle/>
+          <a:p>
+            <a:pPr algn="l">
+              <a:lnSpc>
+                <a:spcPct val="112000"/>
+              </a:lnSpc>
+              <a:spcBef>
+                <a:spcPts val="0"/>
+              </a:spcBef>
+              <a:spcAft>
+                <a:spcPts val="0"/>
+              </a:spcAft>
+            </a:pPr>
+            <a:r>
+              <a:rPr sz="1250" b="0" i="0">
+                <a:solidFill>
+                  <a:srgbClr val="8A8478"/>
+                </a:solidFill>
+                <a:latin typeface="Helvetica Neue"/>
+              </a:rPr>
+              <a:t>乌得勒支</a:t>
+            </a:r>
+          </a:p>
+        </p:txBody>
+      </p:sp>
+      <p:sp>
+        <p:nvSpPr>
+          <p:cNvPr id="7" name="Rounded Rectangle 6"/>
           <p:cNvSpPr/>
           <p:nvPr/>
         </p:nvSpPr>
         <p:spPr>
           <a:xfrm>
-            <a:off x="566928" y="1191006"/>
-            <a:ext cx="1097280" cy="45720"/>
-          </a:xfrm>
-          <a:prstGeom prst="rect">
-            <a:avLst/>
+            <a:off x="365760" y="2221991"/>
+            <a:ext cx="3108097" cy="182880"/>
+          </a:xfrm>
+          <a:prstGeom prst="roundRect">
+            <a:avLst>
+              <a:gd name="adj" fmla="val 50000"/>
+            </a:avLst>
+          </a:prstGeom>
+          <a:solidFill>
+            <a:srgbClr val="E7DFD1"/>
+          </a:solidFill>
+          <a:ln>
+            <a:noFill/>
+          </a:ln>
+          <a:effectLst/>
+        </p:spPr>
+        <p:style>
+          <a:lnRef idx="1">
+            <a:schemeClr val="accent1"/>
+          </a:lnRef>
+          <a:fillRef idx="3">
+            <a:schemeClr val="accent1"/>
+          </a:fillRef>
+          <a:effectRef idx="2">
+            <a:schemeClr val="accent1"/>
+          </a:effectRef>
+          <a:fontRef idx="minor">
+            <a:schemeClr val="lt1"/>
+          </a:fontRef>
+        </p:style>
+        <p:txBody>
+          <a:bodyPr rtlCol="0" anchor="ctr"/>
+          <a:lstStyle/>
+          <a:p>
+            <a:pPr algn="ctr"/>
+          </a:p>
+        </p:txBody>
+      </p:sp>
+      <p:sp>
+        <p:nvSpPr>
+          <p:cNvPr id="8" name="Rounded Rectangle 7"/>
+          <p:cNvSpPr/>
+          <p:nvPr/>
+        </p:nvSpPr>
+        <p:spPr>
+          <a:xfrm>
+            <a:off x="365760" y="2221991"/>
+            <a:ext cx="2615088" cy="182880"/>
+          </a:xfrm>
+          <a:prstGeom prst="roundRect">
+            <a:avLst>
+              <a:gd name="adj" fmla="val 50000"/>
+            </a:avLst>
+          </a:prstGeom>
+          <a:solidFill>
+            <a:srgbClr val="D8542A"/>
+          </a:solidFill>
+          <a:ln>
+            <a:noFill/>
+          </a:ln>
+          <a:effectLst/>
+        </p:spPr>
+        <p:style>
+          <a:lnRef idx="1">
+            <a:schemeClr val="accent1"/>
+          </a:lnRef>
+          <a:fillRef idx="3">
+            <a:schemeClr val="accent1"/>
+          </a:fillRef>
+          <a:effectRef idx="2">
+            <a:schemeClr val="accent1"/>
+          </a:effectRef>
+          <a:fontRef idx="minor">
+            <a:schemeClr val="lt1"/>
+          </a:fontRef>
+        </p:style>
+        <p:txBody>
+          <a:bodyPr rtlCol="0" anchor="ctr"/>
+          <a:lstStyle/>
+          <a:p>
+            <a:pPr algn="ctr"/>
+          </a:p>
+        </p:txBody>
+      </p:sp>
+      <p:sp>
+        <p:nvSpPr>
+          <p:cNvPr id="9" name="TextBox 8"/>
+          <p:cNvSpPr txBox="1"/>
+          <p:nvPr/>
+        </p:nvSpPr>
+        <p:spPr>
+          <a:xfrm>
+            <a:off x="3656737" y="2221991"/>
+            <a:ext cx="777240" cy="182880"/>
+          </a:xfrm>
+          <a:prstGeom prst="rect">
+            <a:avLst/>
+          </a:prstGeom>
+          <a:noFill/>
+          <a:ln/>
+        </p:spPr>
+        <p:txBody>
+          <a:bodyPr wrap="square" anchor="ctr" lIns="25400" rIns="25400" tIns="25400" bIns="25400">
+            <a:spAutoFit/>
+          </a:bodyPr>
+          <a:lstStyle/>
+          <a:p>
+            <a:pPr algn="l">
+              <a:lnSpc>
+                <a:spcPct val="100000"/>
+              </a:lnSpc>
+              <a:spcBef>
+                <a:spcPts val="0"/>
+              </a:spcBef>
+              <a:spcAft>
+                <a:spcPts val="0"/>
+              </a:spcAft>
+            </a:pPr>
+            <a:r>
+              <a:rPr sz="1450" b="1" i="0">
+                <a:solidFill>
+                  <a:srgbClr val="20242A"/>
+                </a:solidFill>
+                <a:latin typeface="Helvetica Neue"/>
+              </a:rPr>
+              <a:t>122</a:t>
+            </a:r>
+          </a:p>
+        </p:txBody>
+      </p:sp>
+      <p:sp>
+        <p:nvSpPr>
+          <p:cNvPr id="10" name="TextBox 9"/>
+          <p:cNvSpPr txBox="1"/>
+          <p:nvPr/>
+        </p:nvSpPr>
+        <p:spPr>
+          <a:xfrm>
+            <a:off x="365760" y="2514600"/>
+            <a:ext cx="3108097" cy="256032"/>
+          </a:xfrm>
+          <a:prstGeom prst="rect">
+            <a:avLst/>
+          </a:prstGeom>
+          <a:noFill/>
+          <a:ln/>
+        </p:spPr>
+        <p:txBody>
+          <a:bodyPr wrap="square" anchor="b" lIns="25400" rIns="25400" tIns="25400" bIns="25400">
+            <a:spAutoFit/>
+          </a:bodyPr>
+          <a:lstStyle/>
+          <a:p>
+            <a:pPr algn="l">
+              <a:lnSpc>
+                <a:spcPct val="112000"/>
+              </a:lnSpc>
+              <a:spcBef>
+                <a:spcPts val="0"/>
+              </a:spcBef>
+              <a:spcAft>
+                <a:spcPts val="0"/>
+              </a:spcAft>
+            </a:pPr>
+            <a:r>
+              <a:rPr sz="1250" b="0" i="0">
+                <a:solidFill>
+                  <a:srgbClr val="8A8478"/>
+                </a:solidFill>
+                <a:latin typeface="Helvetica Neue"/>
+              </a:rPr>
+              <a:t>泽兰</a:t>
+            </a:r>
+          </a:p>
+        </p:txBody>
+      </p:sp>
+      <p:sp>
+        <p:nvSpPr>
+          <p:cNvPr id="11" name="Rounded Rectangle 10"/>
+          <p:cNvSpPr/>
+          <p:nvPr/>
+        </p:nvSpPr>
+        <p:spPr>
+          <a:xfrm>
+            <a:off x="365760" y="2770632"/>
+            <a:ext cx="3108097" cy="182880"/>
+          </a:xfrm>
+          <a:prstGeom prst="roundRect">
+            <a:avLst>
+              <a:gd name="adj" fmla="val 50000"/>
+            </a:avLst>
+          </a:prstGeom>
+          <a:solidFill>
+            <a:srgbClr val="E7DFD1"/>
+          </a:solidFill>
+          <a:ln>
+            <a:noFill/>
+          </a:ln>
+          <a:effectLst/>
+        </p:spPr>
+        <p:style>
+          <a:lnRef idx="1">
+            <a:schemeClr val="accent1"/>
+          </a:lnRef>
+          <a:fillRef idx="3">
+            <a:schemeClr val="accent1"/>
+          </a:fillRef>
+          <a:effectRef idx="2">
+            <a:schemeClr val="accent1"/>
+          </a:effectRef>
+          <a:fontRef idx="minor">
+            <a:schemeClr val="lt1"/>
+          </a:fontRef>
+        </p:style>
+        <p:txBody>
+          <a:bodyPr rtlCol="0" anchor="ctr"/>
+          <a:lstStyle/>
+          <a:p>
+            <a:pPr algn="ctr"/>
+          </a:p>
+        </p:txBody>
+      </p:sp>
+      <p:sp>
+        <p:nvSpPr>
+          <p:cNvPr id="12" name="Rounded Rectangle 11"/>
+          <p:cNvSpPr/>
+          <p:nvPr/>
+        </p:nvSpPr>
+        <p:spPr>
+          <a:xfrm>
+            <a:off x="365760" y="2770632"/>
+            <a:ext cx="2615088" cy="182880"/>
+          </a:xfrm>
+          <a:prstGeom prst="roundRect">
+            <a:avLst>
+              <a:gd name="adj" fmla="val 50000"/>
+            </a:avLst>
+          </a:prstGeom>
+          <a:solidFill>
+            <a:srgbClr val="D8542A"/>
+          </a:solidFill>
+          <a:ln>
+            <a:noFill/>
+          </a:ln>
+          <a:effectLst/>
+        </p:spPr>
+        <p:style>
+          <a:lnRef idx="1">
+            <a:schemeClr val="accent1"/>
+          </a:lnRef>
+          <a:fillRef idx="3">
+            <a:schemeClr val="accent1"/>
+          </a:fillRef>
+          <a:effectRef idx="2">
+            <a:schemeClr val="accent1"/>
+          </a:effectRef>
+          <a:fontRef idx="minor">
+            <a:schemeClr val="lt1"/>
+          </a:fontRef>
+        </p:style>
+        <p:txBody>
+          <a:bodyPr rtlCol="0" anchor="ctr"/>
+          <a:lstStyle/>
+          <a:p>
+            <a:pPr algn="ctr"/>
+          </a:p>
+        </p:txBody>
+      </p:sp>
+      <p:sp>
+        <p:nvSpPr>
+          <p:cNvPr id="13" name="TextBox 12"/>
+          <p:cNvSpPr txBox="1"/>
+          <p:nvPr/>
+        </p:nvSpPr>
+        <p:spPr>
+          <a:xfrm>
+            <a:off x="3656737" y="2770632"/>
+            <a:ext cx="777240" cy="182880"/>
+          </a:xfrm>
+          <a:prstGeom prst="rect">
+            <a:avLst/>
+          </a:prstGeom>
+          <a:noFill/>
+          <a:ln/>
+        </p:spPr>
+        <p:txBody>
+          <a:bodyPr wrap="square" anchor="ctr" lIns="25400" rIns="25400" tIns="25400" bIns="25400">
+            <a:spAutoFit/>
+          </a:bodyPr>
+          <a:lstStyle/>
+          <a:p>
+            <a:pPr algn="l">
+              <a:lnSpc>
+                <a:spcPct val="100000"/>
+              </a:lnSpc>
+              <a:spcBef>
+                <a:spcPts val="0"/>
+              </a:spcBef>
+              <a:spcAft>
+                <a:spcPts val="0"/>
+              </a:spcAft>
+            </a:pPr>
+            <a:r>
+              <a:rPr sz="1450" b="1" i="0">
+                <a:solidFill>
+                  <a:srgbClr val="20242A"/>
+                </a:solidFill>
+                <a:latin typeface="Helvetica Neue"/>
+              </a:rPr>
+              <a:t>122</a:t>
+            </a:r>
+          </a:p>
+        </p:txBody>
+      </p:sp>
+      <p:sp>
+        <p:nvSpPr>
+          <p:cNvPr id="14" name="TextBox 13"/>
+          <p:cNvSpPr txBox="1"/>
+          <p:nvPr/>
+        </p:nvSpPr>
+        <p:spPr>
+          <a:xfrm>
+            <a:off x="365760" y="3063240"/>
+            <a:ext cx="3108097" cy="256032"/>
+          </a:xfrm>
+          <a:prstGeom prst="rect">
+            <a:avLst/>
+          </a:prstGeom>
+          <a:noFill/>
+          <a:ln/>
+        </p:spPr>
+        <p:txBody>
+          <a:bodyPr wrap="square" anchor="b" lIns="25400" rIns="25400" tIns="25400" bIns="25400">
+            <a:spAutoFit/>
+          </a:bodyPr>
+          <a:lstStyle/>
+          <a:p>
+            <a:pPr algn="l">
+              <a:lnSpc>
+                <a:spcPct val="112000"/>
+              </a:lnSpc>
+              <a:spcBef>
+                <a:spcPts val="0"/>
+              </a:spcBef>
+              <a:spcAft>
+                <a:spcPts val="0"/>
+              </a:spcAft>
+            </a:pPr>
+            <a:r>
+              <a:rPr sz="1250" b="0" i="0">
+                <a:solidFill>
+                  <a:srgbClr val="8A8478"/>
+                </a:solidFill>
+                <a:latin typeface="Helvetica Neue"/>
+              </a:rPr>
+              <a:t>荷兰（平均）</a:t>
+            </a:r>
+          </a:p>
+        </p:txBody>
+      </p:sp>
+      <p:sp>
+        <p:nvSpPr>
+          <p:cNvPr id="15" name="Rounded Rectangle 14"/>
+          <p:cNvSpPr/>
+          <p:nvPr/>
+        </p:nvSpPr>
+        <p:spPr>
+          <a:xfrm>
+            <a:off x="365760" y="3319272"/>
+            <a:ext cx="3108097" cy="182880"/>
+          </a:xfrm>
+          <a:prstGeom prst="roundRect">
+            <a:avLst>
+              <a:gd name="adj" fmla="val 50000"/>
+            </a:avLst>
+          </a:prstGeom>
+          <a:solidFill>
+            <a:srgbClr val="E7DFD1"/>
+          </a:solidFill>
+          <a:ln>
+            <a:noFill/>
+          </a:ln>
+          <a:effectLst/>
+        </p:spPr>
+        <p:style>
+          <a:lnRef idx="1">
+            <a:schemeClr val="accent1"/>
+          </a:lnRef>
+          <a:fillRef idx="3">
+            <a:schemeClr val="accent1"/>
+          </a:fillRef>
+          <a:effectRef idx="2">
+            <a:schemeClr val="accent1"/>
+          </a:effectRef>
+          <a:fontRef idx="minor">
+            <a:schemeClr val="lt1"/>
+          </a:fontRef>
+        </p:style>
+        <p:txBody>
+          <a:bodyPr rtlCol="0" anchor="ctr"/>
+          <a:lstStyle/>
+          <a:p>
+            <a:pPr algn="ctr"/>
+          </a:p>
+        </p:txBody>
+      </p:sp>
+      <p:sp>
+        <p:nvSpPr>
+          <p:cNvPr id="16" name="Rounded Rectangle 15"/>
+          <p:cNvSpPr/>
+          <p:nvPr/>
+        </p:nvSpPr>
+        <p:spPr>
+          <a:xfrm>
+            <a:off x="365760" y="3319272"/>
+            <a:ext cx="1950599" cy="182880"/>
+          </a:xfrm>
+          <a:prstGeom prst="roundRect">
+            <a:avLst>
+              <a:gd name="adj" fmla="val 50000"/>
+            </a:avLst>
           </a:prstGeom>
           <a:solidFill>
             <a:srgbClr val="0E5C63"/>
@@ -5678,23 +6142,69 @@
       </p:sp>
       <p:sp>
         <p:nvSpPr>
-          <p:cNvPr id="6" name="TextBox 5"/>
-          <p:cNvSpPr txBox="1"/>
-          <p:nvPr/>
-        </p:nvSpPr>
-        <p:spPr>
-          <a:xfrm>
-            <a:off x="365760" y="1508760"/>
-            <a:ext cx="4251097" cy="274320"/>
-          </a:xfrm>
-          <a:prstGeom prst="rect">
-            <a:avLst/>
-          </a:prstGeom>
-          <a:noFill/>
-          <a:ln/>
-        </p:spPr>
-        <p:txBody>
-          <a:bodyPr wrap="square" anchor="t" lIns="25400" rIns="25400" tIns="25400" bIns="25400">
+          <p:cNvPr id="17" name="TextBox 16"/>
+          <p:cNvSpPr txBox="1"/>
+          <p:nvPr/>
+        </p:nvSpPr>
+        <p:spPr>
+          <a:xfrm>
+            <a:off x="3656737" y="3319272"/>
+            <a:ext cx="777240" cy="182880"/>
+          </a:xfrm>
+          <a:prstGeom prst="rect">
+            <a:avLst/>
+          </a:prstGeom>
+          <a:noFill/>
+          <a:ln/>
+        </p:spPr>
+        <p:txBody>
+          <a:bodyPr wrap="square" anchor="ctr" lIns="25400" rIns="25400" tIns="25400" bIns="25400">
+            <a:spAutoFit/>
+          </a:bodyPr>
+          <a:lstStyle/>
+          <a:p>
+            <a:pPr algn="l">
+              <a:lnSpc>
+                <a:spcPct val="100000"/>
+              </a:lnSpc>
+              <a:spcBef>
+                <a:spcPts val="0"/>
+              </a:spcBef>
+              <a:spcAft>
+                <a:spcPts val="0"/>
+              </a:spcAft>
+            </a:pPr>
+            <a:r>
+              <a:rPr sz="1450" b="1" i="0">
+                <a:solidFill>
+                  <a:srgbClr val="20242A"/>
+                </a:solidFill>
+                <a:latin typeface="Helvetica Neue"/>
+              </a:rPr>
+              <a:t>91</a:t>
+            </a:r>
+          </a:p>
+        </p:txBody>
+      </p:sp>
+      <p:sp>
+        <p:nvSpPr>
+          <p:cNvPr id="18" name="TextBox 17"/>
+          <p:cNvSpPr txBox="1"/>
+          <p:nvPr/>
+        </p:nvSpPr>
+        <p:spPr>
+          <a:xfrm>
+            <a:off x="365760" y="3611880"/>
+            <a:ext cx="3108097" cy="256032"/>
+          </a:xfrm>
+          <a:prstGeom prst="rect">
+            <a:avLst/>
+          </a:prstGeom>
+          <a:noFill/>
+          <a:ln/>
+        </p:spPr>
+        <p:txBody>
+          <a:bodyPr wrap="square" anchor="b" lIns="25400" rIns="25400" tIns="25400" bIns="25400">
             <a:spAutoFit/>
           </a:bodyPr>
           <a:lstStyle/>
@@ -5711,72 +6221,26 @@
               </a:spcAft>
             </a:pPr>
             <a:r>
-              <a:rPr sz="950" b="1" i="0">
+              <a:rPr sz="1250" b="0" i="0">
                 <a:solidFill>
                   <a:srgbClr val="8A8478"/>
                 </a:solidFill>
-                <a:latin typeface="Courier New"/>
-              </a:rPr>
-              <a:t>每 100 名失业者对应的空缺数</a:t>
-            </a:r>
-          </a:p>
-        </p:txBody>
-      </p:sp>
-      <p:sp>
-        <p:nvSpPr>
-          <p:cNvPr id="7" name="TextBox 6"/>
-          <p:cNvSpPr txBox="1"/>
-          <p:nvPr/>
-        </p:nvSpPr>
-        <p:spPr>
-          <a:xfrm>
-            <a:off x="365760" y="1965960"/>
-            <a:ext cx="3108097" cy="256032"/>
-          </a:xfrm>
-          <a:prstGeom prst="rect">
-            <a:avLst/>
-          </a:prstGeom>
-          <a:noFill/>
-          <a:ln/>
-        </p:spPr>
-        <p:txBody>
-          <a:bodyPr wrap="square" anchor="b" lIns="25400" rIns="25400" tIns="25400" bIns="25400">
-            <a:spAutoFit/>
-          </a:bodyPr>
-          <a:lstStyle/>
-          <a:p>
-            <a:pPr algn="l">
-              <a:lnSpc>
-                <a:spcPct val="112000"/>
-              </a:lnSpc>
-              <a:spcBef>
-                <a:spcPts val="0"/>
-              </a:spcBef>
-              <a:spcAft>
-                <a:spcPts val="0"/>
-              </a:spcAft>
-            </a:pPr>
-            <a:r>
-              <a:rPr sz="1250" b="0" i="0">
-                <a:solidFill>
-                  <a:srgbClr val="8A8478"/>
-                </a:solidFill>
                 <a:latin typeface="Helvetica Neue"/>
               </a:rPr>
-              <a:t>乌得勒支</a:t>
-            </a:r>
-          </a:p>
-        </p:txBody>
-      </p:sp>
-      <p:sp>
-        <p:nvSpPr>
-          <p:cNvPr id="8" name="Rounded Rectangle 7"/>
+              <a:t>格罗宁根（复苏中）</a:t>
+            </a:r>
+          </a:p>
+        </p:txBody>
+      </p:sp>
+      <p:sp>
+        <p:nvSpPr>
+          <p:cNvPr id="19" name="Rounded Rectangle 18"/>
           <p:cNvSpPr/>
           <p:nvPr/>
         </p:nvSpPr>
         <p:spPr>
           <a:xfrm>
-            <a:off x="365760" y="2221991"/>
+            <a:off x="365760" y="3867912"/>
             <a:ext cx="3108097" cy="182880"/>
           </a:xfrm>
           <a:prstGeom prst="roundRect">
@@ -5816,559 +6280,7 @@
       </p:sp>
       <p:sp>
         <p:nvSpPr>
-          <p:cNvPr id="9" name="Rounded Rectangle 8"/>
-          <p:cNvSpPr/>
-          <p:nvPr/>
-        </p:nvSpPr>
-        <p:spPr>
-          <a:xfrm>
-            <a:off x="365760" y="2221991"/>
-            <a:ext cx="2615088" cy="182880"/>
-          </a:xfrm>
-          <a:prstGeom prst="roundRect">
-            <a:avLst>
-              <a:gd name="adj" fmla="val 50000"/>
-            </a:avLst>
-          </a:prstGeom>
-          <a:solidFill>
-            <a:srgbClr val="D8542A"/>
-          </a:solidFill>
-          <a:ln>
-            <a:noFill/>
-          </a:ln>
-          <a:effectLst/>
-        </p:spPr>
-        <p:style>
-          <a:lnRef idx="1">
-            <a:schemeClr val="accent1"/>
-          </a:lnRef>
-          <a:fillRef idx="3">
-            <a:schemeClr val="accent1"/>
-          </a:fillRef>
-          <a:effectRef idx="2">
-            <a:schemeClr val="accent1"/>
-          </a:effectRef>
-          <a:fontRef idx="minor">
-            <a:schemeClr val="lt1"/>
-          </a:fontRef>
-        </p:style>
-        <p:txBody>
-          <a:bodyPr rtlCol="0" anchor="ctr"/>
-          <a:lstStyle/>
-          <a:p>
-            <a:pPr algn="ctr"/>
-          </a:p>
-        </p:txBody>
-      </p:sp>
-      <p:sp>
-        <p:nvSpPr>
-          <p:cNvPr id="10" name="TextBox 9"/>
-          <p:cNvSpPr txBox="1"/>
-          <p:nvPr/>
-        </p:nvSpPr>
-        <p:spPr>
-          <a:xfrm>
-            <a:off x="3656737" y="2221991"/>
-            <a:ext cx="777240" cy="182880"/>
-          </a:xfrm>
-          <a:prstGeom prst="rect">
-            <a:avLst/>
-          </a:prstGeom>
-          <a:noFill/>
-          <a:ln/>
-        </p:spPr>
-        <p:txBody>
-          <a:bodyPr wrap="square" anchor="ctr" lIns="25400" rIns="25400" tIns="25400" bIns="25400">
-            <a:spAutoFit/>
-          </a:bodyPr>
-          <a:lstStyle/>
-          <a:p>
-            <a:pPr algn="l">
-              <a:lnSpc>
-                <a:spcPct val="100000"/>
-              </a:lnSpc>
-              <a:spcBef>
-                <a:spcPts val="0"/>
-              </a:spcBef>
-              <a:spcAft>
-                <a:spcPts val="0"/>
-              </a:spcAft>
-            </a:pPr>
-            <a:r>
-              <a:rPr sz="1450" b="1" i="0">
-                <a:solidFill>
-                  <a:srgbClr val="20242A"/>
-                </a:solidFill>
-                <a:latin typeface="Helvetica Neue"/>
-              </a:rPr>
-              <a:t>122</a:t>
-            </a:r>
-          </a:p>
-        </p:txBody>
-      </p:sp>
-      <p:sp>
-        <p:nvSpPr>
-          <p:cNvPr id="11" name="TextBox 10"/>
-          <p:cNvSpPr txBox="1"/>
-          <p:nvPr/>
-        </p:nvSpPr>
-        <p:spPr>
-          <a:xfrm>
-            <a:off x="365760" y="2514600"/>
-            <a:ext cx="3108097" cy="256032"/>
-          </a:xfrm>
-          <a:prstGeom prst="rect">
-            <a:avLst/>
-          </a:prstGeom>
-          <a:noFill/>
-          <a:ln/>
-        </p:spPr>
-        <p:txBody>
-          <a:bodyPr wrap="square" anchor="b" lIns="25400" rIns="25400" tIns="25400" bIns="25400">
-            <a:spAutoFit/>
-          </a:bodyPr>
-          <a:lstStyle/>
-          <a:p>
-            <a:pPr algn="l">
-              <a:lnSpc>
-                <a:spcPct val="112000"/>
-              </a:lnSpc>
-              <a:spcBef>
-                <a:spcPts val="0"/>
-              </a:spcBef>
-              <a:spcAft>
-                <a:spcPts val="0"/>
-              </a:spcAft>
-            </a:pPr>
-            <a:r>
-              <a:rPr sz="1250" b="0" i="0">
-                <a:solidFill>
-                  <a:srgbClr val="8A8478"/>
-                </a:solidFill>
-                <a:latin typeface="Helvetica Neue"/>
-              </a:rPr>
-              <a:t>泽兰</a:t>
-            </a:r>
-          </a:p>
-        </p:txBody>
-      </p:sp>
-      <p:sp>
-        <p:nvSpPr>
-          <p:cNvPr id="12" name="Rounded Rectangle 11"/>
-          <p:cNvSpPr/>
-          <p:nvPr/>
-        </p:nvSpPr>
-        <p:spPr>
-          <a:xfrm>
-            <a:off x="365760" y="2770632"/>
-            <a:ext cx="3108097" cy="182880"/>
-          </a:xfrm>
-          <a:prstGeom prst="roundRect">
-            <a:avLst>
-              <a:gd name="adj" fmla="val 50000"/>
-            </a:avLst>
-          </a:prstGeom>
-          <a:solidFill>
-            <a:srgbClr val="E7DFD1"/>
-          </a:solidFill>
-          <a:ln>
-            <a:noFill/>
-          </a:ln>
-          <a:effectLst/>
-        </p:spPr>
-        <p:style>
-          <a:lnRef idx="1">
-            <a:schemeClr val="accent1"/>
-          </a:lnRef>
-          <a:fillRef idx="3">
-            <a:schemeClr val="accent1"/>
-          </a:fillRef>
-          <a:effectRef idx="2">
-            <a:schemeClr val="accent1"/>
-          </a:effectRef>
-          <a:fontRef idx="minor">
-            <a:schemeClr val="lt1"/>
-          </a:fontRef>
-        </p:style>
-        <p:txBody>
-          <a:bodyPr rtlCol="0" anchor="ctr"/>
-          <a:lstStyle/>
-          <a:p>
-            <a:pPr algn="ctr"/>
-          </a:p>
-        </p:txBody>
-      </p:sp>
-      <p:sp>
-        <p:nvSpPr>
-          <p:cNvPr id="13" name="Rounded Rectangle 12"/>
-          <p:cNvSpPr/>
-          <p:nvPr/>
-        </p:nvSpPr>
-        <p:spPr>
-          <a:xfrm>
-            <a:off x="365760" y="2770632"/>
-            <a:ext cx="2615088" cy="182880"/>
-          </a:xfrm>
-          <a:prstGeom prst="roundRect">
-            <a:avLst>
-              <a:gd name="adj" fmla="val 50000"/>
-            </a:avLst>
-          </a:prstGeom>
-          <a:solidFill>
-            <a:srgbClr val="D8542A"/>
-          </a:solidFill>
-          <a:ln>
-            <a:noFill/>
-          </a:ln>
-          <a:effectLst/>
-        </p:spPr>
-        <p:style>
-          <a:lnRef idx="1">
-            <a:schemeClr val="accent1"/>
-          </a:lnRef>
-          <a:fillRef idx="3">
-            <a:schemeClr val="accent1"/>
-          </a:fillRef>
-          <a:effectRef idx="2">
-            <a:schemeClr val="accent1"/>
-          </a:effectRef>
-          <a:fontRef idx="minor">
-            <a:schemeClr val="lt1"/>
-          </a:fontRef>
-        </p:style>
-        <p:txBody>
-          <a:bodyPr rtlCol="0" anchor="ctr"/>
-          <a:lstStyle/>
-          <a:p>
-            <a:pPr algn="ctr"/>
-          </a:p>
-        </p:txBody>
-      </p:sp>
-      <p:sp>
-        <p:nvSpPr>
-          <p:cNvPr id="14" name="TextBox 13"/>
-          <p:cNvSpPr txBox="1"/>
-          <p:nvPr/>
-        </p:nvSpPr>
-        <p:spPr>
-          <a:xfrm>
-            <a:off x="3656737" y="2770632"/>
-            <a:ext cx="777240" cy="182880"/>
-          </a:xfrm>
-          <a:prstGeom prst="rect">
-            <a:avLst/>
-          </a:prstGeom>
-          <a:noFill/>
-          <a:ln/>
-        </p:spPr>
-        <p:txBody>
-          <a:bodyPr wrap="square" anchor="ctr" lIns="25400" rIns="25400" tIns="25400" bIns="25400">
-            <a:spAutoFit/>
-          </a:bodyPr>
-          <a:lstStyle/>
-          <a:p>
-            <a:pPr algn="l">
-              <a:lnSpc>
-                <a:spcPct val="100000"/>
-              </a:lnSpc>
-              <a:spcBef>
-                <a:spcPts val="0"/>
-              </a:spcBef>
-              <a:spcAft>
-                <a:spcPts val="0"/>
-              </a:spcAft>
-            </a:pPr>
-            <a:r>
-              <a:rPr sz="1450" b="1" i="0">
-                <a:solidFill>
-                  <a:srgbClr val="20242A"/>
-                </a:solidFill>
-                <a:latin typeface="Helvetica Neue"/>
-              </a:rPr>
-              <a:t>122</a:t>
-            </a:r>
-          </a:p>
-        </p:txBody>
-      </p:sp>
-      <p:sp>
-        <p:nvSpPr>
-          <p:cNvPr id="15" name="TextBox 14"/>
-          <p:cNvSpPr txBox="1"/>
-          <p:nvPr/>
-        </p:nvSpPr>
-        <p:spPr>
-          <a:xfrm>
-            <a:off x="365760" y="3063240"/>
-            <a:ext cx="3108097" cy="256032"/>
-          </a:xfrm>
-          <a:prstGeom prst="rect">
-            <a:avLst/>
-          </a:prstGeom>
-          <a:noFill/>
-          <a:ln/>
-        </p:spPr>
-        <p:txBody>
-          <a:bodyPr wrap="square" anchor="b" lIns="25400" rIns="25400" tIns="25400" bIns="25400">
-            <a:spAutoFit/>
-          </a:bodyPr>
-          <a:lstStyle/>
-          <a:p>
-            <a:pPr algn="l">
-              <a:lnSpc>
-                <a:spcPct val="112000"/>
-              </a:lnSpc>
-              <a:spcBef>
-                <a:spcPts val="0"/>
-              </a:spcBef>
-              <a:spcAft>
-                <a:spcPts val="0"/>
-              </a:spcAft>
-            </a:pPr>
-            <a:r>
-              <a:rPr sz="1250" b="0" i="0">
-                <a:solidFill>
-                  <a:srgbClr val="8A8478"/>
-                </a:solidFill>
-                <a:latin typeface="Helvetica Neue"/>
-              </a:rPr>
-              <a:t>荷兰（平均）</a:t>
-            </a:r>
-          </a:p>
-        </p:txBody>
-      </p:sp>
-      <p:sp>
-        <p:nvSpPr>
-          <p:cNvPr id="16" name="Rounded Rectangle 15"/>
-          <p:cNvSpPr/>
-          <p:nvPr/>
-        </p:nvSpPr>
-        <p:spPr>
-          <a:xfrm>
-            <a:off x="365760" y="3319272"/>
-            <a:ext cx="3108097" cy="182880"/>
-          </a:xfrm>
-          <a:prstGeom prst="roundRect">
-            <a:avLst>
-              <a:gd name="adj" fmla="val 50000"/>
-            </a:avLst>
-          </a:prstGeom>
-          <a:solidFill>
-            <a:srgbClr val="E7DFD1"/>
-          </a:solidFill>
-          <a:ln>
-            <a:noFill/>
-          </a:ln>
-          <a:effectLst/>
-        </p:spPr>
-        <p:style>
-          <a:lnRef idx="1">
-            <a:schemeClr val="accent1"/>
-          </a:lnRef>
-          <a:fillRef idx="3">
-            <a:schemeClr val="accent1"/>
-          </a:fillRef>
-          <a:effectRef idx="2">
-            <a:schemeClr val="accent1"/>
-          </a:effectRef>
-          <a:fontRef idx="minor">
-            <a:schemeClr val="lt1"/>
-          </a:fontRef>
-        </p:style>
-        <p:txBody>
-          <a:bodyPr rtlCol="0" anchor="ctr"/>
-          <a:lstStyle/>
-          <a:p>
-            <a:pPr algn="ctr"/>
-          </a:p>
-        </p:txBody>
-      </p:sp>
-      <p:sp>
-        <p:nvSpPr>
-          <p:cNvPr id="17" name="Rounded Rectangle 16"/>
-          <p:cNvSpPr/>
-          <p:nvPr/>
-        </p:nvSpPr>
-        <p:spPr>
-          <a:xfrm>
-            <a:off x="365760" y="3319272"/>
-            <a:ext cx="1950599" cy="182880"/>
-          </a:xfrm>
-          <a:prstGeom prst="roundRect">
-            <a:avLst>
-              <a:gd name="adj" fmla="val 50000"/>
-            </a:avLst>
-          </a:prstGeom>
-          <a:solidFill>
-            <a:srgbClr val="0E5C63"/>
-          </a:solidFill>
-          <a:ln>
-            <a:noFill/>
-          </a:ln>
-          <a:effectLst/>
-        </p:spPr>
-        <p:style>
-          <a:lnRef idx="1">
-            <a:schemeClr val="accent1"/>
-          </a:lnRef>
-          <a:fillRef idx="3">
-            <a:schemeClr val="accent1"/>
-          </a:fillRef>
-          <a:effectRef idx="2">
-            <a:schemeClr val="accent1"/>
-          </a:effectRef>
-          <a:fontRef idx="minor">
-            <a:schemeClr val="lt1"/>
-          </a:fontRef>
-        </p:style>
-        <p:txBody>
-          <a:bodyPr rtlCol="0" anchor="ctr"/>
-          <a:lstStyle/>
-          <a:p>
-            <a:pPr algn="ctr"/>
-          </a:p>
-        </p:txBody>
-      </p:sp>
-      <p:sp>
-        <p:nvSpPr>
-          <p:cNvPr id="18" name="TextBox 17"/>
-          <p:cNvSpPr txBox="1"/>
-          <p:nvPr/>
-        </p:nvSpPr>
-        <p:spPr>
-          <a:xfrm>
-            <a:off x="3656737" y="3319272"/>
-            <a:ext cx="777240" cy="182880"/>
-          </a:xfrm>
-          <a:prstGeom prst="rect">
-            <a:avLst/>
-          </a:prstGeom>
-          <a:noFill/>
-          <a:ln/>
-        </p:spPr>
-        <p:txBody>
-          <a:bodyPr wrap="square" anchor="ctr" lIns="25400" rIns="25400" tIns="25400" bIns="25400">
-            <a:spAutoFit/>
-          </a:bodyPr>
-          <a:lstStyle/>
-          <a:p>
-            <a:pPr algn="l">
-              <a:lnSpc>
-                <a:spcPct val="100000"/>
-              </a:lnSpc>
-              <a:spcBef>
-                <a:spcPts val="0"/>
-              </a:spcBef>
-              <a:spcAft>
-                <a:spcPts val="0"/>
-              </a:spcAft>
-            </a:pPr>
-            <a:r>
-              <a:rPr sz="1450" b="1" i="0">
-                <a:solidFill>
-                  <a:srgbClr val="20242A"/>
-                </a:solidFill>
-                <a:latin typeface="Helvetica Neue"/>
-              </a:rPr>
-              <a:t>91</a:t>
-            </a:r>
-          </a:p>
-        </p:txBody>
-      </p:sp>
-      <p:sp>
-        <p:nvSpPr>
-          <p:cNvPr id="19" name="TextBox 18"/>
-          <p:cNvSpPr txBox="1"/>
-          <p:nvPr/>
-        </p:nvSpPr>
-        <p:spPr>
-          <a:xfrm>
-            <a:off x="365760" y="3611880"/>
-            <a:ext cx="3108097" cy="256032"/>
-          </a:xfrm>
-          <a:prstGeom prst="rect">
-            <a:avLst/>
-          </a:prstGeom>
-          <a:noFill/>
-          <a:ln/>
-        </p:spPr>
-        <p:txBody>
-          <a:bodyPr wrap="square" anchor="b" lIns="25400" rIns="25400" tIns="25400" bIns="25400">
-            <a:spAutoFit/>
-          </a:bodyPr>
-          <a:lstStyle/>
-          <a:p>
-            <a:pPr algn="l">
-              <a:lnSpc>
-                <a:spcPct val="112000"/>
-              </a:lnSpc>
-              <a:spcBef>
-                <a:spcPts val="0"/>
-              </a:spcBef>
-              <a:spcAft>
-                <a:spcPts val="0"/>
-              </a:spcAft>
-            </a:pPr>
-            <a:r>
-              <a:rPr sz="1250" b="0" i="0">
-                <a:solidFill>
-                  <a:srgbClr val="8A8478"/>
-                </a:solidFill>
-                <a:latin typeface="Helvetica Neue"/>
-              </a:rPr>
-              <a:t>格罗宁根（复苏中）</a:t>
-            </a:r>
-          </a:p>
-        </p:txBody>
-      </p:sp>
-      <p:sp>
-        <p:nvSpPr>
           <p:cNvPr id="20" name="Rounded Rectangle 19"/>
-          <p:cNvSpPr/>
-          <p:nvPr/>
-        </p:nvSpPr>
-        <p:spPr>
-          <a:xfrm>
-            <a:off x="365760" y="3867912"/>
-            <a:ext cx="3108097" cy="182880"/>
-          </a:xfrm>
-          <a:prstGeom prst="roundRect">
-            <a:avLst>
-              <a:gd name="adj" fmla="val 50000"/>
-            </a:avLst>
-          </a:prstGeom>
-          <a:solidFill>
-            <a:srgbClr val="E7DFD1"/>
-          </a:solidFill>
-          <a:ln>
-            <a:noFill/>
-          </a:ln>
-          <a:effectLst/>
-        </p:spPr>
-        <p:style>
-          <a:lnRef idx="1">
-            <a:schemeClr val="accent1"/>
-          </a:lnRef>
-          <a:fillRef idx="3">
-            <a:schemeClr val="accent1"/>
-          </a:fillRef>
-          <a:effectRef idx="2">
-            <a:schemeClr val="accent1"/>
-          </a:effectRef>
-          <a:fontRef idx="minor">
-            <a:schemeClr val="lt1"/>
-          </a:fontRef>
-        </p:style>
-        <p:txBody>
-          <a:bodyPr rtlCol="0" anchor="ctr"/>
-          <a:lstStyle/>
-          <a:p>
-            <a:pPr algn="ctr"/>
-          </a:p>
-        </p:txBody>
-      </p:sp>
-      <p:sp>
-        <p:nvSpPr>
-          <p:cNvPr id="21" name="Rounded Rectangle 20"/>
           <p:cNvSpPr/>
           <p:nvPr/>
         </p:nvSpPr>
@@ -6414,7 +6326,7 @@
       </p:sp>
       <p:sp>
         <p:nvSpPr>
-          <p:cNvPr id="22" name="TextBox 21"/>
+          <p:cNvPr id="21" name="TextBox 20"/>
           <p:cNvSpPr txBox="1"/>
           <p:nvPr/>
         </p:nvSpPr>
@@ -6460,7 +6372,7 @@
       </p:sp>
       <p:sp>
         <p:nvSpPr>
-          <p:cNvPr id="23" name="Rounded Rectangle 22"/>
+          <p:cNvPr id="22" name="Rounded Rectangle 21"/>
           <p:cNvSpPr/>
           <p:nvPr/>
         </p:nvSpPr>
@@ -6508,7 +6420,7 @@
       </p:sp>
       <p:sp>
         <p:nvSpPr>
-          <p:cNvPr id="24" name="TextBox 23"/>
+          <p:cNvPr id="23" name="TextBox 22"/>
           <p:cNvSpPr txBox="1"/>
           <p:nvPr/>
         </p:nvSpPr>
@@ -6563,7 +6475,7 @@
       </p:sp>
       <p:sp>
         <p:nvSpPr>
-          <p:cNvPr id="25" name="TextBox 24"/>
+          <p:cNvPr id="24" name="TextBox 23"/>
           <p:cNvSpPr txBox="1"/>
           <p:nvPr/>
         </p:nvSpPr>
@@ -6609,7 +6521,7 @@
       </p:sp>
       <p:sp>
         <p:nvSpPr>
-          <p:cNvPr id="26" name="Rectangle 25"/>
+          <p:cNvPr id="25" name="Rectangle 24"/>
           <p:cNvSpPr/>
           <p:nvPr/>
         </p:nvSpPr>
@@ -6653,7 +6565,7 @@
       </p:sp>
       <p:sp>
         <p:nvSpPr>
-          <p:cNvPr id="27" name="TextBox 26"/>
+          <p:cNvPr id="26" name="TextBox 25"/>
           <p:cNvSpPr txBox="1"/>
           <p:nvPr/>
         </p:nvSpPr>
@@ -6699,7 +6611,7 @@
       </p:sp>
       <p:sp>
         <p:nvSpPr>
-          <p:cNvPr id="28" name="TextBox 27"/>
+          <p:cNvPr id="27" name="TextBox 26"/>
           <p:cNvSpPr txBox="1"/>
           <p:nvPr/>
         </p:nvSpPr>
@@ -6745,7 +6657,7 @@
       </p:sp>
       <p:sp>
         <p:nvSpPr>
-          <p:cNvPr id="29" name="Rectangle 28"/>
+          <p:cNvPr id="28" name="Rectangle 27"/>
           <p:cNvSpPr/>
           <p:nvPr/>
         </p:nvSpPr>
@@ -6789,7 +6701,7 @@
       </p:sp>
       <p:sp>
         <p:nvSpPr>
-          <p:cNvPr id="30" name="TextBox 29"/>
+          <p:cNvPr id="29" name="TextBox 28"/>
           <p:cNvSpPr txBox="1"/>
           <p:nvPr/>
         </p:nvSpPr>
@@ -6835,7 +6747,7 @@
       </p:sp>
       <p:sp>
         <p:nvSpPr>
-          <p:cNvPr id="31" name="TextBox 30"/>
+          <p:cNvPr id="30" name="TextBox 29"/>
           <p:cNvSpPr txBox="1"/>
           <p:nvPr/>
         </p:nvSpPr>
@@ -6881,7 +6793,7 @@
       </p:sp>
       <p:sp>
         <p:nvSpPr>
-          <p:cNvPr id="32" name="TextBox 31"/>
+          <p:cNvPr id="31" name="TextBox 30"/>
           <p:cNvSpPr txBox="1"/>
           <p:nvPr/>
         </p:nvSpPr>
@@ -6936,7 +6848,7 @@
       </p:sp>
       <p:sp>
         <p:nvSpPr>
-          <p:cNvPr id="33" name="TextBox 32"/>
+          <p:cNvPr id="32" name="TextBox 31"/>
           <p:cNvSpPr txBox="1"/>
           <p:nvPr/>
         </p:nvSpPr>
@@ -6982,7 +6894,7 @@
       </p:sp>
       <p:sp>
         <p:nvSpPr>
-          <p:cNvPr id="34" name="TextBox 33"/>
+          <p:cNvPr id="33" name="TextBox 32"/>
           <p:cNvSpPr txBox="1"/>
           <p:nvPr/>
         </p:nvSpPr>
@@ -10151,51 +10063,7 @@
       </p:sp>
       <p:sp>
         <p:nvSpPr>
-          <p:cNvPr id="5" name="Rectangle 4"/>
-          <p:cNvSpPr/>
-          <p:nvPr/>
-        </p:nvSpPr>
-        <p:spPr>
-          <a:xfrm>
-            <a:off x="566928" y="1191006"/>
-            <a:ext cx="1097280" cy="45720"/>
-          </a:xfrm>
-          <a:prstGeom prst="rect">
-            <a:avLst/>
-          </a:prstGeom>
-          <a:solidFill>
-            <a:srgbClr val="D8542A"/>
-          </a:solidFill>
-          <a:ln>
-            <a:noFill/>
-          </a:ln>
-          <a:effectLst/>
-        </p:spPr>
-        <p:style>
-          <a:lnRef idx="1">
-            <a:schemeClr val="accent1"/>
-          </a:lnRef>
-          <a:fillRef idx="3">
-            <a:schemeClr val="accent1"/>
-          </a:fillRef>
-          <a:effectRef idx="2">
-            <a:schemeClr val="accent1"/>
-          </a:effectRef>
-          <a:fontRef idx="minor">
-            <a:schemeClr val="lt1"/>
-          </a:fontRef>
-        </p:style>
-        <p:txBody>
-          <a:bodyPr rtlCol="0" anchor="ctr"/>
-          <a:lstStyle/>
-          <a:p>
-            <a:pPr algn="ctr"/>
-          </a:p>
-        </p:txBody>
-      </p:sp>
-      <p:sp>
-        <p:nvSpPr>
-          <p:cNvPr id="6" name="TextBox 5"/>
+          <p:cNvPr id="5" name="TextBox 4"/>
           <p:cNvSpPr txBox="1"/>
           <p:nvPr/>
         </p:nvSpPr>
@@ -10241,7 +10109,7 @@
       </p:sp>
       <p:sp>
         <p:nvSpPr>
-          <p:cNvPr id="7" name="Rounded Rectangle 6"/>
+          <p:cNvPr id="6" name="Rounded Rectangle 5"/>
           <p:cNvSpPr/>
           <p:nvPr/>
         </p:nvSpPr>
@@ -10289,7 +10157,7 @@
       </p:sp>
       <p:sp>
         <p:nvSpPr>
-          <p:cNvPr id="8" name="Round Same Side Corner Rectangle 7"/>
+          <p:cNvPr id="7" name="Round Same Side Corner Rectangle 6"/>
           <p:cNvSpPr/>
           <p:nvPr/>
         </p:nvSpPr>
@@ -10336,7 +10204,7 @@
       </p:sp>
       <p:sp>
         <p:nvSpPr>
-          <p:cNvPr id="9" name="TextBox 8"/>
+          <p:cNvPr id="8" name="TextBox 7"/>
           <p:cNvSpPr txBox="1"/>
           <p:nvPr/>
         </p:nvSpPr>
@@ -10382,7 +10250,7 @@
       </p:sp>
       <p:sp>
         <p:nvSpPr>
-          <p:cNvPr id="10" name="TextBox 9"/>
+          <p:cNvPr id="9" name="TextBox 8"/>
           <p:cNvSpPr txBox="1"/>
           <p:nvPr/>
         </p:nvSpPr>
@@ -10428,7 +10296,7 @@
       </p:sp>
       <p:sp>
         <p:nvSpPr>
-          <p:cNvPr id="11" name="TextBox 10"/>
+          <p:cNvPr id="10" name="TextBox 9"/>
           <p:cNvSpPr txBox="1"/>
           <p:nvPr/>
         </p:nvSpPr>
@@ -10474,7 +10342,7 @@
       </p:sp>
       <p:sp>
         <p:nvSpPr>
-          <p:cNvPr id="12" name="Rounded Rectangle 11"/>
+          <p:cNvPr id="11" name="Rounded Rectangle 10"/>
           <p:cNvSpPr/>
           <p:nvPr/>
         </p:nvSpPr>
@@ -10522,7 +10390,7 @@
       </p:sp>
       <p:sp>
         <p:nvSpPr>
-          <p:cNvPr id="13" name="Round Same Side Corner Rectangle 12"/>
+          <p:cNvPr id="12" name="Round Same Side Corner Rectangle 11"/>
           <p:cNvSpPr/>
           <p:nvPr/>
         </p:nvSpPr>
@@ -10569,7 +10437,7 @@
       </p:sp>
       <p:sp>
         <p:nvSpPr>
-          <p:cNvPr id="14" name="TextBox 13"/>
+          <p:cNvPr id="13" name="TextBox 12"/>
           <p:cNvSpPr txBox="1"/>
           <p:nvPr/>
         </p:nvSpPr>
@@ -10615,7 +10483,7 @@
       </p:sp>
       <p:sp>
         <p:nvSpPr>
-          <p:cNvPr id="15" name="TextBox 14"/>
+          <p:cNvPr id="14" name="TextBox 13"/>
           <p:cNvSpPr txBox="1"/>
           <p:nvPr/>
         </p:nvSpPr>
@@ -10661,7 +10529,7 @@
       </p:sp>
       <p:sp>
         <p:nvSpPr>
-          <p:cNvPr id="16" name="TextBox 15"/>
+          <p:cNvPr id="15" name="TextBox 14"/>
           <p:cNvSpPr txBox="1"/>
           <p:nvPr/>
         </p:nvSpPr>
@@ -10707,7 +10575,7 @@
       </p:sp>
       <p:sp>
         <p:nvSpPr>
-          <p:cNvPr id="17" name="Rounded Rectangle 16"/>
+          <p:cNvPr id="16" name="Rounded Rectangle 15"/>
           <p:cNvSpPr/>
           <p:nvPr/>
         </p:nvSpPr>
@@ -10755,7 +10623,7 @@
       </p:sp>
       <p:sp>
         <p:nvSpPr>
-          <p:cNvPr id="18" name="Round Same Side Corner Rectangle 17"/>
+          <p:cNvPr id="17" name="Round Same Side Corner Rectangle 16"/>
           <p:cNvSpPr/>
           <p:nvPr/>
         </p:nvSpPr>
@@ -10802,7 +10670,7 @@
       </p:sp>
       <p:sp>
         <p:nvSpPr>
-          <p:cNvPr id="19" name="TextBox 18"/>
+          <p:cNvPr id="18" name="TextBox 17"/>
           <p:cNvSpPr txBox="1"/>
           <p:nvPr/>
         </p:nvSpPr>
@@ -10848,7 +10716,7 @@
       </p:sp>
       <p:sp>
         <p:nvSpPr>
-          <p:cNvPr id="20" name="TextBox 19"/>
+          <p:cNvPr id="19" name="TextBox 18"/>
           <p:cNvSpPr txBox="1"/>
           <p:nvPr/>
         </p:nvSpPr>
@@ -10894,7 +10762,7 @@
       </p:sp>
       <p:sp>
         <p:nvSpPr>
-          <p:cNvPr id="21" name="TextBox 20"/>
+          <p:cNvPr id="20" name="TextBox 19"/>
           <p:cNvSpPr txBox="1"/>
           <p:nvPr/>
         </p:nvSpPr>
@@ -10940,7 +10808,7 @@
       </p:sp>
       <p:sp>
         <p:nvSpPr>
-          <p:cNvPr id="22" name="Rounded Rectangle 21"/>
+          <p:cNvPr id="21" name="Rounded Rectangle 20"/>
           <p:cNvSpPr/>
           <p:nvPr/>
         </p:nvSpPr>
@@ -10988,7 +10856,7 @@
       </p:sp>
       <p:sp>
         <p:nvSpPr>
-          <p:cNvPr id="23" name="Round Same Side Corner Rectangle 22"/>
+          <p:cNvPr id="22" name="Round Same Side Corner Rectangle 21"/>
           <p:cNvSpPr/>
           <p:nvPr/>
         </p:nvSpPr>
@@ -11035,7 +10903,7 @@
       </p:sp>
       <p:sp>
         <p:nvSpPr>
-          <p:cNvPr id="24" name="TextBox 23"/>
+          <p:cNvPr id="23" name="TextBox 22"/>
           <p:cNvSpPr txBox="1"/>
           <p:nvPr/>
         </p:nvSpPr>
@@ -11081,7 +10949,7 @@
       </p:sp>
       <p:sp>
         <p:nvSpPr>
-          <p:cNvPr id="25" name="TextBox 24"/>
+          <p:cNvPr id="24" name="TextBox 23"/>
           <p:cNvSpPr txBox="1"/>
           <p:nvPr/>
         </p:nvSpPr>
@@ -11127,7 +10995,7 @@
       </p:sp>
       <p:sp>
         <p:nvSpPr>
-          <p:cNvPr id="26" name="TextBox 25"/>
+          <p:cNvPr id="25" name="TextBox 24"/>
           <p:cNvSpPr txBox="1"/>
           <p:nvPr/>
         </p:nvSpPr>
@@ -11173,7 +11041,7 @@
       </p:sp>
       <p:sp>
         <p:nvSpPr>
-          <p:cNvPr id="27" name="TextBox 26"/>
+          <p:cNvPr id="26" name="TextBox 25"/>
           <p:cNvSpPr txBox="1"/>
           <p:nvPr/>
         </p:nvSpPr>
@@ -11228,7 +11096,7 @@
       </p:sp>
       <p:sp>
         <p:nvSpPr>
-          <p:cNvPr id="28" name="TextBox 27"/>
+          <p:cNvPr id="27" name="TextBox 26"/>
           <p:cNvSpPr txBox="1"/>
           <p:nvPr/>
         </p:nvSpPr>
@@ -11274,7 +11142,7 @@
       </p:sp>
       <p:sp>
         <p:nvSpPr>
-          <p:cNvPr id="29" name="TextBox 28"/>
+          <p:cNvPr id="28" name="TextBox 27"/>
           <p:cNvSpPr txBox="1"/>
           <p:nvPr/>
         </p:nvSpPr>
@@ -11474,51 +11342,7 @@
       </p:sp>
       <p:sp>
         <p:nvSpPr>
-          <p:cNvPr id="5" name="Rectangle 4"/>
-          <p:cNvSpPr/>
-          <p:nvPr/>
-        </p:nvSpPr>
-        <p:spPr>
-          <a:xfrm>
-            <a:off x="566928" y="1191006"/>
-            <a:ext cx="1097280" cy="45720"/>
-          </a:xfrm>
-          <a:prstGeom prst="rect">
-            <a:avLst/>
-          </a:prstGeom>
-          <a:solidFill>
-            <a:srgbClr val="D8542A"/>
-          </a:solidFill>
-          <a:ln>
-            <a:noFill/>
-          </a:ln>
-          <a:effectLst/>
-        </p:spPr>
-        <p:style>
-          <a:lnRef idx="1">
-            <a:schemeClr val="accent1"/>
-          </a:lnRef>
-          <a:fillRef idx="3">
-            <a:schemeClr val="accent1"/>
-          </a:fillRef>
-          <a:effectRef idx="2">
-            <a:schemeClr val="accent1"/>
-          </a:effectRef>
-          <a:fontRef idx="minor">
-            <a:schemeClr val="lt1"/>
-          </a:fontRef>
-        </p:style>
-        <p:txBody>
-          <a:bodyPr rtlCol="0" anchor="ctr"/>
-          <a:lstStyle/>
-          <a:p>
-            <a:pPr algn="ctr"/>
-          </a:p>
-        </p:txBody>
-      </p:sp>
-      <p:sp>
-        <p:nvSpPr>
-          <p:cNvPr id="6" name="TextBox 5"/>
+          <p:cNvPr id="5" name="TextBox 4"/>
           <p:cNvSpPr txBox="1"/>
           <p:nvPr/>
         </p:nvSpPr>
@@ -11564,7 +11388,7 @@
       </p:sp>
       <p:graphicFrame>
         <p:nvGraphicFramePr>
-          <p:cNvPr id="7" name="Chart 6"/>
+          <p:cNvPr id="6" name="Chart 5"/>
           <p:cNvGraphicFramePr>
             <a:graphicFrameLocks noGrp="1"/>
           </p:cNvGraphicFramePr>
@@ -11582,7 +11406,7 @@
       </p:graphicFrame>
       <p:sp>
         <p:nvSpPr>
-          <p:cNvPr id="8" name="TextBox 7"/>
+          <p:cNvPr id="7" name="TextBox 6"/>
           <p:cNvSpPr txBox="1"/>
           <p:nvPr/>
         </p:nvSpPr>
@@ -11628,7 +11452,7 @@
       </p:sp>
       <p:sp>
         <p:nvSpPr>
-          <p:cNvPr id="9" name="TextBox 8"/>
+          <p:cNvPr id="8" name="TextBox 7"/>
           <p:cNvSpPr txBox="1"/>
           <p:nvPr/>
         </p:nvSpPr>
@@ -11674,7 +11498,7 @@
       </p:sp>
       <p:sp>
         <p:nvSpPr>
-          <p:cNvPr id="10" name="TextBox 9"/>
+          <p:cNvPr id="9" name="TextBox 8"/>
           <p:cNvSpPr txBox="1"/>
           <p:nvPr/>
         </p:nvSpPr>
@@ -11720,7 +11544,7 @@
       </p:sp>
       <p:sp>
         <p:nvSpPr>
-          <p:cNvPr id="11" name="Rectangle 10"/>
+          <p:cNvPr id="10" name="Rectangle 9"/>
           <p:cNvSpPr/>
           <p:nvPr/>
         </p:nvSpPr>
@@ -11764,7 +11588,7 @@
       </p:sp>
       <p:sp>
         <p:nvSpPr>
-          <p:cNvPr id="12" name="TextBox 11"/>
+          <p:cNvPr id="11" name="TextBox 10"/>
           <p:cNvSpPr txBox="1"/>
           <p:nvPr/>
         </p:nvSpPr>
@@ -11819,7 +11643,7 @@
       </p:sp>
       <p:sp>
         <p:nvSpPr>
-          <p:cNvPr id="13" name="TextBox 12"/>
+          <p:cNvPr id="12" name="TextBox 11"/>
           <p:cNvSpPr txBox="1"/>
           <p:nvPr/>
         </p:nvSpPr>
@@ -11865,7 +11689,7 @@
       </p:sp>
       <p:sp>
         <p:nvSpPr>
-          <p:cNvPr id="14" name="TextBox 13"/>
+          <p:cNvPr id="13" name="TextBox 12"/>
           <p:cNvSpPr txBox="1"/>
           <p:nvPr/>
         </p:nvSpPr>
@@ -11920,7 +11744,7 @@
       </p:sp>
       <p:sp>
         <p:nvSpPr>
-          <p:cNvPr id="15" name="TextBox 14"/>
+          <p:cNvPr id="14" name="TextBox 13"/>
           <p:cNvSpPr txBox="1"/>
           <p:nvPr/>
         </p:nvSpPr>
@@ -11966,7 +11790,7 @@
       </p:sp>
       <p:sp>
         <p:nvSpPr>
-          <p:cNvPr id="16" name="TextBox 15"/>
+          <p:cNvPr id="15" name="TextBox 14"/>
           <p:cNvSpPr txBox="1"/>
           <p:nvPr/>
         </p:nvSpPr>
@@ -12166,51 +11990,7 @@
       </p:sp>
       <p:sp>
         <p:nvSpPr>
-          <p:cNvPr id="5" name="Rectangle 4"/>
-          <p:cNvSpPr/>
-          <p:nvPr/>
-        </p:nvSpPr>
-        <p:spPr>
-          <a:xfrm>
-            <a:off x="566928" y="1191006"/>
-            <a:ext cx="1097280" cy="45720"/>
-          </a:xfrm>
-          <a:prstGeom prst="rect">
-            <a:avLst/>
-          </a:prstGeom>
-          <a:solidFill>
-            <a:srgbClr val="D8542A"/>
-          </a:solidFill>
-          <a:ln>
-            <a:noFill/>
-          </a:ln>
-          <a:effectLst/>
-        </p:spPr>
-        <p:style>
-          <a:lnRef idx="1">
-            <a:schemeClr val="accent1"/>
-          </a:lnRef>
-          <a:fillRef idx="3">
-            <a:schemeClr val="accent1"/>
-          </a:fillRef>
-          <a:effectRef idx="2">
-            <a:schemeClr val="accent1"/>
-          </a:effectRef>
-          <a:fontRef idx="minor">
-            <a:schemeClr val="lt1"/>
-          </a:fontRef>
-        </p:style>
-        <p:txBody>
-          <a:bodyPr rtlCol="0" anchor="ctr"/>
-          <a:lstStyle/>
-          <a:p>
-            <a:pPr algn="ctr"/>
-          </a:p>
-        </p:txBody>
-      </p:sp>
-      <p:sp>
-        <p:nvSpPr>
-          <p:cNvPr id="6" name="TextBox 5"/>
+          <p:cNvPr id="5" name="TextBox 4"/>
           <p:cNvSpPr txBox="1"/>
           <p:nvPr/>
         </p:nvSpPr>
@@ -12256,7 +12036,7 @@
       </p:sp>
       <p:graphicFrame>
         <p:nvGraphicFramePr>
-          <p:cNvPr id="7" name="Chart 6"/>
+          <p:cNvPr id="6" name="Chart 5"/>
           <p:cNvGraphicFramePr>
             <a:graphicFrameLocks noGrp="1"/>
           </p:cNvGraphicFramePr>
@@ -12274,7 +12054,7 @@
       </p:graphicFrame>
       <p:sp>
         <p:nvSpPr>
-          <p:cNvPr id="8" name="TextBox 7"/>
+          <p:cNvPr id="7" name="TextBox 6"/>
           <p:cNvSpPr txBox="1"/>
           <p:nvPr/>
         </p:nvSpPr>
@@ -12320,7 +12100,7 @@
       </p:sp>
       <p:sp>
         <p:nvSpPr>
-          <p:cNvPr id="9" name="TextBox 8"/>
+          <p:cNvPr id="8" name="TextBox 7"/>
           <p:cNvSpPr txBox="1"/>
           <p:nvPr/>
         </p:nvSpPr>
@@ -12365,7 +12145,7 @@
       </p:sp>
       <p:sp>
         <p:nvSpPr>
-          <p:cNvPr id="10" name="TextBox 9"/>
+          <p:cNvPr id="9" name="TextBox 8"/>
           <p:cNvSpPr txBox="1"/>
           <p:nvPr/>
         </p:nvSpPr>
@@ -12429,7 +12209,7 @@
       </p:sp>
       <p:sp>
         <p:nvSpPr>
-          <p:cNvPr id="11" name="Rounded Rectangle 10"/>
+          <p:cNvPr id="10" name="Rounded Rectangle 9"/>
           <p:cNvSpPr/>
           <p:nvPr/>
         </p:nvSpPr>
@@ -12475,7 +12255,7 @@
       </p:sp>
       <p:sp>
         <p:nvSpPr>
-          <p:cNvPr id="12" name="Rectangle 11"/>
+          <p:cNvPr id="11" name="Rectangle 10"/>
           <p:cNvSpPr/>
           <p:nvPr/>
         </p:nvSpPr>
@@ -12519,7 +12299,7 @@
       </p:sp>
       <p:sp>
         <p:nvSpPr>
-          <p:cNvPr id="13" name="TextBox 12"/>
+          <p:cNvPr id="12" name="TextBox 11"/>
           <p:cNvSpPr txBox="1"/>
           <p:nvPr/>
         </p:nvSpPr>
@@ -12574,7 +12354,7 @@
       </p:sp>
       <p:sp>
         <p:nvSpPr>
-          <p:cNvPr id="14" name="TextBox 13"/>
+          <p:cNvPr id="13" name="TextBox 12"/>
           <p:cNvSpPr txBox="1"/>
           <p:nvPr/>
         </p:nvSpPr>
@@ -12629,7 +12409,7 @@
       </p:sp>
       <p:sp>
         <p:nvSpPr>
-          <p:cNvPr id="15" name="TextBox 14"/>
+          <p:cNvPr id="14" name="TextBox 13"/>
           <p:cNvSpPr txBox="1"/>
           <p:nvPr/>
         </p:nvSpPr>
@@ -12675,7 +12455,7 @@
       </p:sp>
       <p:sp>
         <p:nvSpPr>
-          <p:cNvPr id="16" name="TextBox 15"/>
+          <p:cNvPr id="15" name="TextBox 14"/>
           <p:cNvSpPr txBox="1"/>
           <p:nvPr/>
         </p:nvSpPr>
@@ -12875,51 +12655,7 @@
       </p:sp>
       <p:sp>
         <p:nvSpPr>
-          <p:cNvPr id="5" name="Rectangle 4"/>
-          <p:cNvSpPr/>
-          <p:nvPr/>
-        </p:nvSpPr>
-        <p:spPr>
-          <a:xfrm>
-            <a:off x="566928" y="1191006"/>
-            <a:ext cx="1097280" cy="45720"/>
-          </a:xfrm>
-          <a:prstGeom prst="rect">
-            <a:avLst/>
-          </a:prstGeom>
-          <a:solidFill>
-            <a:srgbClr val="0E5C63"/>
-          </a:solidFill>
-          <a:ln>
-            <a:noFill/>
-          </a:ln>
-          <a:effectLst/>
-        </p:spPr>
-        <p:style>
-          <a:lnRef idx="1">
-            <a:schemeClr val="accent1"/>
-          </a:lnRef>
-          <a:fillRef idx="3">
-            <a:schemeClr val="accent1"/>
-          </a:fillRef>
-          <a:effectRef idx="2">
-            <a:schemeClr val="accent1"/>
-          </a:effectRef>
-          <a:fontRef idx="minor">
-            <a:schemeClr val="lt1"/>
-          </a:fontRef>
-        </p:style>
-        <p:txBody>
-          <a:bodyPr rtlCol="0" anchor="ctr"/>
-          <a:lstStyle/>
-          <a:p>
-            <a:pPr algn="ctr"/>
-          </a:p>
-        </p:txBody>
-      </p:sp>
-      <p:sp>
-        <p:nvSpPr>
-          <p:cNvPr id="6" name="Rounded Rectangle 5"/>
+          <p:cNvPr id="5" name="Rounded Rectangle 4"/>
           <p:cNvSpPr/>
           <p:nvPr/>
         </p:nvSpPr>
@@ -12967,7 +12703,7 @@
       </p:sp>
       <p:sp>
         <p:nvSpPr>
-          <p:cNvPr id="7" name="TextBox 6"/>
+          <p:cNvPr id="6" name="TextBox 5"/>
           <p:cNvSpPr txBox="1"/>
           <p:nvPr/>
         </p:nvSpPr>
@@ -13013,7 +12749,7 @@
       </p:sp>
       <p:sp>
         <p:nvSpPr>
-          <p:cNvPr id="8" name="TextBox 7"/>
+          <p:cNvPr id="7" name="TextBox 6"/>
           <p:cNvSpPr txBox="1"/>
           <p:nvPr/>
         </p:nvSpPr>
@@ -13081,7 +12817,7 @@
       </p:sp>
       <p:sp>
         <p:nvSpPr>
-          <p:cNvPr id="9" name="TextBox 8"/>
+          <p:cNvPr id="8" name="TextBox 7"/>
           <p:cNvSpPr txBox="1"/>
           <p:nvPr/>
         </p:nvSpPr>
@@ -13127,7 +12863,7 @@
       </p:sp>
       <p:sp>
         <p:nvSpPr>
-          <p:cNvPr id="10" name="Rounded Rectangle 9"/>
+          <p:cNvPr id="9" name="Rounded Rectangle 8"/>
           <p:cNvSpPr/>
           <p:nvPr/>
         </p:nvSpPr>
@@ -13173,7 +12909,7 @@
       </p:sp>
       <p:sp>
         <p:nvSpPr>
-          <p:cNvPr id="11" name="Rounded Rectangle 10"/>
+          <p:cNvPr id="10" name="Rounded Rectangle 9"/>
           <p:cNvSpPr/>
           <p:nvPr/>
         </p:nvSpPr>
@@ -13219,7 +12955,7 @@
       </p:sp>
       <p:sp>
         <p:nvSpPr>
-          <p:cNvPr id="12" name="TextBox 11"/>
+          <p:cNvPr id="11" name="TextBox 10"/>
           <p:cNvSpPr txBox="1"/>
           <p:nvPr/>
         </p:nvSpPr>
@@ -13265,7 +13001,7 @@
       </p:sp>
       <p:sp>
         <p:nvSpPr>
-          <p:cNvPr id="13" name="TextBox 12"/>
+          <p:cNvPr id="12" name="TextBox 11"/>
           <p:cNvSpPr txBox="1"/>
           <p:nvPr/>
         </p:nvSpPr>
@@ -13320,7 +13056,7 @@
       </p:sp>
       <p:sp>
         <p:nvSpPr>
-          <p:cNvPr id="14" name="Rounded Rectangle 13"/>
+          <p:cNvPr id="13" name="Rounded Rectangle 12"/>
           <p:cNvSpPr/>
           <p:nvPr/>
         </p:nvSpPr>
@@ -13368,7 +13104,7 @@
       </p:sp>
       <p:sp>
         <p:nvSpPr>
-          <p:cNvPr id="15" name="TextBox 14"/>
+          <p:cNvPr id="14" name="TextBox 13"/>
           <p:cNvSpPr txBox="1"/>
           <p:nvPr/>
         </p:nvSpPr>
@@ -13414,7 +13150,7 @@
       </p:sp>
       <p:sp>
         <p:nvSpPr>
-          <p:cNvPr id="16" name="TextBox 15"/>
+          <p:cNvPr id="15" name="TextBox 14"/>
           <p:cNvSpPr txBox="1"/>
           <p:nvPr/>
         </p:nvSpPr>
@@ -13460,7 +13196,7 @@
       </p:sp>
       <p:sp>
         <p:nvSpPr>
-          <p:cNvPr id="17" name="TextBox 16"/>
+          <p:cNvPr id="16" name="TextBox 15"/>
           <p:cNvSpPr txBox="1"/>
           <p:nvPr/>
         </p:nvSpPr>
@@ -13506,7 +13242,7 @@
       </p:sp>
       <p:sp>
         <p:nvSpPr>
-          <p:cNvPr id="18" name="TextBox 17"/>
+          <p:cNvPr id="17" name="TextBox 16"/>
           <p:cNvSpPr txBox="1"/>
           <p:nvPr/>
         </p:nvSpPr>
@@ -13552,7 +13288,7 @@
       </p:sp>
       <p:sp>
         <p:nvSpPr>
-          <p:cNvPr id="19" name="TextBox 18"/>
+          <p:cNvPr id="18" name="TextBox 17"/>
           <p:cNvSpPr txBox="1"/>
           <p:nvPr/>
         </p:nvSpPr>
@@ -13607,7 +13343,7 @@
       </p:sp>
       <p:sp>
         <p:nvSpPr>
-          <p:cNvPr id="20" name="TextBox 19"/>
+          <p:cNvPr id="19" name="TextBox 18"/>
           <p:cNvSpPr txBox="1"/>
           <p:nvPr/>
         </p:nvSpPr>
@@ -13653,7 +13389,7 @@
       </p:sp>
       <p:sp>
         <p:nvSpPr>
-          <p:cNvPr id="21" name="TextBox 20"/>
+          <p:cNvPr id="20" name="TextBox 19"/>
           <p:cNvSpPr txBox="1"/>
           <p:nvPr/>
         </p:nvSpPr>
@@ -13853,51 +13589,7 @@
       </p:sp>
       <p:sp>
         <p:nvSpPr>
-          <p:cNvPr id="5" name="Rectangle 4"/>
-          <p:cNvSpPr/>
-          <p:nvPr/>
-        </p:nvSpPr>
-        <p:spPr>
-          <a:xfrm>
-            <a:off x="566928" y="1191006"/>
-            <a:ext cx="1097280" cy="45720"/>
-          </a:xfrm>
-          <a:prstGeom prst="rect">
-            <a:avLst/>
-          </a:prstGeom>
-          <a:solidFill>
-            <a:srgbClr val="D8542A"/>
-          </a:solidFill>
-          <a:ln>
-            <a:noFill/>
-          </a:ln>
-          <a:effectLst/>
-        </p:spPr>
-        <p:style>
-          <a:lnRef idx="1">
-            <a:schemeClr val="accent1"/>
-          </a:lnRef>
-          <a:fillRef idx="3">
-            <a:schemeClr val="accent1"/>
-          </a:fillRef>
-          <a:effectRef idx="2">
-            <a:schemeClr val="accent1"/>
-          </a:effectRef>
-          <a:fontRef idx="minor">
-            <a:schemeClr val="lt1"/>
-          </a:fontRef>
-        </p:style>
-        <p:txBody>
-          <a:bodyPr rtlCol="0" anchor="ctr"/>
-          <a:lstStyle/>
-          <a:p>
-            <a:pPr algn="ctr"/>
-          </a:p>
-        </p:txBody>
-      </p:sp>
-      <p:sp>
-        <p:nvSpPr>
-          <p:cNvPr id="6" name="TextBox 5"/>
+          <p:cNvPr id="5" name="TextBox 4"/>
           <p:cNvSpPr txBox="1"/>
           <p:nvPr/>
         </p:nvSpPr>
@@ -13943,7 +13635,7 @@
       </p:sp>
       <p:sp>
         <p:nvSpPr>
-          <p:cNvPr id="7" name="Rounded Rectangle 6"/>
+          <p:cNvPr id="6" name="Rounded Rectangle 5"/>
           <p:cNvSpPr/>
           <p:nvPr/>
         </p:nvSpPr>
@@ -13991,7 +13683,7 @@
       </p:sp>
       <p:sp>
         <p:nvSpPr>
-          <p:cNvPr id="8" name="Rectangle 7"/>
+          <p:cNvPr id="7" name="Rectangle 6"/>
           <p:cNvSpPr/>
           <p:nvPr/>
         </p:nvSpPr>
@@ -14035,7 +13727,7 @@
       </p:sp>
       <p:sp>
         <p:nvSpPr>
-          <p:cNvPr id="9" name="Oval 8"/>
+          <p:cNvPr id="8" name="Oval 7"/>
           <p:cNvSpPr/>
           <p:nvPr/>
         </p:nvSpPr>
@@ -14079,7 +13771,7 @@
       </p:sp>
       <p:pic>
         <p:nvPicPr>
-          <p:cNvPr id="10" name="Picture 9" descr="heartbeat_D8542A.png"/>
+          <p:cNvPr id="9" name="Picture 8" descr="heartbeat_D8542A.png"/>
           <p:cNvPicPr>
             <a:picLocks noChangeAspect="1"/>
           </p:cNvPicPr>
@@ -14103,7 +13795,7 @@
       </p:pic>
       <p:sp>
         <p:nvSpPr>
-          <p:cNvPr id="11" name="TextBox 10"/>
+          <p:cNvPr id="10" name="TextBox 9"/>
           <p:cNvSpPr txBox="1"/>
           <p:nvPr/>
         </p:nvSpPr>
@@ -14149,7 +13841,7 @@
       </p:sp>
       <p:sp>
         <p:nvSpPr>
-          <p:cNvPr id="12" name="TextBox 11"/>
+          <p:cNvPr id="11" name="TextBox 10"/>
           <p:cNvSpPr txBox="1"/>
           <p:nvPr/>
         </p:nvSpPr>
@@ -14195,7 +13887,7 @@
       </p:sp>
       <p:sp>
         <p:nvSpPr>
-          <p:cNvPr id="13" name="Rounded Rectangle 12"/>
+          <p:cNvPr id="12" name="Rounded Rectangle 11"/>
           <p:cNvSpPr/>
           <p:nvPr/>
         </p:nvSpPr>
@@ -14243,7 +13935,7 @@
       </p:sp>
       <p:sp>
         <p:nvSpPr>
-          <p:cNvPr id="14" name="Rectangle 13"/>
+          <p:cNvPr id="13" name="Rectangle 12"/>
           <p:cNvSpPr/>
           <p:nvPr/>
         </p:nvSpPr>
@@ -14287,7 +13979,7 @@
       </p:sp>
       <p:sp>
         <p:nvSpPr>
-          <p:cNvPr id="15" name="Oval 14"/>
+          <p:cNvPr id="14" name="Oval 13"/>
           <p:cNvSpPr/>
           <p:nvPr/>
         </p:nvSpPr>
@@ -14331,7 +14023,7 @@
       </p:sp>
       <p:pic>
         <p:nvPicPr>
-          <p:cNvPr id="16" name="Picture 15" descr="cpu_0E5C63.png"/>
+          <p:cNvPr id="15" name="Picture 14" descr="cpu_0E5C63.png"/>
           <p:cNvPicPr>
             <a:picLocks noChangeAspect="1"/>
           </p:cNvPicPr>
@@ -14355,7 +14047,7 @@
       </p:pic>
       <p:sp>
         <p:nvSpPr>
-          <p:cNvPr id="17" name="TextBox 16"/>
+          <p:cNvPr id="16" name="TextBox 15"/>
           <p:cNvSpPr txBox="1"/>
           <p:nvPr/>
         </p:nvSpPr>
@@ -14401,7 +14093,7 @@
       </p:sp>
       <p:sp>
         <p:nvSpPr>
-          <p:cNvPr id="18" name="TextBox 17"/>
+          <p:cNvPr id="17" name="TextBox 16"/>
           <p:cNvSpPr txBox="1"/>
           <p:nvPr/>
         </p:nvSpPr>
@@ -14447,7 +14139,7 @@
       </p:sp>
       <p:sp>
         <p:nvSpPr>
-          <p:cNvPr id="19" name="Rounded Rectangle 18"/>
+          <p:cNvPr id="18" name="Rounded Rectangle 17"/>
           <p:cNvSpPr/>
           <p:nvPr/>
         </p:nvSpPr>
@@ -14495,7 +14187,7 @@
       </p:sp>
       <p:sp>
         <p:nvSpPr>
-          <p:cNvPr id="20" name="Rectangle 19"/>
+          <p:cNvPr id="19" name="Rectangle 18"/>
           <p:cNvSpPr/>
           <p:nvPr/>
         </p:nvSpPr>
@@ -14539,7 +14231,7 @@
       </p:sp>
       <p:sp>
         <p:nvSpPr>
-          <p:cNvPr id="21" name="Oval 20"/>
+          <p:cNvPr id="20" name="Oval 19"/>
           <p:cNvSpPr/>
           <p:nvPr/>
         </p:nvSpPr>
@@ -14583,7 +14275,7 @@
       </p:sp>
       <p:pic>
         <p:nvPicPr>
-          <p:cNvPr id="22" name="Picture 21" descr="tools_C08A2E.png"/>
+          <p:cNvPr id="21" name="Picture 20" descr="tools_C08A2E.png"/>
           <p:cNvPicPr>
             <a:picLocks noChangeAspect="1"/>
           </p:cNvPicPr>
@@ -14607,7 +14299,7 @@
       </p:pic>
       <p:sp>
         <p:nvSpPr>
-          <p:cNvPr id="23" name="TextBox 22"/>
+          <p:cNvPr id="22" name="TextBox 21"/>
           <p:cNvSpPr txBox="1"/>
           <p:nvPr/>
         </p:nvSpPr>
@@ -14653,7 +14345,7 @@
       </p:sp>
       <p:sp>
         <p:nvSpPr>
-          <p:cNvPr id="24" name="TextBox 23"/>
+          <p:cNvPr id="23" name="TextBox 22"/>
           <p:cNvSpPr txBox="1"/>
           <p:nvPr/>
         </p:nvSpPr>
@@ -14699,7 +14391,7 @@
       </p:sp>
       <p:sp>
         <p:nvSpPr>
-          <p:cNvPr id="25" name="Rounded Rectangle 24"/>
+          <p:cNvPr id="24" name="Rounded Rectangle 23"/>
           <p:cNvSpPr/>
           <p:nvPr/>
         </p:nvSpPr>
@@ -14747,7 +14439,7 @@
       </p:sp>
       <p:sp>
         <p:nvSpPr>
-          <p:cNvPr id="26" name="Rectangle 25"/>
+          <p:cNvPr id="25" name="Rectangle 24"/>
           <p:cNvSpPr/>
           <p:nvPr/>
         </p:nvSpPr>
@@ -14791,7 +14483,7 @@
       </p:sp>
       <p:sp>
         <p:nvSpPr>
-          <p:cNvPr id="27" name="Oval 26"/>
+          <p:cNvPr id="26" name="Oval 25"/>
           <p:cNvSpPr/>
           <p:nvPr/>
         </p:nvSpPr>
@@ -14835,7 +14527,7 @@
       </p:sp>
       <p:pic>
         <p:nvPicPr>
-          <p:cNvPr id="28" name="Picture 27" descr="school_3E6B57.png"/>
+          <p:cNvPr id="27" name="Picture 26" descr="school_3E6B57.png"/>
           <p:cNvPicPr>
             <a:picLocks noChangeAspect="1"/>
           </p:cNvPicPr>
@@ -14859,7 +14551,7 @@
       </p:pic>
       <p:sp>
         <p:nvSpPr>
-          <p:cNvPr id="29" name="TextBox 28"/>
+          <p:cNvPr id="28" name="TextBox 27"/>
           <p:cNvSpPr txBox="1"/>
           <p:nvPr/>
         </p:nvSpPr>
@@ -14905,7 +14597,7 @@
       </p:sp>
       <p:sp>
         <p:nvSpPr>
-          <p:cNvPr id="30" name="TextBox 29"/>
+          <p:cNvPr id="29" name="TextBox 28"/>
           <p:cNvSpPr txBox="1"/>
           <p:nvPr/>
         </p:nvSpPr>
@@ -14951,7 +14643,7 @@
       </p:sp>
       <p:sp>
         <p:nvSpPr>
-          <p:cNvPr id="31" name="Rounded Rectangle 30"/>
+          <p:cNvPr id="30" name="Rounded Rectangle 29"/>
           <p:cNvSpPr/>
           <p:nvPr/>
         </p:nvSpPr>
@@ -14999,7 +14691,7 @@
       </p:sp>
       <p:sp>
         <p:nvSpPr>
-          <p:cNvPr id="32" name="Rectangle 31"/>
+          <p:cNvPr id="31" name="Rectangle 30"/>
           <p:cNvSpPr/>
           <p:nvPr/>
         </p:nvSpPr>
@@ -15043,7 +14735,7 @@
       </p:sp>
       <p:sp>
         <p:nvSpPr>
-          <p:cNvPr id="33" name="Oval 32"/>
+          <p:cNvPr id="32" name="Oval 31"/>
           <p:cNvSpPr/>
           <p:nvPr/>
         </p:nvSpPr>
@@ -15087,7 +14779,7 @@
       </p:sp>
       <p:pic>
         <p:nvPicPr>
-          <p:cNvPr id="34" name="Picture 33" descr="truck-delivery_9C4722.png"/>
+          <p:cNvPr id="33" name="Picture 32" descr="truck-delivery_9C4722.png"/>
           <p:cNvPicPr>
             <a:picLocks noChangeAspect="1"/>
           </p:cNvPicPr>
@@ -15111,7 +14803,7 @@
       </p:pic>
       <p:sp>
         <p:nvSpPr>
-          <p:cNvPr id="35" name="TextBox 34"/>
+          <p:cNvPr id="34" name="TextBox 33"/>
           <p:cNvSpPr txBox="1"/>
           <p:nvPr/>
         </p:nvSpPr>
@@ -15157,7 +14849,7 @@
       </p:sp>
       <p:sp>
         <p:nvSpPr>
-          <p:cNvPr id="36" name="TextBox 35"/>
+          <p:cNvPr id="35" name="TextBox 34"/>
           <p:cNvSpPr txBox="1"/>
           <p:nvPr/>
         </p:nvSpPr>
@@ -15203,7 +14895,7 @@
       </p:sp>
       <p:sp>
         <p:nvSpPr>
-          <p:cNvPr id="37" name="TextBox 36"/>
+          <p:cNvPr id="36" name="TextBox 35"/>
           <p:cNvSpPr txBox="1"/>
           <p:nvPr/>
         </p:nvSpPr>
@@ -15258,7 +14950,7 @@
       </p:sp>
       <p:sp>
         <p:nvSpPr>
-          <p:cNvPr id="38" name="TextBox 37"/>
+          <p:cNvPr id="37" name="TextBox 36"/>
           <p:cNvSpPr txBox="1"/>
           <p:nvPr/>
         </p:nvSpPr>
@@ -15304,7 +14996,7 @@
       </p:sp>
       <p:sp>
         <p:nvSpPr>
-          <p:cNvPr id="39" name="TextBox 38"/>
+          <p:cNvPr id="38" name="TextBox 37"/>
           <p:cNvSpPr txBox="1"/>
           <p:nvPr/>
         </p:nvSpPr>
@@ -15504,51 +15196,7 @@
       </p:sp>
       <p:sp>
         <p:nvSpPr>
-          <p:cNvPr id="5" name="Rectangle 4"/>
-          <p:cNvSpPr/>
-          <p:nvPr/>
-        </p:nvSpPr>
-        <p:spPr>
-          <a:xfrm>
-            <a:off x="566928" y="1191006"/>
-            <a:ext cx="1097280" cy="45720"/>
-          </a:xfrm>
-          <a:prstGeom prst="rect">
-            <a:avLst/>
-          </a:prstGeom>
-          <a:solidFill>
-            <a:srgbClr val="0E5C63"/>
-          </a:solidFill>
-          <a:ln>
-            <a:noFill/>
-          </a:ln>
-          <a:effectLst/>
-        </p:spPr>
-        <p:style>
-          <a:lnRef idx="1">
-            <a:schemeClr val="accent1"/>
-          </a:lnRef>
-          <a:fillRef idx="3">
-            <a:schemeClr val="accent1"/>
-          </a:fillRef>
-          <a:effectRef idx="2">
-            <a:schemeClr val="accent1"/>
-          </a:effectRef>
-          <a:fontRef idx="minor">
-            <a:schemeClr val="lt1"/>
-          </a:fontRef>
-        </p:style>
-        <p:txBody>
-          <a:bodyPr rtlCol="0" anchor="ctr"/>
-          <a:lstStyle/>
-          <a:p>
-            <a:pPr algn="ctr"/>
-          </a:p>
-        </p:txBody>
-      </p:sp>
-      <p:sp>
-        <p:nvSpPr>
-          <p:cNvPr id="6" name="TextBox 5"/>
+          <p:cNvPr id="5" name="TextBox 4"/>
           <p:cNvSpPr txBox="1"/>
           <p:nvPr/>
         </p:nvSpPr>
@@ -15594,7 +15242,7 @@
       </p:sp>
       <p:graphicFrame>
         <p:nvGraphicFramePr>
-          <p:cNvPr id="7" name="Chart 6"/>
+          <p:cNvPr id="6" name="Chart 5"/>
           <p:cNvGraphicFramePr>
             <a:graphicFrameLocks noGrp="1"/>
           </p:cNvGraphicFramePr>
@@ -15612,7 +15260,7 @@
       </p:graphicFrame>
       <p:sp>
         <p:nvSpPr>
-          <p:cNvPr id="8" name="TextBox 7"/>
+          <p:cNvPr id="7" name="TextBox 6"/>
           <p:cNvSpPr txBox="1"/>
           <p:nvPr/>
         </p:nvSpPr>
@@ -15658,7 +15306,7 @@
       </p:sp>
       <p:sp>
         <p:nvSpPr>
-          <p:cNvPr id="9" name="TextBox 8"/>
+          <p:cNvPr id="8" name="TextBox 7"/>
           <p:cNvSpPr txBox="1"/>
           <p:nvPr/>
         </p:nvSpPr>
@@ -15704,7 +15352,7 @@
       </p:sp>
       <p:sp>
         <p:nvSpPr>
-          <p:cNvPr id="10" name="TextBox 9"/>
+          <p:cNvPr id="9" name="TextBox 8"/>
           <p:cNvSpPr txBox="1"/>
           <p:nvPr/>
         </p:nvSpPr>
@@ -15750,7 +15398,7 @@
       </p:sp>
       <p:sp>
         <p:nvSpPr>
-          <p:cNvPr id="11" name="Rectangle 10"/>
+          <p:cNvPr id="10" name="Rectangle 9"/>
           <p:cNvSpPr/>
           <p:nvPr/>
         </p:nvSpPr>
@@ -15794,7 +15442,7 @@
       </p:sp>
       <p:sp>
         <p:nvSpPr>
-          <p:cNvPr id="12" name="TextBox 11"/>
+          <p:cNvPr id="11" name="TextBox 10"/>
           <p:cNvSpPr txBox="1"/>
           <p:nvPr/>
         </p:nvSpPr>
@@ -15849,7 +15497,7 @@
       </p:sp>
       <p:sp>
         <p:nvSpPr>
-          <p:cNvPr id="13" name="TextBox 12"/>
+          <p:cNvPr id="12" name="TextBox 11"/>
           <p:cNvSpPr txBox="1"/>
           <p:nvPr/>
         </p:nvSpPr>
@@ -15895,7 +15543,7 @@
       </p:sp>
       <p:sp>
         <p:nvSpPr>
-          <p:cNvPr id="14" name="TextBox 13"/>
+          <p:cNvPr id="13" name="TextBox 12"/>
           <p:cNvSpPr txBox="1"/>
           <p:nvPr/>
         </p:nvSpPr>
@@ -15950,7 +15598,7 @@
       </p:sp>
       <p:sp>
         <p:nvSpPr>
-          <p:cNvPr id="15" name="TextBox 14"/>
+          <p:cNvPr id="14" name="TextBox 13"/>
           <p:cNvSpPr txBox="1"/>
           <p:nvPr/>
         </p:nvSpPr>
@@ -15996,7 +15644,7 @@
       </p:sp>
       <p:sp>
         <p:nvSpPr>
-          <p:cNvPr id="16" name="TextBox 15"/>
+          <p:cNvPr id="15" name="TextBox 14"/>
           <p:cNvSpPr txBox="1"/>
           <p:nvPr/>
         </p:nvSpPr>
@@ -16196,17 +15844,709 @@
       </p:sp>
       <p:sp>
         <p:nvSpPr>
-          <p:cNvPr id="5" name="Rectangle 4"/>
+          <p:cNvPr id="5" name="TextBox 4"/>
+          <p:cNvSpPr txBox="1"/>
+          <p:nvPr/>
+        </p:nvSpPr>
+        <p:spPr>
+          <a:xfrm>
+            <a:off x="365760" y="1508760"/>
+            <a:ext cx="5088367" cy="274320"/>
+          </a:xfrm>
+          <a:prstGeom prst="rect">
+            <a:avLst/>
+          </a:prstGeom>
+          <a:noFill/>
+          <a:ln/>
+        </p:spPr>
+        <p:txBody>
+          <a:bodyPr wrap="square" anchor="t" lIns="25400" rIns="25400" tIns="25400" bIns="25400">
+            <a:spAutoFit/>
+          </a:bodyPr>
+          <a:lstStyle/>
+          <a:p>
+            <a:pPr algn="l">
+              <a:lnSpc>
+                <a:spcPct val="112000"/>
+              </a:lnSpc>
+              <a:spcBef>
+                <a:spcPts val="0"/>
+              </a:spcBef>
+              <a:spcAft>
+                <a:spcPts val="0"/>
+              </a:spcAft>
+            </a:pPr>
+            <a:r>
+              <a:rPr sz="950" b="1" i="0">
+                <a:solidFill>
+                  <a:srgbClr val="8A8478"/>
+                </a:solidFill>
+                <a:latin typeface="Courier New"/>
+              </a:rPr>
+              <a:t>税前年薪估算，欧元/年</a:t>
+            </a:r>
+          </a:p>
+        </p:txBody>
+      </p:sp>
+      <p:sp>
+        <p:nvSpPr>
+          <p:cNvPr id="6" name="TextBox 5"/>
+          <p:cNvSpPr txBox="1"/>
+          <p:nvPr/>
+        </p:nvSpPr>
+        <p:spPr>
+          <a:xfrm>
+            <a:off x="365760" y="1883664"/>
+            <a:ext cx="3808207" cy="256032"/>
+          </a:xfrm>
+          <a:prstGeom prst="rect">
+            <a:avLst/>
+          </a:prstGeom>
+          <a:noFill/>
+          <a:ln/>
+        </p:spPr>
+        <p:txBody>
+          <a:bodyPr wrap="square" anchor="b" lIns="25400" rIns="25400" tIns="25400" bIns="25400">
+            <a:spAutoFit/>
+          </a:bodyPr>
+          <a:lstStyle/>
+          <a:p>
+            <a:pPr algn="l">
+              <a:lnSpc>
+                <a:spcPct val="112000"/>
+              </a:lnSpc>
+              <a:spcBef>
+                <a:spcPts val="0"/>
+              </a:spcBef>
+              <a:spcAft>
+                <a:spcPts val="0"/>
+              </a:spcAft>
+            </a:pPr>
+            <a:r>
+              <a:rPr sz="1100" b="0" i="0">
+                <a:solidFill>
+                  <a:srgbClr val="8A8478"/>
+                </a:solidFill>
+                <a:latin typeface="Helvetica Neue"/>
+              </a:rPr>
+              <a:t>信息技术（中级）</a:t>
+            </a:r>
+          </a:p>
+        </p:txBody>
+      </p:sp>
+      <p:sp>
+        <p:nvSpPr>
+          <p:cNvPr id="7" name="Rounded Rectangle 6"/>
           <p:cNvSpPr/>
           <p:nvPr/>
         </p:nvSpPr>
         <p:spPr>
           <a:xfrm>
-            <a:off x="566928" y="1191006"/>
-            <a:ext cx="1097280" cy="45720"/>
-          </a:xfrm>
-          <a:prstGeom prst="rect">
-            <a:avLst/>
+            <a:off x="365760" y="2139696"/>
+            <a:ext cx="3808207" cy="164592"/>
+          </a:xfrm>
+          <a:prstGeom prst="roundRect">
+            <a:avLst>
+              <a:gd name="adj" fmla="val 50000"/>
+            </a:avLst>
+          </a:prstGeom>
+          <a:solidFill>
+            <a:srgbClr val="E7DFD1"/>
+          </a:solidFill>
+          <a:ln>
+            <a:noFill/>
+          </a:ln>
+          <a:effectLst/>
+        </p:spPr>
+        <p:style>
+          <a:lnRef idx="1">
+            <a:schemeClr val="accent1"/>
+          </a:lnRef>
+          <a:fillRef idx="3">
+            <a:schemeClr val="accent1"/>
+          </a:fillRef>
+          <a:effectRef idx="2">
+            <a:schemeClr val="accent1"/>
+          </a:effectRef>
+          <a:fontRef idx="minor">
+            <a:schemeClr val="lt1"/>
+          </a:fontRef>
+        </p:style>
+        <p:txBody>
+          <a:bodyPr rtlCol="0" anchor="ctr"/>
+          <a:lstStyle/>
+          <a:p>
+            <a:pPr algn="ctr"/>
+          </a:p>
+        </p:txBody>
+      </p:sp>
+      <p:sp>
+        <p:nvSpPr>
+          <p:cNvPr id="8" name="Rounded Rectangle 7"/>
+          <p:cNvSpPr/>
+          <p:nvPr/>
+        </p:nvSpPr>
+        <p:spPr>
+          <a:xfrm>
+            <a:off x="365760" y="2139696"/>
+            <a:ext cx="3427386" cy="164592"/>
+          </a:xfrm>
+          <a:prstGeom prst="roundRect">
+            <a:avLst>
+              <a:gd name="adj" fmla="val 50000"/>
+            </a:avLst>
+          </a:prstGeom>
+          <a:solidFill>
+            <a:srgbClr val="0E5C63"/>
+          </a:solidFill>
+          <a:ln>
+            <a:noFill/>
+          </a:ln>
+          <a:effectLst/>
+        </p:spPr>
+        <p:style>
+          <a:lnRef idx="1">
+            <a:schemeClr val="accent1"/>
+          </a:lnRef>
+          <a:fillRef idx="3">
+            <a:schemeClr val="accent1"/>
+          </a:fillRef>
+          <a:effectRef idx="2">
+            <a:schemeClr val="accent1"/>
+          </a:effectRef>
+          <a:fontRef idx="minor">
+            <a:schemeClr val="lt1"/>
+          </a:fontRef>
+        </p:style>
+        <p:txBody>
+          <a:bodyPr rtlCol="0" anchor="ctr"/>
+          <a:lstStyle/>
+          <a:p>
+            <a:pPr algn="ctr"/>
+          </a:p>
+        </p:txBody>
+      </p:sp>
+      <p:sp>
+        <p:nvSpPr>
+          <p:cNvPr id="9" name="TextBox 8"/>
+          <p:cNvSpPr txBox="1"/>
+          <p:nvPr/>
+        </p:nvSpPr>
+        <p:spPr>
+          <a:xfrm>
+            <a:off x="4356847" y="2139696"/>
+            <a:ext cx="1005840" cy="164592"/>
+          </a:xfrm>
+          <a:prstGeom prst="rect">
+            <a:avLst/>
+          </a:prstGeom>
+          <a:noFill/>
+          <a:ln/>
+        </p:spPr>
+        <p:txBody>
+          <a:bodyPr wrap="square" anchor="ctr" lIns="25400" rIns="25400" tIns="25400" bIns="25400">
+            <a:spAutoFit/>
+          </a:bodyPr>
+          <a:lstStyle/>
+          <a:p>
+            <a:pPr algn="l">
+              <a:lnSpc>
+                <a:spcPct val="100000"/>
+              </a:lnSpc>
+              <a:spcBef>
+                <a:spcPts val="0"/>
+              </a:spcBef>
+              <a:spcAft>
+                <a:spcPts val="0"/>
+              </a:spcAft>
+            </a:pPr>
+            <a:r>
+              <a:rPr sz="1350" b="1" i="0">
+                <a:solidFill>
+                  <a:srgbClr val="20242A"/>
+                </a:solidFill>
+                <a:latin typeface="Helvetica Neue"/>
+              </a:rPr>
+              <a:t>€72k</a:t>
+            </a:r>
+          </a:p>
+        </p:txBody>
+      </p:sp>
+      <p:sp>
+        <p:nvSpPr>
+          <p:cNvPr id="10" name="TextBox 9"/>
+          <p:cNvSpPr txBox="1"/>
+          <p:nvPr/>
+        </p:nvSpPr>
+        <p:spPr>
+          <a:xfrm>
+            <a:off x="365760" y="2257806"/>
+            <a:ext cx="3808207" cy="256032"/>
+          </a:xfrm>
+          <a:prstGeom prst="rect">
+            <a:avLst/>
+          </a:prstGeom>
+          <a:noFill/>
+          <a:ln/>
+        </p:spPr>
+        <p:txBody>
+          <a:bodyPr wrap="square" anchor="b" lIns="25400" rIns="25400" tIns="25400" bIns="25400">
+            <a:spAutoFit/>
+          </a:bodyPr>
+          <a:lstStyle/>
+          <a:p>
+            <a:pPr algn="l">
+              <a:lnSpc>
+                <a:spcPct val="112000"/>
+              </a:lnSpc>
+              <a:spcBef>
+                <a:spcPts val="0"/>
+              </a:spcBef>
+              <a:spcAft>
+                <a:spcPts val="0"/>
+              </a:spcAft>
+            </a:pPr>
+            <a:r>
+              <a:rPr sz="1100" b="0" i="0">
+                <a:solidFill>
+                  <a:srgbClr val="8A8478"/>
+                </a:solidFill>
+                <a:latin typeface="Helvetica Neue"/>
+              </a:rPr>
+              <a:t>工程</a:t>
+            </a:r>
+          </a:p>
+        </p:txBody>
+      </p:sp>
+      <p:sp>
+        <p:nvSpPr>
+          <p:cNvPr id="11" name="Rounded Rectangle 10"/>
+          <p:cNvSpPr/>
+          <p:nvPr/>
+        </p:nvSpPr>
+        <p:spPr>
+          <a:xfrm>
+            <a:off x="365760" y="2513838"/>
+            <a:ext cx="3808207" cy="164592"/>
+          </a:xfrm>
+          <a:prstGeom prst="roundRect">
+            <a:avLst>
+              <a:gd name="adj" fmla="val 50000"/>
+            </a:avLst>
+          </a:prstGeom>
+          <a:solidFill>
+            <a:srgbClr val="E7DFD1"/>
+          </a:solidFill>
+          <a:ln>
+            <a:noFill/>
+          </a:ln>
+          <a:effectLst/>
+        </p:spPr>
+        <p:style>
+          <a:lnRef idx="1">
+            <a:schemeClr val="accent1"/>
+          </a:lnRef>
+          <a:fillRef idx="3">
+            <a:schemeClr val="accent1"/>
+          </a:fillRef>
+          <a:effectRef idx="2">
+            <a:schemeClr val="accent1"/>
+          </a:effectRef>
+          <a:fontRef idx="minor">
+            <a:schemeClr val="lt1"/>
+          </a:fontRef>
+        </p:style>
+        <p:txBody>
+          <a:bodyPr rtlCol="0" anchor="ctr"/>
+          <a:lstStyle/>
+          <a:p>
+            <a:pPr algn="ctr"/>
+          </a:p>
+        </p:txBody>
+      </p:sp>
+      <p:sp>
+        <p:nvSpPr>
+          <p:cNvPr id="12" name="Rounded Rectangle 11"/>
+          <p:cNvSpPr/>
+          <p:nvPr/>
+        </p:nvSpPr>
+        <p:spPr>
+          <a:xfrm>
+            <a:off x="365760" y="2513838"/>
+            <a:ext cx="3236975" cy="164592"/>
+          </a:xfrm>
+          <a:prstGeom prst="roundRect">
+            <a:avLst>
+              <a:gd name="adj" fmla="val 50000"/>
+            </a:avLst>
+          </a:prstGeom>
+          <a:solidFill>
+            <a:srgbClr val="0E5C63"/>
+          </a:solidFill>
+          <a:ln>
+            <a:noFill/>
+          </a:ln>
+          <a:effectLst/>
+        </p:spPr>
+        <p:style>
+          <a:lnRef idx="1">
+            <a:schemeClr val="accent1"/>
+          </a:lnRef>
+          <a:fillRef idx="3">
+            <a:schemeClr val="accent1"/>
+          </a:fillRef>
+          <a:effectRef idx="2">
+            <a:schemeClr val="accent1"/>
+          </a:effectRef>
+          <a:fontRef idx="minor">
+            <a:schemeClr val="lt1"/>
+          </a:fontRef>
+        </p:style>
+        <p:txBody>
+          <a:bodyPr rtlCol="0" anchor="ctr"/>
+          <a:lstStyle/>
+          <a:p>
+            <a:pPr algn="ctr"/>
+          </a:p>
+        </p:txBody>
+      </p:sp>
+      <p:sp>
+        <p:nvSpPr>
+          <p:cNvPr id="13" name="TextBox 12"/>
+          <p:cNvSpPr txBox="1"/>
+          <p:nvPr/>
+        </p:nvSpPr>
+        <p:spPr>
+          <a:xfrm>
+            <a:off x="4356847" y="2513838"/>
+            <a:ext cx="1005840" cy="164592"/>
+          </a:xfrm>
+          <a:prstGeom prst="rect">
+            <a:avLst/>
+          </a:prstGeom>
+          <a:noFill/>
+          <a:ln/>
+        </p:spPr>
+        <p:txBody>
+          <a:bodyPr wrap="square" anchor="ctr" lIns="25400" rIns="25400" tIns="25400" bIns="25400">
+            <a:spAutoFit/>
+          </a:bodyPr>
+          <a:lstStyle/>
+          <a:p>
+            <a:pPr algn="l">
+              <a:lnSpc>
+                <a:spcPct val="100000"/>
+              </a:lnSpc>
+              <a:spcBef>
+                <a:spcPts val="0"/>
+              </a:spcBef>
+              <a:spcAft>
+                <a:spcPts val="0"/>
+              </a:spcAft>
+            </a:pPr>
+            <a:r>
+              <a:rPr sz="1350" b="1" i="0">
+                <a:solidFill>
+                  <a:srgbClr val="20242A"/>
+                </a:solidFill>
+                <a:latin typeface="Helvetica Neue"/>
+              </a:rPr>
+              <a:t>€68k</a:t>
+            </a:r>
+          </a:p>
+        </p:txBody>
+      </p:sp>
+      <p:sp>
+        <p:nvSpPr>
+          <p:cNvPr id="14" name="TextBox 13"/>
+          <p:cNvSpPr txBox="1"/>
+          <p:nvPr/>
+        </p:nvSpPr>
+        <p:spPr>
+          <a:xfrm>
+            <a:off x="365760" y="2631948"/>
+            <a:ext cx="3808207" cy="256032"/>
+          </a:xfrm>
+          <a:prstGeom prst="rect">
+            <a:avLst/>
+          </a:prstGeom>
+          <a:noFill/>
+          <a:ln/>
+        </p:spPr>
+        <p:txBody>
+          <a:bodyPr wrap="square" anchor="b" lIns="25400" rIns="25400" tIns="25400" bIns="25400">
+            <a:spAutoFit/>
+          </a:bodyPr>
+          <a:lstStyle/>
+          <a:p>
+            <a:pPr algn="l">
+              <a:lnSpc>
+                <a:spcPct val="112000"/>
+              </a:lnSpc>
+              <a:spcBef>
+                <a:spcPts val="0"/>
+              </a:spcBef>
+              <a:spcAft>
+                <a:spcPts val="0"/>
+              </a:spcAft>
+            </a:pPr>
+            <a:r>
+              <a:rPr sz="1100" b="0" i="0">
+                <a:solidFill>
+                  <a:srgbClr val="8A8478"/>
+                </a:solidFill>
+                <a:latin typeface="Helvetica Neue"/>
+              </a:rPr>
+              <a:t>金融与商业服务</a:t>
+            </a:r>
+          </a:p>
+        </p:txBody>
+      </p:sp>
+      <p:sp>
+        <p:nvSpPr>
+          <p:cNvPr id="15" name="Rounded Rectangle 14"/>
+          <p:cNvSpPr/>
+          <p:nvPr/>
+        </p:nvSpPr>
+        <p:spPr>
+          <a:xfrm>
+            <a:off x="365760" y="2887980"/>
+            <a:ext cx="3808207" cy="164592"/>
+          </a:xfrm>
+          <a:prstGeom prst="roundRect">
+            <a:avLst>
+              <a:gd name="adj" fmla="val 50000"/>
+            </a:avLst>
+          </a:prstGeom>
+          <a:solidFill>
+            <a:srgbClr val="E7DFD1"/>
+          </a:solidFill>
+          <a:ln>
+            <a:noFill/>
+          </a:ln>
+          <a:effectLst/>
+        </p:spPr>
+        <p:style>
+          <a:lnRef idx="1">
+            <a:schemeClr val="accent1"/>
+          </a:lnRef>
+          <a:fillRef idx="3">
+            <a:schemeClr val="accent1"/>
+          </a:fillRef>
+          <a:effectRef idx="2">
+            <a:schemeClr val="accent1"/>
+          </a:effectRef>
+          <a:fontRef idx="minor">
+            <a:schemeClr val="lt1"/>
+          </a:fontRef>
+        </p:style>
+        <p:txBody>
+          <a:bodyPr rtlCol="0" anchor="ctr"/>
+          <a:lstStyle/>
+          <a:p>
+            <a:pPr algn="ctr"/>
+          </a:p>
+        </p:txBody>
+      </p:sp>
+      <p:sp>
+        <p:nvSpPr>
+          <p:cNvPr id="16" name="Rounded Rectangle 15"/>
+          <p:cNvSpPr/>
+          <p:nvPr/>
+        </p:nvSpPr>
+        <p:spPr>
+          <a:xfrm>
+            <a:off x="365760" y="2887980"/>
+            <a:ext cx="3094168" cy="164592"/>
+          </a:xfrm>
+          <a:prstGeom prst="roundRect">
+            <a:avLst>
+              <a:gd name="adj" fmla="val 50000"/>
+            </a:avLst>
+          </a:prstGeom>
+          <a:solidFill>
+            <a:srgbClr val="0E5C63"/>
+          </a:solidFill>
+          <a:ln>
+            <a:noFill/>
+          </a:ln>
+          <a:effectLst/>
+        </p:spPr>
+        <p:style>
+          <a:lnRef idx="1">
+            <a:schemeClr val="accent1"/>
+          </a:lnRef>
+          <a:fillRef idx="3">
+            <a:schemeClr val="accent1"/>
+          </a:fillRef>
+          <a:effectRef idx="2">
+            <a:schemeClr val="accent1"/>
+          </a:effectRef>
+          <a:fontRef idx="minor">
+            <a:schemeClr val="lt1"/>
+          </a:fontRef>
+        </p:style>
+        <p:txBody>
+          <a:bodyPr rtlCol="0" anchor="ctr"/>
+          <a:lstStyle/>
+          <a:p>
+            <a:pPr algn="ctr"/>
+          </a:p>
+        </p:txBody>
+      </p:sp>
+      <p:sp>
+        <p:nvSpPr>
+          <p:cNvPr id="17" name="TextBox 16"/>
+          <p:cNvSpPr txBox="1"/>
+          <p:nvPr/>
+        </p:nvSpPr>
+        <p:spPr>
+          <a:xfrm>
+            <a:off x="4356847" y="2887980"/>
+            <a:ext cx="1005840" cy="164592"/>
+          </a:xfrm>
+          <a:prstGeom prst="rect">
+            <a:avLst/>
+          </a:prstGeom>
+          <a:noFill/>
+          <a:ln/>
+        </p:spPr>
+        <p:txBody>
+          <a:bodyPr wrap="square" anchor="ctr" lIns="25400" rIns="25400" tIns="25400" bIns="25400">
+            <a:spAutoFit/>
+          </a:bodyPr>
+          <a:lstStyle/>
+          <a:p>
+            <a:pPr algn="l">
+              <a:lnSpc>
+                <a:spcPct val="100000"/>
+              </a:lnSpc>
+              <a:spcBef>
+                <a:spcPts val="0"/>
+              </a:spcBef>
+              <a:spcAft>
+                <a:spcPts val="0"/>
+              </a:spcAft>
+            </a:pPr>
+            <a:r>
+              <a:rPr sz="1350" b="1" i="0">
+                <a:solidFill>
+                  <a:srgbClr val="20242A"/>
+                </a:solidFill>
+                <a:latin typeface="Helvetica Neue"/>
+              </a:rPr>
+              <a:t>€65k</a:t>
+            </a:r>
+          </a:p>
+        </p:txBody>
+      </p:sp>
+      <p:sp>
+        <p:nvSpPr>
+          <p:cNvPr id="18" name="TextBox 17"/>
+          <p:cNvSpPr txBox="1"/>
+          <p:nvPr/>
+        </p:nvSpPr>
+        <p:spPr>
+          <a:xfrm>
+            <a:off x="365760" y="3006090"/>
+            <a:ext cx="3808207" cy="256032"/>
+          </a:xfrm>
+          <a:prstGeom prst="rect">
+            <a:avLst/>
+          </a:prstGeom>
+          <a:noFill/>
+          <a:ln/>
+        </p:spPr>
+        <p:txBody>
+          <a:bodyPr wrap="square" anchor="b" lIns="25400" rIns="25400" tIns="25400" bIns="25400">
+            <a:spAutoFit/>
+          </a:bodyPr>
+          <a:lstStyle/>
+          <a:p>
+            <a:pPr algn="l">
+              <a:lnSpc>
+                <a:spcPct val="112000"/>
+              </a:lnSpc>
+              <a:spcBef>
+                <a:spcPts val="0"/>
+              </a:spcBef>
+              <a:spcAft>
+                <a:spcPts val="0"/>
+              </a:spcAft>
+            </a:pPr>
+            <a:r>
+              <a:rPr sz="1100" b="0" i="0">
+                <a:solidFill>
+                  <a:srgbClr val="8A8478"/>
+                </a:solidFill>
+                <a:latin typeface="Helvetica Neue"/>
+              </a:rPr>
+              <a:t>全国平均（CBS）</a:t>
+            </a:r>
+          </a:p>
+        </p:txBody>
+      </p:sp>
+      <p:sp>
+        <p:nvSpPr>
+          <p:cNvPr id="19" name="Rounded Rectangle 18"/>
+          <p:cNvSpPr/>
+          <p:nvPr/>
+        </p:nvSpPr>
+        <p:spPr>
+          <a:xfrm>
+            <a:off x="365760" y="3262122"/>
+            <a:ext cx="3808207" cy="164592"/>
+          </a:xfrm>
+          <a:prstGeom prst="roundRect">
+            <a:avLst>
+              <a:gd name="adj" fmla="val 50000"/>
+            </a:avLst>
+          </a:prstGeom>
+          <a:solidFill>
+            <a:srgbClr val="E7DFD1"/>
+          </a:solidFill>
+          <a:ln>
+            <a:noFill/>
+          </a:ln>
+          <a:effectLst/>
+        </p:spPr>
+        <p:style>
+          <a:lnRef idx="1">
+            <a:schemeClr val="accent1"/>
+          </a:lnRef>
+          <a:fillRef idx="3">
+            <a:schemeClr val="accent1"/>
+          </a:fillRef>
+          <a:effectRef idx="2">
+            <a:schemeClr val="accent1"/>
+          </a:effectRef>
+          <a:fontRef idx="minor">
+            <a:schemeClr val="lt1"/>
+          </a:fontRef>
+        </p:style>
+        <p:txBody>
+          <a:bodyPr rtlCol="0" anchor="ctr"/>
+          <a:lstStyle/>
+          <a:p>
+            <a:pPr algn="ctr"/>
+          </a:p>
+        </p:txBody>
+      </p:sp>
+      <p:sp>
+        <p:nvSpPr>
+          <p:cNvPr id="20" name="Rounded Rectangle 19"/>
+          <p:cNvSpPr/>
+          <p:nvPr/>
+        </p:nvSpPr>
+        <p:spPr>
+          <a:xfrm>
+            <a:off x="365760" y="3262122"/>
+            <a:ext cx="2543691" cy="164592"/>
+          </a:xfrm>
+          <a:prstGeom prst="roundRect">
+            <a:avLst>
+              <a:gd name="adj" fmla="val 50000"/>
+            </a:avLst>
           </a:prstGeom>
           <a:solidFill>
             <a:srgbClr val="D8542A"/>
@@ -16240,23 +16580,69 @@
       </p:sp>
       <p:sp>
         <p:nvSpPr>
-          <p:cNvPr id="6" name="TextBox 5"/>
-          <p:cNvSpPr txBox="1"/>
-          <p:nvPr/>
-        </p:nvSpPr>
-        <p:spPr>
-          <a:xfrm>
-            <a:off x="365760" y="1508760"/>
-            <a:ext cx="5088367" cy="274320"/>
-          </a:xfrm>
-          <a:prstGeom prst="rect">
-            <a:avLst/>
-          </a:prstGeom>
-          <a:noFill/>
-          <a:ln/>
-        </p:spPr>
-        <p:txBody>
-          <a:bodyPr wrap="square" anchor="t" lIns="25400" rIns="25400" tIns="25400" bIns="25400">
+          <p:cNvPr id="21" name="TextBox 20"/>
+          <p:cNvSpPr txBox="1"/>
+          <p:nvPr/>
+        </p:nvSpPr>
+        <p:spPr>
+          <a:xfrm>
+            <a:off x="4356847" y="3262122"/>
+            <a:ext cx="1005840" cy="164592"/>
+          </a:xfrm>
+          <a:prstGeom prst="rect">
+            <a:avLst/>
+          </a:prstGeom>
+          <a:noFill/>
+          <a:ln/>
+        </p:spPr>
+        <p:txBody>
+          <a:bodyPr wrap="square" anchor="ctr" lIns="25400" rIns="25400" tIns="25400" bIns="25400">
+            <a:spAutoFit/>
+          </a:bodyPr>
+          <a:lstStyle/>
+          <a:p>
+            <a:pPr algn="l">
+              <a:lnSpc>
+                <a:spcPct val="100000"/>
+              </a:lnSpc>
+              <a:spcBef>
+                <a:spcPts val="0"/>
+              </a:spcBef>
+              <a:spcAft>
+                <a:spcPts val="0"/>
+              </a:spcAft>
+            </a:pPr>
+            <a:r>
+              <a:rPr sz="1350" b="1" i="0">
+                <a:solidFill>
+                  <a:srgbClr val="20242A"/>
+                </a:solidFill>
+                <a:latin typeface="Helvetica Neue"/>
+              </a:rPr>
+              <a:t>€53k</a:t>
+            </a:r>
+          </a:p>
+        </p:txBody>
+      </p:sp>
+      <p:sp>
+        <p:nvSpPr>
+          <p:cNvPr id="22" name="TextBox 21"/>
+          <p:cNvSpPr txBox="1"/>
+          <p:nvPr/>
+        </p:nvSpPr>
+        <p:spPr>
+          <a:xfrm>
+            <a:off x="365760" y="3380232"/>
+            <a:ext cx="3808207" cy="256032"/>
+          </a:xfrm>
+          <a:prstGeom prst="rect">
+            <a:avLst/>
+          </a:prstGeom>
+          <a:noFill/>
+          <a:ln/>
+        </p:spPr>
+        <p:txBody>
+          <a:bodyPr wrap="square" anchor="b" lIns="25400" rIns="25400" tIns="25400" bIns="25400">
             <a:spAutoFit/>
           </a:bodyPr>
           <a:lstStyle/>
@@ -16273,72 +16659,26 @@
               </a:spcAft>
             </a:pPr>
             <a:r>
-              <a:rPr sz="950" b="1" i="0">
+              <a:rPr sz="1100" b="0" i="0">
                 <a:solidFill>
                   <a:srgbClr val="8A8478"/>
                 </a:solidFill>
-                <a:latin typeface="Courier New"/>
-              </a:rPr>
-              <a:t>税前年薪估算，欧元/年</a:t>
-            </a:r>
-          </a:p>
-        </p:txBody>
-      </p:sp>
-      <p:sp>
-        <p:nvSpPr>
-          <p:cNvPr id="7" name="TextBox 6"/>
-          <p:cNvSpPr txBox="1"/>
-          <p:nvPr/>
-        </p:nvSpPr>
-        <p:spPr>
-          <a:xfrm>
-            <a:off x="365760" y="1883664"/>
-            <a:ext cx="3808207" cy="256032"/>
-          </a:xfrm>
-          <a:prstGeom prst="rect">
-            <a:avLst/>
-          </a:prstGeom>
-          <a:noFill/>
-          <a:ln/>
-        </p:spPr>
-        <p:txBody>
-          <a:bodyPr wrap="square" anchor="b" lIns="25400" rIns="25400" tIns="25400" bIns="25400">
-            <a:spAutoFit/>
-          </a:bodyPr>
-          <a:lstStyle/>
-          <a:p>
-            <a:pPr algn="l">
-              <a:lnSpc>
-                <a:spcPct val="112000"/>
-              </a:lnSpc>
-              <a:spcBef>
-                <a:spcPts val="0"/>
-              </a:spcBef>
-              <a:spcAft>
-                <a:spcPts val="0"/>
-              </a:spcAft>
-            </a:pPr>
-            <a:r>
-              <a:rPr sz="1100" b="0" i="0">
-                <a:solidFill>
-                  <a:srgbClr val="8A8478"/>
-                </a:solidFill>
                 <a:latin typeface="Helvetica Neue"/>
               </a:rPr>
-              <a:t>信息技术（中级）</a:t>
-            </a:r>
-          </a:p>
-        </p:txBody>
-      </p:sp>
-      <p:sp>
-        <p:nvSpPr>
-          <p:cNvPr id="8" name="Rounded Rectangle 7"/>
+              <a:t>医疗（注册护士）</a:t>
+            </a:r>
+          </a:p>
+        </p:txBody>
+      </p:sp>
+      <p:sp>
+        <p:nvSpPr>
+          <p:cNvPr id="23" name="Rounded Rectangle 22"/>
           <p:cNvSpPr/>
           <p:nvPr/>
         </p:nvSpPr>
         <p:spPr>
           <a:xfrm>
-            <a:off x="365760" y="2139696"/>
+            <a:off x="365760" y="3636264"/>
             <a:ext cx="3808207" cy="164592"/>
           </a:xfrm>
           <a:prstGeom prst="roundRect">
@@ -16378,14 +16718,14 @@
       </p:sp>
       <p:sp>
         <p:nvSpPr>
-          <p:cNvPr id="9" name="Rounded Rectangle 8"/>
+          <p:cNvPr id="24" name="Rounded Rectangle 23"/>
           <p:cNvSpPr/>
           <p:nvPr/>
         </p:nvSpPr>
         <p:spPr>
           <a:xfrm>
-            <a:off x="365760" y="2139696"/>
-            <a:ext cx="3427386" cy="164592"/>
+            <a:off x="365760" y="3636264"/>
+            <a:ext cx="2142116" cy="164592"/>
           </a:xfrm>
           <a:prstGeom prst="roundRect">
             <a:avLst>
@@ -16424,13 +16764,13 @@
       </p:sp>
       <p:sp>
         <p:nvSpPr>
-          <p:cNvPr id="10" name="TextBox 9"/>
-          <p:cNvSpPr txBox="1"/>
-          <p:nvPr/>
-        </p:nvSpPr>
-        <p:spPr>
-          <a:xfrm>
-            <a:off x="4356847" y="2139696"/>
+          <p:cNvPr id="25" name="TextBox 24"/>
+          <p:cNvSpPr txBox="1"/>
+          <p:nvPr/>
+        </p:nvSpPr>
+        <p:spPr>
+          <a:xfrm>
+            <a:off x="4356847" y="3636264"/>
             <a:ext cx="1005840" cy="164592"/>
           </a:xfrm>
           <a:prstGeom prst="rect">
@@ -16463,20 +16803,20 @@
                 </a:solidFill>
                 <a:latin typeface="Helvetica Neue"/>
               </a:rPr>
-              <a:t>€72k</a:t>
-            </a:r>
-          </a:p>
-        </p:txBody>
-      </p:sp>
-      <p:sp>
-        <p:nvSpPr>
-          <p:cNvPr id="11" name="TextBox 10"/>
-          <p:cNvSpPr txBox="1"/>
-          <p:nvPr/>
-        </p:nvSpPr>
-        <p:spPr>
-          <a:xfrm>
-            <a:off x="365760" y="2257806"/>
+              <a:t>€45k</a:t>
+            </a:r>
+          </a:p>
+        </p:txBody>
+      </p:sp>
+      <p:sp>
+        <p:nvSpPr>
+          <p:cNvPr id="26" name="TextBox 25"/>
+          <p:cNvSpPr txBox="1"/>
+          <p:nvPr/>
+        </p:nvSpPr>
+        <p:spPr>
+          <a:xfrm>
+            <a:off x="365760" y="3754373"/>
             <a:ext cx="3808207" cy="256032"/>
           </a:xfrm>
           <a:prstGeom prst="rect">
@@ -16509,20 +16849,20 @@
                 </a:solidFill>
                 <a:latin typeface="Helvetica Neue"/>
               </a:rPr>
-              <a:t>工程</a:t>
-            </a:r>
-          </a:p>
-        </p:txBody>
-      </p:sp>
-      <p:sp>
-        <p:nvSpPr>
-          <p:cNvPr id="12" name="Rounded Rectangle 11"/>
+              <a:t>住宿餐饮与零售</a:t>
+            </a:r>
+          </a:p>
+        </p:txBody>
+      </p:sp>
+      <p:sp>
+        <p:nvSpPr>
+          <p:cNvPr id="27" name="Rounded Rectangle 26"/>
           <p:cNvSpPr/>
           <p:nvPr/>
         </p:nvSpPr>
         <p:spPr>
           <a:xfrm>
-            <a:off x="365760" y="2513838"/>
+            <a:off x="365760" y="4010406"/>
             <a:ext cx="3808207" cy="164592"/>
           </a:xfrm>
           <a:prstGeom prst="roundRect">
@@ -16562,14 +16902,14 @@
       </p:sp>
       <p:sp>
         <p:nvSpPr>
-          <p:cNvPr id="13" name="Rounded Rectangle 12"/>
+          <p:cNvPr id="28" name="Rounded Rectangle 27"/>
           <p:cNvSpPr/>
           <p:nvPr/>
         </p:nvSpPr>
         <p:spPr>
           <a:xfrm>
-            <a:off x="365760" y="2513838"/>
-            <a:ext cx="3236975" cy="164592"/>
+            <a:off x="365760" y="4010406"/>
+            <a:ext cx="1570885" cy="164592"/>
           </a:xfrm>
           <a:prstGeom prst="roundRect">
             <a:avLst>
@@ -16608,743 +16948,7 @@
       </p:sp>
       <p:sp>
         <p:nvSpPr>
-          <p:cNvPr id="14" name="TextBox 13"/>
-          <p:cNvSpPr txBox="1"/>
-          <p:nvPr/>
-        </p:nvSpPr>
-        <p:spPr>
-          <a:xfrm>
-            <a:off x="4356847" y="2513838"/>
-            <a:ext cx="1005840" cy="164592"/>
-          </a:xfrm>
-          <a:prstGeom prst="rect">
-            <a:avLst/>
-          </a:prstGeom>
-          <a:noFill/>
-          <a:ln/>
-        </p:spPr>
-        <p:txBody>
-          <a:bodyPr wrap="square" anchor="ctr" lIns="25400" rIns="25400" tIns="25400" bIns="25400">
-            <a:spAutoFit/>
-          </a:bodyPr>
-          <a:lstStyle/>
-          <a:p>
-            <a:pPr algn="l">
-              <a:lnSpc>
-                <a:spcPct val="100000"/>
-              </a:lnSpc>
-              <a:spcBef>
-                <a:spcPts val="0"/>
-              </a:spcBef>
-              <a:spcAft>
-                <a:spcPts val="0"/>
-              </a:spcAft>
-            </a:pPr>
-            <a:r>
-              <a:rPr sz="1350" b="1" i="0">
-                <a:solidFill>
-                  <a:srgbClr val="20242A"/>
-                </a:solidFill>
-                <a:latin typeface="Helvetica Neue"/>
-              </a:rPr>
-              <a:t>€68k</a:t>
-            </a:r>
-          </a:p>
-        </p:txBody>
-      </p:sp>
-      <p:sp>
-        <p:nvSpPr>
-          <p:cNvPr id="15" name="TextBox 14"/>
-          <p:cNvSpPr txBox="1"/>
-          <p:nvPr/>
-        </p:nvSpPr>
-        <p:spPr>
-          <a:xfrm>
-            <a:off x="365760" y="2631948"/>
-            <a:ext cx="3808207" cy="256032"/>
-          </a:xfrm>
-          <a:prstGeom prst="rect">
-            <a:avLst/>
-          </a:prstGeom>
-          <a:noFill/>
-          <a:ln/>
-        </p:spPr>
-        <p:txBody>
-          <a:bodyPr wrap="square" anchor="b" lIns="25400" rIns="25400" tIns="25400" bIns="25400">
-            <a:spAutoFit/>
-          </a:bodyPr>
-          <a:lstStyle/>
-          <a:p>
-            <a:pPr algn="l">
-              <a:lnSpc>
-                <a:spcPct val="112000"/>
-              </a:lnSpc>
-              <a:spcBef>
-                <a:spcPts val="0"/>
-              </a:spcBef>
-              <a:spcAft>
-                <a:spcPts val="0"/>
-              </a:spcAft>
-            </a:pPr>
-            <a:r>
-              <a:rPr sz="1100" b="0" i="0">
-                <a:solidFill>
-                  <a:srgbClr val="8A8478"/>
-                </a:solidFill>
-                <a:latin typeface="Helvetica Neue"/>
-              </a:rPr>
-              <a:t>金融与商业服务</a:t>
-            </a:r>
-          </a:p>
-        </p:txBody>
-      </p:sp>
-      <p:sp>
-        <p:nvSpPr>
-          <p:cNvPr id="16" name="Rounded Rectangle 15"/>
-          <p:cNvSpPr/>
-          <p:nvPr/>
-        </p:nvSpPr>
-        <p:spPr>
-          <a:xfrm>
-            <a:off x="365760" y="2887980"/>
-            <a:ext cx="3808207" cy="164592"/>
-          </a:xfrm>
-          <a:prstGeom prst="roundRect">
-            <a:avLst>
-              <a:gd name="adj" fmla="val 50000"/>
-            </a:avLst>
-          </a:prstGeom>
-          <a:solidFill>
-            <a:srgbClr val="E7DFD1"/>
-          </a:solidFill>
-          <a:ln>
-            <a:noFill/>
-          </a:ln>
-          <a:effectLst/>
-        </p:spPr>
-        <p:style>
-          <a:lnRef idx="1">
-            <a:schemeClr val="accent1"/>
-          </a:lnRef>
-          <a:fillRef idx="3">
-            <a:schemeClr val="accent1"/>
-          </a:fillRef>
-          <a:effectRef idx="2">
-            <a:schemeClr val="accent1"/>
-          </a:effectRef>
-          <a:fontRef idx="minor">
-            <a:schemeClr val="lt1"/>
-          </a:fontRef>
-        </p:style>
-        <p:txBody>
-          <a:bodyPr rtlCol="0" anchor="ctr"/>
-          <a:lstStyle/>
-          <a:p>
-            <a:pPr algn="ctr"/>
-          </a:p>
-        </p:txBody>
-      </p:sp>
-      <p:sp>
-        <p:nvSpPr>
-          <p:cNvPr id="17" name="Rounded Rectangle 16"/>
-          <p:cNvSpPr/>
-          <p:nvPr/>
-        </p:nvSpPr>
-        <p:spPr>
-          <a:xfrm>
-            <a:off x="365760" y="2887980"/>
-            <a:ext cx="3094168" cy="164592"/>
-          </a:xfrm>
-          <a:prstGeom prst="roundRect">
-            <a:avLst>
-              <a:gd name="adj" fmla="val 50000"/>
-            </a:avLst>
-          </a:prstGeom>
-          <a:solidFill>
-            <a:srgbClr val="0E5C63"/>
-          </a:solidFill>
-          <a:ln>
-            <a:noFill/>
-          </a:ln>
-          <a:effectLst/>
-        </p:spPr>
-        <p:style>
-          <a:lnRef idx="1">
-            <a:schemeClr val="accent1"/>
-          </a:lnRef>
-          <a:fillRef idx="3">
-            <a:schemeClr val="accent1"/>
-          </a:fillRef>
-          <a:effectRef idx="2">
-            <a:schemeClr val="accent1"/>
-          </a:effectRef>
-          <a:fontRef idx="minor">
-            <a:schemeClr val="lt1"/>
-          </a:fontRef>
-        </p:style>
-        <p:txBody>
-          <a:bodyPr rtlCol="0" anchor="ctr"/>
-          <a:lstStyle/>
-          <a:p>
-            <a:pPr algn="ctr"/>
-          </a:p>
-        </p:txBody>
-      </p:sp>
-      <p:sp>
-        <p:nvSpPr>
-          <p:cNvPr id="18" name="TextBox 17"/>
-          <p:cNvSpPr txBox="1"/>
-          <p:nvPr/>
-        </p:nvSpPr>
-        <p:spPr>
-          <a:xfrm>
-            <a:off x="4356847" y="2887980"/>
-            <a:ext cx="1005840" cy="164592"/>
-          </a:xfrm>
-          <a:prstGeom prst="rect">
-            <a:avLst/>
-          </a:prstGeom>
-          <a:noFill/>
-          <a:ln/>
-        </p:spPr>
-        <p:txBody>
-          <a:bodyPr wrap="square" anchor="ctr" lIns="25400" rIns="25400" tIns="25400" bIns="25400">
-            <a:spAutoFit/>
-          </a:bodyPr>
-          <a:lstStyle/>
-          <a:p>
-            <a:pPr algn="l">
-              <a:lnSpc>
-                <a:spcPct val="100000"/>
-              </a:lnSpc>
-              <a:spcBef>
-                <a:spcPts val="0"/>
-              </a:spcBef>
-              <a:spcAft>
-                <a:spcPts val="0"/>
-              </a:spcAft>
-            </a:pPr>
-            <a:r>
-              <a:rPr sz="1350" b="1" i="0">
-                <a:solidFill>
-                  <a:srgbClr val="20242A"/>
-                </a:solidFill>
-                <a:latin typeface="Helvetica Neue"/>
-              </a:rPr>
-              <a:t>€65k</a:t>
-            </a:r>
-          </a:p>
-        </p:txBody>
-      </p:sp>
-      <p:sp>
-        <p:nvSpPr>
-          <p:cNvPr id="19" name="TextBox 18"/>
-          <p:cNvSpPr txBox="1"/>
-          <p:nvPr/>
-        </p:nvSpPr>
-        <p:spPr>
-          <a:xfrm>
-            <a:off x="365760" y="3006090"/>
-            <a:ext cx="3808207" cy="256032"/>
-          </a:xfrm>
-          <a:prstGeom prst="rect">
-            <a:avLst/>
-          </a:prstGeom>
-          <a:noFill/>
-          <a:ln/>
-        </p:spPr>
-        <p:txBody>
-          <a:bodyPr wrap="square" anchor="b" lIns="25400" rIns="25400" tIns="25400" bIns="25400">
-            <a:spAutoFit/>
-          </a:bodyPr>
-          <a:lstStyle/>
-          <a:p>
-            <a:pPr algn="l">
-              <a:lnSpc>
-                <a:spcPct val="112000"/>
-              </a:lnSpc>
-              <a:spcBef>
-                <a:spcPts val="0"/>
-              </a:spcBef>
-              <a:spcAft>
-                <a:spcPts val="0"/>
-              </a:spcAft>
-            </a:pPr>
-            <a:r>
-              <a:rPr sz="1100" b="0" i="0">
-                <a:solidFill>
-                  <a:srgbClr val="8A8478"/>
-                </a:solidFill>
-                <a:latin typeface="Helvetica Neue"/>
-              </a:rPr>
-              <a:t>全国平均（CBS）</a:t>
-            </a:r>
-          </a:p>
-        </p:txBody>
-      </p:sp>
-      <p:sp>
-        <p:nvSpPr>
-          <p:cNvPr id="20" name="Rounded Rectangle 19"/>
-          <p:cNvSpPr/>
-          <p:nvPr/>
-        </p:nvSpPr>
-        <p:spPr>
-          <a:xfrm>
-            <a:off x="365760" y="3262122"/>
-            <a:ext cx="3808207" cy="164592"/>
-          </a:xfrm>
-          <a:prstGeom prst="roundRect">
-            <a:avLst>
-              <a:gd name="adj" fmla="val 50000"/>
-            </a:avLst>
-          </a:prstGeom>
-          <a:solidFill>
-            <a:srgbClr val="E7DFD1"/>
-          </a:solidFill>
-          <a:ln>
-            <a:noFill/>
-          </a:ln>
-          <a:effectLst/>
-        </p:spPr>
-        <p:style>
-          <a:lnRef idx="1">
-            <a:schemeClr val="accent1"/>
-          </a:lnRef>
-          <a:fillRef idx="3">
-            <a:schemeClr val="accent1"/>
-          </a:fillRef>
-          <a:effectRef idx="2">
-            <a:schemeClr val="accent1"/>
-          </a:effectRef>
-          <a:fontRef idx="minor">
-            <a:schemeClr val="lt1"/>
-          </a:fontRef>
-        </p:style>
-        <p:txBody>
-          <a:bodyPr rtlCol="0" anchor="ctr"/>
-          <a:lstStyle/>
-          <a:p>
-            <a:pPr algn="ctr"/>
-          </a:p>
-        </p:txBody>
-      </p:sp>
-      <p:sp>
-        <p:nvSpPr>
-          <p:cNvPr id="21" name="Rounded Rectangle 20"/>
-          <p:cNvSpPr/>
-          <p:nvPr/>
-        </p:nvSpPr>
-        <p:spPr>
-          <a:xfrm>
-            <a:off x="365760" y="3262122"/>
-            <a:ext cx="2543691" cy="164592"/>
-          </a:xfrm>
-          <a:prstGeom prst="roundRect">
-            <a:avLst>
-              <a:gd name="adj" fmla="val 50000"/>
-            </a:avLst>
-          </a:prstGeom>
-          <a:solidFill>
-            <a:srgbClr val="D8542A"/>
-          </a:solidFill>
-          <a:ln>
-            <a:noFill/>
-          </a:ln>
-          <a:effectLst/>
-        </p:spPr>
-        <p:style>
-          <a:lnRef idx="1">
-            <a:schemeClr val="accent1"/>
-          </a:lnRef>
-          <a:fillRef idx="3">
-            <a:schemeClr val="accent1"/>
-          </a:fillRef>
-          <a:effectRef idx="2">
-            <a:schemeClr val="accent1"/>
-          </a:effectRef>
-          <a:fontRef idx="minor">
-            <a:schemeClr val="lt1"/>
-          </a:fontRef>
-        </p:style>
-        <p:txBody>
-          <a:bodyPr rtlCol="0" anchor="ctr"/>
-          <a:lstStyle/>
-          <a:p>
-            <a:pPr algn="ctr"/>
-          </a:p>
-        </p:txBody>
-      </p:sp>
-      <p:sp>
-        <p:nvSpPr>
-          <p:cNvPr id="22" name="TextBox 21"/>
-          <p:cNvSpPr txBox="1"/>
-          <p:nvPr/>
-        </p:nvSpPr>
-        <p:spPr>
-          <a:xfrm>
-            <a:off x="4356847" y="3262122"/>
-            <a:ext cx="1005840" cy="164592"/>
-          </a:xfrm>
-          <a:prstGeom prst="rect">
-            <a:avLst/>
-          </a:prstGeom>
-          <a:noFill/>
-          <a:ln/>
-        </p:spPr>
-        <p:txBody>
-          <a:bodyPr wrap="square" anchor="ctr" lIns="25400" rIns="25400" tIns="25400" bIns="25400">
-            <a:spAutoFit/>
-          </a:bodyPr>
-          <a:lstStyle/>
-          <a:p>
-            <a:pPr algn="l">
-              <a:lnSpc>
-                <a:spcPct val="100000"/>
-              </a:lnSpc>
-              <a:spcBef>
-                <a:spcPts val="0"/>
-              </a:spcBef>
-              <a:spcAft>
-                <a:spcPts val="0"/>
-              </a:spcAft>
-            </a:pPr>
-            <a:r>
-              <a:rPr sz="1350" b="1" i="0">
-                <a:solidFill>
-                  <a:srgbClr val="20242A"/>
-                </a:solidFill>
-                <a:latin typeface="Helvetica Neue"/>
-              </a:rPr>
-              <a:t>€53k</a:t>
-            </a:r>
-          </a:p>
-        </p:txBody>
-      </p:sp>
-      <p:sp>
-        <p:nvSpPr>
-          <p:cNvPr id="23" name="TextBox 22"/>
-          <p:cNvSpPr txBox="1"/>
-          <p:nvPr/>
-        </p:nvSpPr>
-        <p:spPr>
-          <a:xfrm>
-            <a:off x="365760" y="3380232"/>
-            <a:ext cx="3808207" cy="256032"/>
-          </a:xfrm>
-          <a:prstGeom prst="rect">
-            <a:avLst/>
-          </a:prstGeom>
-          <a:noFill/>
-          <a:ln/>
-        </p:spPr>
-        <p:txBody>
-          <a:bodyPr wrap="square" anchor="b" lIns="25400" rIns="25400" tIns="25400" bIns="25400">
-            <a:spAutoFit/>
-          </a:bodyPr>
-          <a:lstStyle/>
-          <a:p>
-            <a:pPr algn="l">
-              <a:lnSpc>
-                <a:spcPct val="112000"/>
-              </a:lnSpc>
-              <a:spcBef>
-                <a:spcPts val="0"/>
-              </a:spcBef>
-              <a:spcAft>
-                <a:spcPts val="0"/>
-              </a:spcAft>
-            </a:pPr>
-            <a:r>
-              <a:rPr sz="1100" b="0" i="0">
-                <a:solidFill>
-                  <a:srgbClr val="8A8478"/>
-                </a:solidFill>
-                <a:latin typeface="Helvetica Neue"/>
-              </a:rPr>
-              <a:t>医疗（注册护士）</a:t>
-            </a:r>
-          </a:p>
-        </p:txBody>
-      </p:sp>
-      <p:sp>
-        <p:nvSpPr>
-          <p:cNvPr id="24" name="Rounded Rectangle 23"/>
-          <p:cNvSpPr/>
-          <p:nvPr/>
-        </p:nvSpPr>
-        <p:spPr>
-          <a:xfrm>
-            <a:off x="365760" y="3636264"/>
-            <a:ext cx="3808207" cy="164592"/>
-          </a:xfrm>
-          <a:prstGeom prst="roundRect">
-            <a:avLst>
-              <a:gd name="adj" fmla="val 50000"/>
-            </a:avLst>
-          </a:prstGeom>
-          <a:solidFill>
-            <a:srgbClr val="E7DFD1"/>
-          </a:solidFill>
-          <a:ln>
-            <a:noFill/>
-          </a:ln>
-          <a:effectLst/>
-        </p:spPr>
-        <p:style>
-          <a:lnRef idx="1">
-            <a:schemeClr val="accent1"/>
-          </a:lnRef>
-          <a:fillRef idx="3">
-            <a:schemeClr val="accent1"/>
-          </a:fillRef>
-          <a:effectRef idx="2">
-            <a:schemeClr val="accent1"/>
-          </a:effectRef>
-          <a:fontRef idx="minor">
-            <a:schemeClr val="lt1"/>
-          </a:fontRef>
-        </p:style>
-        <p:txBody>
-          <a:bodyPr rtlCol="0" anchor="ctr"/>
-          <a:lstStyle/>
-          <a:p>
-            <a:pPr algn="ctr"/>
-          </a:p>
-        </p:txBody>
-      </p:sp>
-      <p:sp>
-        <p:nvSpPr>
-          <p:cNvPr id="25" name="Rounded Rectangle 24"/>
-          <p:cNvSpPr/>
-          <p:nvPr/>
-        </p:nvSpPr>
-        <p:spPr>
-          <a:xfrm>
-            <a:off x="365760" y="3636264"/>
-            <a:ext cx="2142116" cy="164592"/>
-          </a:xfrm>
-          <a:prstGeom prst="roundRect">
-            <a:avLst>
-              <a:gd name="adj" fmla="val 50000"/>
-            </a:avLst>
-          </a:prstGeom>
-          <a:solidFill>
-            <a:srgbClr val="0E5C63"/>
-          </a:solidFill>
-          <a:ln>
-            <a:noFill/>
-          </a:ln>
-          <a:effectLst/>
-        </p:spPr>
-        <p:style>
-          <a:lnRef idx="1">
-            <a:schemeClr val="accent1"/>
-          </a:lnRef>
-          <a:fillRef idx="3">
-            <a:schemeClr val="accent1"/>
-          </a:fillRef>
-          <a:effectRef idx="2">
-            <a:schemeClr val="accent1"/>
-          </a:effectRef>
-          <a:fontRef idx="minor">
-            <a:schemeClr val="lt1"/>
-          </a:fontRef>
-        </p:style>
-        <p:txBody>
-          <a:bodyPr rtlCol="0" anchor="ctr"/>
-          <a:lstStyle/>
-          <a:p>
-            <a:pPr algn="ctr"/>
-          </a:p>
-        </p:txBody>
-      </p:sp>
-      <p:sp>
-        <p:nvSpPr>
-          <p:cNvPr id="26" name="TextBox 25"/>
-          <p:cNvSpPr txBox="1"/>
-          <p:nvPr/>
-        </p:nvSpPr>
-        <p:spPr>
-          <a:xfrm>
-            <a:off x="4356847" y="3636264"/>
-            <a:ext cx="1005840" cy="164592"/>
-          </a:xfrm>
-          <a:prstGeom prst="rect">
-            <a:avLst/>
-          </a:prstGeom>
-          <a:noFill/>
-          <a:ln/>
-        </p:spPr>
-        <p:txBody>
-          <a:bodyPr wrap="square" anchor="ctr" lIns="25400" rIns="25400" tIns="25400" bIns="25400">
-            <a:spAutoFit/>
-          </a:bodyPr>
-          <a:lstStyle/>
-          <a:p>
-            <a:pPr algn="l">
-              <a:lnSpc>
-                <a:spcPct val="100000"/>
-              </a:lnSpc>
-              <a:spcBef>
-                <a:spcPts val="0"/>
-              </a:spcBef>
-              <a:spcAft>
-                <a:spcPts val="0"/>
-              </a:spcAft>
-            </a:pPr>
-            <a:r>
-              <a:rPr sz="1350" b="1" i="0">
-                <a:solidFill>
-                  <a:srgbClr val="20242A"/>
-                </a:solidFill>
-                <a:latin typeface="Helvetica Neue"/>
-              </a:rPr>
-              <a:t>€45k</a:t>
-            </a:r>
-          </a:p>
-        </p:txBody>
-      </p:sp>
-      <p:sp>
-        <p:nvSpPr>
-          <p:cNvPr id="27" name="TextBox 26"/>
-          <p:cNvSpPr txBox="1"/>
-          <p:nvPr/>
-        </p:nvSpPr>
-        <p:spPr>
-          <a:xfrm>
-            <a:off x="365760" y="3754373"/>
-            <a:ext cx="3808207" cy="256032"/>
-          </a:xfrm>
-          <a:prstGeom prst="rect">
-            <a:avLst/>
-          </a:prstGeom>
-          <a:noFill/>
-          <a:ln/>
-        </p:spPr>
-        <p:txBody>
-          <a:bodyPr wrap="square" anchor="b" lIns="25400" rIns="25400" tIns="25400" bIns="25400">
-            <a:spAutoFit/>
-          </a:bodyPr>
-          <a:lstStyle/>
-          <a:p>
-            <a:pPr algn="l">
-              <a:lnSpc>
-                <a:spcPct val="112000"/>
-              </a:lnSpc>
-              <a:spcBef>
-                <a:spcPts val="0"/>
-              </a:spcBef>
-              <a:spcAft>
-                <a:spcPts val="0"/>
-              </a:spcAft>
-            </a:pPr>
-            <a:r>
-              <a:rPr sz="1100" b="0" i="0">
-                <a:solidFill>
-                  <a:srgbClr val="8A8478"/>
-                </a:solidFill>
-                <a:latin typeface="Helvetica Neue"/>
-              </a:rPr>
-              <a:t>住宿餐饮与零售</a:t>
-            </a:r>
-          </a:p>
-        </p:txBody>
-      </p:sp>
-      <p:sp>
-        <p:nvSpPr>
-          <p:cNvPr id="28" name="Rounded Rectangle 27"/>
-          <p:cNvSpPr/>
-          <p:nvPr/>
-        </p:nvSpPr>
-        <p:spPr>
-          <a:xfrm>
-            <a:off x="365760" y="4010406"/>
-            <a:ext cx="3808207" cy="164592"/>
-          </a:xfrm>
-          <a:prstGeom prst="roundRect">
-            <a:avLst>
-              <a:gd name="adj" fmla="val 50000"/>
-            </a:avLst>
-          </a:prstGeom>
-          <a:solidFill>
-            <a:srgbClr val="E7DFD1"/>
-          </a:solidFill>
-          <a:ln>
-            <a:noFill/>
-          </a:ln>
-          <a:effectLst/>
-        </p:spPr>
-        <p:style>
-          <a:lnRef idx="1">
-            <a:schemeClr val="accent1"/>
-          </a:lnRef>
-          <a:fillRef idx="3">
-            <a:schemeClr val="accent1"/>
-          </a:fillRef>
-          <a:effectRef idx="2">
-            <a:schemeClr val="accent1"/>
-          </a:effectRef>
-          <a:fontRef idx="minor">
-            <a:schemeClr val="lt1"/>
-          </a:fontRef>
-        </p:style>
-        <p:txBody>
-          <a:bodyPr rtlCol="0" anchor="ctr"/>
-          <a:lstStyle/>
-          <a:p>
-            <a:pPr algn="ctr"/>
-          </a:p>
-        </p:txBody>
-      </p:sp>
-      <p:sp>
-        <p:nvSpPr>
-          <p:cNvPr id="29" name="Rounded Rectangle 28"/>
-          <p:cNvSpPr/>
-          <p:nvPr/>
-        </p:nvSpPr>
-        <p:spPr>
-          <a:xfrm>
-            <a:off x="365760" y="4010406"/>
-            <a:ext cx="1570885" cy="164592"/>
-          </a:xfrm>
-          <a:prstGeom prst="roundRect">
-            <a:avLst>
-              <a:gd name="adj" fmla="val 50000"/>
-            </a:avLst>
-          </a:prstGeom>
-          <a:solidFill>
-            <a:srgbClr val="0E5C63"/>
-          </a:solidFill>
-          <a:ln>
-            <a:noFill/>
-          </a:ln>
-          <a:effectLst/>
-        </p:spPr>
-        <p:style>
-          <a:lnRef idx="1">
-            <a:schemeClr val="accent1"/>
-          </a:lnRef>
-          <a:fillRef idx="3">
-            <a:schemeClr val="accent1"/>
-          </a:fillRef>
-          <a:effectRef idx="2">
-            <a:schemeClr val="accent1"/>
-          </a:effectRef>
-          <a:fontRef idx="minor">
-            <a:schemeClr val="lt1"/>
-          </a:fontRef>
-        </p:style>
-        <p:txBody>
-          <a:bodyPr rtlCol="0" anchor="ctr"/>
-          <a:lstStyle/>
-          <a:p>
-            <a:pPr algn="ctr"/>
-          </a:p>
-        </p:txBody>
-      </p:sp>
-      <p:sp>
-        <p:nvSpPr>
-          <p:cNvPr id="30" name="TextBox 29"/>
+          <p:cNvPr id="29" name="TextBox 28"/>
           <p:cNvSpPr txBox="1"/>
           <p:nvPr/>
         </p:nvSpPr>
@@ -17390,7 +16994,7 @@
       </p:sp>
       <p:sp>
         <p:nvSpPr>
-          <p:cNvPr id="31" name="TextBox 30"/>
+          <p:cNvPr id="30" name="TextBox 29"/>
           <p:cNvSpPr txBox="1"/>
           <p:nvPr/>
         </p:nvSpPr>
@@ -17436,7 +17040,7 @@
       </p:sp>
       <p:sp>
         <p:nvSpPr>
-          <p:cNvPr id="32" name="TextBox 31"/>
+          <p:cNvPr id="31" name="TextBox 30"/>
           <p:cNvSpPr txBox="1"/>
           <p:nvPr/>
         </p:nvSpPr>
@@ -17500,7 +17104,7 @@
       </p:sp>
       <p:sp>
         <p:nvSpPr>
-          <p:cNvPr id="33" name="Rounded Rectangle 32"/>
+          <p:cNvPr id="32" name="Rounded Rectangle 31"/>
           <p:cNvSpPr/>
           <p:nvPr/>
         </p:nvSpPr>
@@ -17548,7 +17152,7 @@
       </p:sp>
       <p:sp>
         <p:nvSpPr>
-          <p:cNvPr id="34" name="TextBox 33"/>
+          <p:cNvPr id="33" name="TextBox 32"/>
           <p:cNvSpPr txBox="1"/>
           <p:nvPr/>
         </p:nvSpPr>
@@ -17594,7 +17198,7 @@
       </p:sp>
       <p:sp>
         <p:nvSpPr>
-          <p:cNvPr id="35" name="TextBox 34"/>
+          <p:cNvPr id="34" name="TextBox 33"/>
           <p:cNvSpPr txBox="1"/>
           <p:nvPr/>
         </p:nvSpPr>
@@ -17649,7 +17253,7 @@
       </p:sp>
       <p:sp>
         <p:nvSpPr>
-          <p:cNvPr id="36" name="TextBox 35"/>
+          <p:cNvPr id="35" name="TextBox 34"/>
           <p:cNvSpPr txBox="1"/>
           <p:nvPr/>
         </p:nvSpPr>
@@ -17695,7 +17299,7 @@
       </p:sp>
       <p:sp>
         <p:nvSpPr>
-          <p:cNvPr id="37" name="TextBox 36"/>
+          <p:cNvPr id="36" name="TextBox 35"/>
           <p:cNvSpPr txBox="1"/>
           <p:nvPr/>
         </p:nvSpPr>
@@ -17895,51 +17499,7 @@
       </p:sp>
       <p:sp>
         <p:nvSpPr>
-          <p:cNvPr id="5" name="Rectangle 4"/>
-          <p:cNvSpPr/>
-          <p:nvPr/>
-        </p:nvSpPr>
-        <p:spPr>
-          <a:xfrm>
-            <a:off x="566928" y="1191006"/>
-            <a:ext cx="1097280" cy="45720"/>
-          </a:xfrm>
-          <a:prstGeom prst="rect">
-            <a:avLst/>
-          </a:prstGeom>
-          <a:solidFill>
-            <a:srgbClr val="0E5C63"/>
-          </a:solidFill>
-          <a:ln>
-            <a:noFill/>
-          </a:ln>
-          <a:effectLst/>
-        </p:spPr>
-        <p:style>
-          <a:lnRef idx="1">
-            <a:schemeClr val="accent1"/>
-          </a:lnRef>
-          <a:fillRef idx="3">
-            <a:schemeClr val="accent1"/>
-          </a:fillRef>
-          <a:effectRef idx="2">
-            <a:schemeClr val="accent1"/>
-          </a:effectRef>
-          <a:fontRef idx="minor">
-            <a:schemeClr val="lt1"/>
-          </a:fontRef>
-        </p:style>
-        <p:txBody>
-          <a:bodyPr rtlCol="0" anchor="ctr"/>
-          <a:lstStyle/>
-          <a:p>
-            <a:pPr algn="ctr"/>
-          </a:p>
-        </p:txBody>
-      </p:sp>
-      <p:sp>
-        <p:nvSpPr>
-          <p:cNvPr id="6" name="TextBox 5"/>
+          <p:cNvPr id="5" name="TextBox 4"/>
           <p:cNvSpPr txBox="1"/>
           <p:nvPr/>
         </p:nvSpPr>
@@ -17985,7 +17545,7 @@
       </p:sp>
       <p:sp>
         <p:nvSpPr>
-          <p:cNvPr id="7" name="Rounded Rectangle 6"/>
+          <p:cNvPr id="6" name="Rounded Rectangle 5"/>
           <p:cNvSpPr/>
           <p:nvPr/>
         </p:nvSpPr>
@@ -18033,7 +17593,7 @@
       </p:sp>
       <p:sp>
         <p:nvSpPr>
-          <p:cNvPr id="8" name="Round Same Side Corner Rectangle 7"/>
+          <p:cNvPr id="7" name="Round Same Side Corner Rectangle 6"/>
           <p:cNvSpPr/>
           <p:nvPr/>
         </p:nvSpPr>
@@ -18080,7 +17640,7 @@
       </p:sp>
       <p:sp>
         <p:nvSpPr>
-          <p:cNvPr id="9" name="TextBox 8"/>
+          <p:cNvPr id="8" name="TextBox 7"/>
           <p:cNvSpPr txBox="1"/>
           <p:nvPr/>
         </p:nvSpPr>
@@ -18126,7 +17686,7 @@
       </p:sp>
       <p:sp>
         <p:nvSpPr>
-          <p:cNvPr id="10" name="TextBox 9"/>
+          <p:cNvPr id="9" name="TextBox 8"/>
           <p:cNvSpPr txBox="1"/>
           <p:nvPr/>
         </p:nvSpPr>
@@ -18172,7 +17732,7 @@
       </p:sp>
       <p:sp>
         <p:nvSpPr>
-          <p:cNvPr id="11" name="TextBox 10"/>
+          <p:cNvPr id="10" name="TextBox 9"/>
           <p:cNvSpPr txBox="1"/>
           <p:nvPr/>
         </p:nvSpPr>
@@ -18218,7 +17778,7 @@
       </p:sp>
       <p:sp>
         <p:nvSpPr>
-          <p:cNvPr id="12" name="Rectangle 11"/>
+          <p:cNvPr id="11" name="Rectangle 10"/>
           <p:cNvSpPr/>
           <p:nvPr/>
         </p:nvSpPr>
@@ -18262,7 +17822,7 @@
       </p:sp>
       <p:sp>
         <p:nvSpPr>
-          <p:cNvPr id="13" name="TextBox 12"/>
+          <p:cNvPr id="12" name="TextBox 11"/>
           <p:cNvSpPr txBox="1"/>
           <p:nvPr/>
         </p:nvSpPr>
@@ -18308,7 +17868,7 @@
       </p:sp>
       <p:sp>
         <p:nvSpPr>
-          <p:cNvPr id="14" name="Rounded Rectangle 13"/>
+          <p:cNvPr id="13" name="Rounded Rectangle 12"/>
           <p:cNvSpPr/>
           <p:nvPr/>
         </p:nvSpPr>
@@ -18356,7 +17916,7 @@
       </p:sp>
       <p:sp>
         <p:nvSpPr>
-          <p:cNvPr id="15" name="Round Same Side Corner Rectangle 14"/>
+          <p:cNvPr id="14" name="Round Same Side Corner Rectangle 13"/>
           <p:cNvSpPr/>
           <p:nvPr/>
         </p:nvSpPr>
@@ -18403,7 +17963,7 @@
       </p:sp>
       <p:sp>
         <p:nvSpPr>
-          <p:cNvPr id="16" name="TextBox 15"/>
+          <p:cNvPr id="15" name="TextBox 14"/>
           <p:cNvSpPr txBox="1"/>
           <p:nvPr/>
         </p:nvSpPr>
@@ -18449,7 +18009,7 @@
       </p:sp>
       <p:sp>
         <p:nvSpPr>
-          <p:cNvPr id="17" name="TextBox 16"/>
+          <p:cNvPr id="16" name="TextBox 15"/>
           <p:cNvSpPr txBox="1"/>
           <p:nvPr/>
         </p:nvSpPr>
@@ -18495,7 +18055,7 @@
       </p:sp>
       <p:sp>
         <p:nvSpPr>
-          <p:cNvPr id="18" name="TextBox 17"/>
+          <p:cNvPr id="17" name="TextBox 16"/>
           <p:cNvSpPr txBox="1"/>
           <p:nvPr/>
         </p:nvSpPr>
@@ -18541,7 +18101,7 @@
       </p:sp>
       <p:sp>
         <p:nvSpPr>
-          <p:cNvPr id="19" name="Rectangle 18"/>
+          <p:cNvPr id="18" name="Rectangle 17"/>
           <p:cNvSpPr/>
           <p:nvPr/>
         </p:nvSpPr>
@@ -18585,7 +18145,7 @@
       </p:sp>
       <p:sp>
         <p:nvSpPr>
-          <p:cNvPr id="20" name="TextBox 19"/>
+          <p:cNvPr id="19" name="TextBox 18"/>
           <p:cNvSpPr txBox="1"/>
           <p:nvPr/>
         </p:nvSpPr>
@@ -18631,7 +18191,7 @@
       </p:sp>
       <p:sp>
         <p:nvSpPr>
-          <p:cNvPr id="21" name="Rounded Rectangle 20"/>
+          <p:cNvPr id="20" name="Rounded Rectangle 19"/>
           <p:cNvSpPr/>
           <p:nvPr/>
         </p:nvSpPr>
@@ -18679,7 +18239,7 @@
       </p:sp>
       <p:sp>
         <p:nvSpPr>
-          <p:cNvPr id="22" name="Round Same Side Corner Rectangle 21"/>
+          <p:cNvPr id="21" name="Round Same Side Corner Rectangle 20"/>
           <p:cNvSpPr/>
           <p:nvPr/>
         </p:nvSpPr>
@@ -18726,7 +18286,7 @@
       </p:sp>
       <p:sp>
         <p:nvSpPr>
-          <p:cNvPr id="23" name="TextBox 22"/>
+          <p:cNvPr id="22" name="TextBox 21"/>
           <p:cNvSpPr txBox="1"/>
           <p:nvPr/>
         </p:nvSpPr>
@@ -18772,7 +18332,7 @@
       </p:sp>
       <p:sp>
         <p:nvSpPr>
-          <p:cNvPr id="24" name="TextBox 23"/>
+          <p:cNvPr id="23" name="TextBox 22"/>
           <p:cNvSpPr txBox="1"/>
           <p:nvPr/>
         </p:nvSpPr>
@@ -18818,7 +18378,7 @@
       </p:sp>
       <p:sp>
         <p:nvSpPr>
-          <p:cNvPr id="25" name="TextBox 24"/>
+          <p:cNvPr id="24" name="TextBox 23"/>
           <p:cNvSpPr txBox="1"/>
           <p:nvPr/>
         </p:nvSpPr>
@@ -18864,7 +18424,7 @@
       </p:sp>
       <p:sp>
         <p:nvSpPr>
-          <p:cNvPr id="26" name="Rectangle 25"/>
+          <p:cNvPr id="25" name="Rectangle 24"/>
           <p:cNvSpPr/>
           <p:nvPr/>
         </p:nvSpPr>
@@ -18908,7 +18468,7 @@
       </p:sp>
       <p:sp>
         <p:nvSpPr>
-          <p:cNvPr id="27" name="TextBox 26"/>
+          <p:cNvPr id="26" name="TextBox 25"/>
           <p:cNvSpPr txBox="1"/>
           <p:nvPr/>
         </p:nvSpPr>
@@ -18954,7 +18514,7 @@
       </p:sp>
       <p:sp>
         <p:nvSpPr>
-          <p:cNvPr id="28" name="Rounded Rectangle 27"/>
+          <p:cNvPr id="27" name="Rounded Rectangle 26"/>
           <p:cNvSpPr/>
           <p:nvPr/>
         </p:nvSpPr>
@@ -19002,7 +18562,7 @@
       </p:sp>
       <p:sp>
         <p:nvSpPr>
-          <p:cNvPr id="29" name="Round Same Side Corner Rectangle 28"/>
+          <p:cNvPr id="28" name="Round Same Side Corner Rectangle 27"/>
           <p:cNvSpPr/>
           <p:nvPr/>
         </p:nvSpPr>
@@ -19049,7 +18609,7 @@
       </p:sp>
       <p:sp>
         <p:nvSpPr>
-          <p:cNvPr id="30" name="TextBox 29"/>
+          <p:cNvPr id="29" name="TextBox 28"/>
           <p:cNvSpPr txBox="1"/>
           <p:nvPr/>
         </p:nvSpPr>
@@ -19095,7 +18655,7 @@
       </p:sp>
       <p:sp>
         <p:nvSpPr>
-          <p:cNvPr id="31" name="TextBox 30"/>
+          <p:cNvPr id="30" name="TextBox 29"/>
           <p:cNvSpPr txBox="1"/>
           <p:nvPr/>
         </p:nvSpPr>
@@ -19141,7 +18701,7 @@
       </p:sp>
       <p:sp>
         <p:nvSpPr>
-          <p:cNvPr id="32" name="TextBox 31"/>
+          <p:cNvPr id="31" name="TextBox 30"/>
           <p:cNvSpPr txBox="1"/>
           <p:nvPr/>
         </p:nvSpPr>
@@ -19187,7 +18747,7 @@
       </p:sp>
       <p:sp>
         <p:nvSpPr>
-          <p:cNvPr id="33" name="Rectangle 32"/>
+          <p:cNvPr id="32" name="Rectangle 31"/>
           <p:cNvSpPr/>
           <p:nvPr/>
         </p:nvSpPr>
@@ -19231,7 +18791,7 @@
       </p:sp>
       <p:sp>
         <p:nvSpPr>
-          <p:cNvPr id="34" name="TextBox 33"/>
+          <p:cNvPr id="33" name="TextBox 32"/>
           <p:cNvSpPr txBox="1"/>
           <p:nvPr/>
         </p:nvSpPr>
@@ -19277,7 +18837,7 @@
       </p:sp>
       <p:sp>
         <p:nvSpPr>
-          <p:cNvPr id="35" name="TextBox 34"/>
+          <p:cNvPr id="34" name="TextBox 33"/>
           <p:cNvSpPr txBox="1"/>
           <p:nvPr/>
         </p:nvSpPr>
@@ -19350,7 +18910,7 @@
       </p:sp>
       <p:sp>
         <p:nvSpPr>
-          <p:cNvPr id="36" name="TextBox 35"/>
+          <p:cNvPr id="35" name="TextBox 34"/>
           <p:cNvSpPr txBox="1"/>
           <p:nvPr/>
         </p:nvSpPr>
@@ -19405,7 +18965,7 @@
       </p:sp>
       <p:sp>
         <p:nvSpPr>
-          <p:cNvPr id="37" name="TextBox 36"/>
+          <p:cNvPr id="36" name="TextBox 35"/>
           <p:cNvSpPr txBox="1"/>
           <p:nvPr/>
         </p:nvSpPr>
@@ -19451,7 +19011,7 @@
       </p:sp>
       <p:sp>
         <p:nvSpPr>
-          <p:cNvPr id="38" name="TextBox 37"/>
+          <p:cNvPr id="37" name="TextBox 36"/>
           <p:cNvSpPr txBox="1"/>
           <p:nvPr/>
         </p:nvSpPr>

--- a/templates/decks/zh/nl-job-market-2026/template.pptx
+++ b/templates/decks/zh/nl-job-market-2026/template.pptx
@@ -4145,51 +4145,7 @@
       </p:sp>
       <p:sp>
         <p:nvSpPr>
-          <p:cNvPr id="4" name="Rectangle 3"/>
-          <p:cNvSpPr/>
-          <p:nvPr/>
-        </p:nvSpPr>
-        <p:spPr>
-          <a:xfrm>
-            <a:off x="640080" y="4320540"/>
-            <a:ext cx="1280160" cy="54864"/>
-          </a:xfrm>
-          <a:prstGeom prst="rect">
-            <a:avLst/>
-          </a:prstGeom>
-          <a:solidFill>
-            <a:srgbClr val="D8542A"/>
-          </a:solidFill>
-          <a:ln>
-            <a:noFill/>
-          </a:ln>
-          <a:effectLst/>
-        </p:spPr>
-        <p:style>
-          <a:lnRef idx="1">
-            <a:schemeClr val="accent1"/>
-          </a:lnRef>
-          <a:fillRef idx="3">
-            <a:schemeClr val="accent1"/>
-          </a:fillRef>
-          <a:effectRef idx="2">
-            <a:schemeClr val="accent1"/>
-          </a:effectRef>
-          <a:fontRef idx="minor">
-            <a:schemeClr val="lt1"/>
-          </a:fontRef>
-        </p:style>
-        <p:txBody>
-          <a:bodyPr rtlCol="0" anchor="ctr"/>
-          <a:lstStyle/>
-          <a:p>
-            <a:pPr algn="ctr"/>
-          </a:p>
-        </p:txBody>
-      </p:sp>
-      <p:sp>
-        <p:nvSpPr>
-          <p:cNvPr id="5" name="TextBox 4"/>
+          <p:cNvPr id="4" name="TextBox 3"/>
           <p:cNvSpPr txBox="1"/>
           <p:nvPr/>
         </p:nvSpPr>
@@ -4235,7 +4191,7 @@
       </p:sp>
       <p:sp>
         <p:nvSpPr>
-          <p:cNvPr id="6" name="TextBox 5"/>
+          <p:cNvPr id="5" name="TextBox 4"/>
           <p:cNvSpPr txBox="1"/>
           <p:nvPr/>
         </p:nvSpPr>
@@ -4312,51 +4268,7 @@
       </p:sp>
       <p:sp>
         <p:nvSpPr>
-          <p:cNvPr id="7" name="Rectangle 6"/>
-          <p:cNvSpPr/>
-          <p:nvPr/>
-        </p:nvSpPr>
-        <p:spPr>
-          <a:xfrm>
-            <a:off x="658368" y="3310128"/>
-            <a:ext cx="1280160" cy="54864"/>
-          </a:xfrm>
-          <a:prstGeom prst="rect">
-            <a:avLst/>
-          </a:prstGeom>
-          <a:solidFill>
-            <a:srgbClr val="D8542A"/>
-          </a:solidFill>
-          <a:ln>
-            <a:noFill/>
-          </a:ln>
-          <a:effectLst/>
-        </p:spPr>
-        <p:style>
-          <a:lnRef idx="1">
-            <a:schemeClr val="accent1"/>
-          </a:lnRef>
-          <a:fillRef idx="3">
-            <a:schemeClr val="accent1"/>
-          </a:fillRef>
-          <a:effectRef idx="2">
-            <a:schemeClr val="accent1"/>
-          </a:effectRef>
-          <a:fontRef idx="minor">
-            <a:schemeClr val="lt1"/>
-          </a:fontRef>
-        </p:style>
-        <p:txBody>
-          <a:bodyPr rtlCol="0" anchor="ctr"/>
-          <a:lstStyle/>
-          <a:p>
-            <a:pPr algn="ctr"/>
-          </a:p>
-        </p:txBody>
-      </p:sp>
-      <p:sp>
-        <p:nvSpPr>
-          <p:cNvPr id="8" name="TextBox 7"/>
+          <p:cNvPr id="6" name="TextBox 5"/>
           <p:cNvSpPr txBox="1"/>
           <p:nvPr/>
         </p:nvSpPr>
@@ -4402,7 +4314,7 @@
       </p:sp>
       <p:sp>
         <p:nvSpPr>
-          <p:cNvPr id="9" name="TextBox 8"/>
+          <p:cNvPr id="7" name="TextBox 6"/>
           <p:cNvSpPr txBox="1"/>
           <p:nvPr/>
         </p:nvSpPr>

--- a/templates/decks/zh/nl-job-market-2026/template.pptx
+++ b/templates/decks/zh/nl-job-market-2026/template.pptx
@@ -312,7 +312,7 @@
                 <a:solidFill>
                   <a:srgbClr val="222A37"/>
                 </a:solidFill>
-                <a:latin typeface="Helvetica Neue"/>
+                <a:latin typeface="Hiragino Sans GB"/>
               </a:defRPr>
             </a:pPr>
           </a:p>
@@ -358,7 +358,7 @@
                 <a:solidFill>
                   <a:srgbClr val="222A37"/>
                 </a:solidFill>
-                <a:latin typeface="Helvetica Neue"/>
+                <a:latin typeface="Hiragino Sans GB"/>
               </a:defRPr>
             </a:pPr>
           </a:p>
@@ -380,7 +380,7 @@
               <a:solidFill>
                 <a:srgbClr val="222A37"/>
               </a:solidFill>
-              <a:latin typeface="Helvetica Neue"/>
+              <a:latin typeface="Hiragino Sans GB"/>
             </a:defRPr>
           </a:pPr>
         </a:p>
@@ -399,7 +399,7 @@
           <a:solidFill>
             <a:srgbClr val="222A37"/>
           </a:solidFill>
-          <a:latin typeface="Helvetica Neue"/>
+          <a:latin typeface="Hiragino Sans GB"/>
         </a:defRPr>
       </a:pPr>
       <a:endParaRPr lang="en-US"/>
@@ -551,7 +551,7 @@
                 <a:solidFill>
                   <a:srgbClr val="222A37"/>
                 </a:solidFill>
-                <a:latin typeface="Helvetica Neue"/>
+                <a:latin typeface="Hiragino Sans GB"/>
               </a:defRPr>
             </a:pPr>
           </a:p>
@@ -598,7 +598,7 @@
                 <a:solidFill>
                   <a:srgbClr val="222A37"/>
                 </a:solidFill>
-                <a:latin typeface="Helvetica Neue"/>
+                <a:latin typeface="Hiragino Sans GB"/>
               </a:defRPr>
             </a:pPr>
           </a:p>
@@ -618,7 +618,7 @@
           <a:solidFill>
             <a:srgbClr val="222A37"/>
           </a:solidFill>
-          <a:latin typeface="Helvetica Neue"/>
+          <a:latin typeface="Hiragino Sans GB"/>
         </a:defRPr>
       </a:pPr>
       <a:endParaRPr lang="en-US"/>
@@ -788,7 +788,7 @@
                 <a:solidFill>
                   <a:srgbClr val="222A37"/>
                 </a:solidFill>
-                <a:latin typeface="Helvetica Neue"/>
+                <a:latin typeface="Hiragino Sans GB"/>
               </a:defRPr>
             </a:pPr>
           </a:p>
@@ -836,7 +836,7 @@
                 <a:solidFill>
                   <a:srgbClr val="222A37"/>
                 </a:solidFill>
-                <a:latin typeface="Helvetica Neue"/>
+                <a:latin typeface="Hiragino Sans GB"/>
               </a:defRPr>
             </a:pPr>
           </a:p>
@@ -857,7 +857,7 @@
               <a:solidFill>
                 <a:srgbClr val="222A37"/>
               </a:solidFill>
-              <a:latin typeface="Helvetica Neue"/>
+              <a:latin typeface="Hiragino Sans GB"/>
             </a:defRPr>
           </a:pPr>
         </a:p>
@@ -874,7 +874,7 @@
           <a:solidFill>
             <a:srgbClr val="222A37"/>
           </a:solidFill>
-          <a:latin typeface="Helvetica Neue"/>
+          <a:latin typeface="Hiragino Sans GB"/>
         </a:defRPr>
       </a:pPr>
       <a:endParaRPr lang="en-US"/>
@@ -994,7 +994,7 @@
                 <a:solidFill>
                   <a:srgbClr val="222A37"/>
                 </a:solidFill>
-                <a:latin typeface="Helvetica Neue"/>
+                <a:latin typeface="Hiragino Sans GB"/>
               </a:defRPr>
             </a:pPr>
           </a:p>
@@ -1042,7 +1042,7 @@
                 <a:solidFill>
                   <a:srgbClr val="222A37"/>
                 </a:solidFill>
-                <a:latin typeface="Helvetica Neue"/>
+                <a:latin typeface="Hiragino Sans GB"/>
               </a:defRPr>
             </a:pPr>
           </a:p>
@@ -1062,7 +1062,7 @@
           <a:solidFill>
             <a:srgbClr val="222A37"/>
           </a:solidFill>
-          <a:latin typeface="Helvetica Neue"/>
+          <a:latin typeface="Hiragino Sans GB"/>
         </a:defRPr>
       </a:pPr>
       <a:endParaRPr lang="en-US"/>
@@ -4183,6 +4183,7 @@
                   <a:srgbClr val="0E5C63"/>
                 </a:solidFill>
                 <a:latin typeface="Courier New"/>
+                <a:ea typeface="Hiragino Sans GB"/>
               </a:rPr>
               <a:t>圩田报告  ·  劳动力市场分析</a:t>
             </a:r>
@@ -4229,6 +4230,7 @@
                   <a:srgbClr val="20242A"/>
                 </a:solidFill>
                 <a:latin typeface="Georgia"/>
+                <a:ea typeface="Hiragino Sans GB"/>
               </a:rPr>
               <a:t>荷兰</a:t>
             </a:r>
@@ -4251,6 +4253,7 @@
                   <a:srgbClr val="20242A"/>
                 </a:solidFill>
                 <a:latin typeface="Georgia"/>
+                <a:ea typeface="Hiragino Sans GB"/>
               </a:rPr>
               <a:t>就业市场 </a:t>
             </a:r>
@@ -4260,6 +4263,7 @@
                   <a:srgbClr val="D8542A"/>
                 </a:solidFill>
                 <a:latin typeface="Georgia"/>
+                <a:ea typeface="Hiragino Sans GB"/>
               </a:rPr>
               <a:t>2026</a:t>
             </a:r>
@@ -4306,6 +4310,7 @@
                   <a:srgbClr val="4A4E56"/>
                 </a:solidFill>
                 <a:latin typeface="Helvetica Neue"/>
+                <a:ea typeface="Hiragino Sans GB"/>
               </a:rPr>
               <a:t>用数据解读一个顶端已经降温、底层依旧紧缺的就业市场。</a:t>
             </a:r>
@@ -4352,6 +4357,7 @@
                   <a:srgbClr val="8A8478"/>
                 </a:solidFill>
                 <a:latin typeface="Courier New"/>
+                <a:ea typeface="Hiragino Sans GB"/>
               </a:rPr>
               <a:t>截至 2026 年 7 月 12 日   ·   来源：CBS · IND · UWV · EUROSTAT · OECD</a:t>
             </a:r>
@@ -4460,6 +4466,7 @@
                   <a:srgbClr val="D8542A"/>
                 </a:solidFill>
                 <a:latin typeface="Helvetica Neue"/>
+                <a:ea typeface="Hiragino Sans GB"/>
               </a:rPr>
               <a:t>政策转向</a:t>
             </a:r>
@@ -4506,6 +4513,7 @@
                   <a:srgbClr val="20242A"/>
                 </a:solidFill>
                 <a:latin typeface="Georgia"/>
+                <a:ea typeface="Hiragino Sans GB"/>
               </a:rPr>
               <a:t>欢迎的大门正悄然收紧</a:t>
             </a:r>
@@ -4552,6 +4560,7 @@
                   <a:srgbClr val="8A8478"/>
                 </a:solidFill>
                 <a:latin typeface="Courier New"/>
+                <a:ea typeface="Hiragino Sans GB"/>
               </a:rPr>
               <a:t>30% 外籍税收优惠，逐步下调</a:t>
             </a:r>
@@ -4688,6 +4697,7 @@
                   <a:srgbClr val="8A8478"/>
                 </a:solidFill>
                 <a:latin typeface="Helvetica Neue"/>
+                <a:ea typeface="Hiragino Sans GB"/>
               </a:rPr>
               <a:t>2024–26  </a:t>
             </a:r>
@@ -4697,6 +4707,7 @@
                   <a:srgbClr val="20242A"/>
                 </a:solidFill>
                 <a:latin typeface="Helvetica Neue"/>
+                <a:ea typeface="Hiragino Sans GB"/>
               </a:rPr>
               <a:t>30% 免税</a:t>
             </a:r>
@@ -4743,6 +4754,7 @@
                   <a:srgbClr val="8A8478"/>
                 </a:solidFill>
                 <a:latin typeface="Helvetica Neue"/>
+                <a:ea typeface="Hiragino Sans GB"/>
               </a:rPr>
               <a:t>收入标准 €46,107</a:t>
             </a:r>
@@ -4835,6 +4847,7 @@
                   <a:srgbClr val="D8542A"/>
                 </a:solidFill>
                 <a:latin typeface="Helvetica Neue"/>
+                <a:ea typeface="Hiragino Sans GB"/>
               </a:rPr>
               <a:t>2027 年 1 月 1 日  </a:t>
             </a:r>
@@ -4844,6 +4857,7 @@
                   <a:srgbClr val="20242A"/>
                 </a:solidFill>
                 <a:latin typeface="Helvetica Neue"/>
+                <a:ea typeface="Hiragino Sans GB"/>
               </a:rPr>
               <a:t>→ 27% 免税</a:t>
             </a:r>
@@ -4890,6 +4904,7 @@
                   <a:srgbClr val="8A8478"/>
                 </a:solidFill>
                 <a:latin typeface="Helvetica Neue"/>
+                <a:ea typeface="Hiragino Sans GB"/>
               </a:rPr>
               <a:t>标准升至 €50,436</a:t>
             </a:r>
@@ -4982,6 +4997,7 @@
                   <a:srgbClr val="8A8478"/>
                 </a:solidFill>
                 <a:latin typeface="Helvetica Neue"/>
+                <a:ea typeface="Hiragino Sans GB"/>
               </a:rPr>
               <a:t>30 岁以下硕士  </a:t>
             </a:r>
@@ -4991,6 +5007,7 @@
                   <a:srgbClr val="20242A"/>
                 </a:solidFill>
                 <a:latin typeface="Helvetica Neue"/>
+                <a:ea typeface="Hiragino Sans GB"/>
               </a:rPr>
               <a:t>门槛提高</a:t>
             </a:r>
@@ -5037,6 +5054,7 @@
                   <a:srgbClr val="8A8478"/>
                 </a:solidFill>
                 <a:latin typeface="Helvetica Neue"/>
+                <a:ea typeface="Hiragino Sans GB"/>
               </a:rPr>
               <a:t>€35,048 → €38,388</a:t>
             </a:r>
@@ -5083,6 +5101,7 @@
                   <a:srgbClr val="8A8478"/>
                 </a:solidFill>
                 <a:latin typeface="Courier New"/>
+                <a:ea typeface="Hiragino Sans GB"/>
               </a:rPr>
               <a:t>高技能移民申请量</a:t>
             </a:r>
@@ -5147,6 +5166,7 @@
                   <a:srgbClr val="4A4E56"/>
                 </a:solidFill>
                 <a:latin typeface="Helvetica Neue"/>
+                <a:ea typeface="Hiragino Sans GB"/>
               </a:rPr>
               <a:t>申请量一年内下降约 16%；2025 年非欧盟高技能人才入境进一步降至 ≈14,000 人。</a:t>
             </a:r>
@@ -5193,6 +5213,7 @@
                   <a:srgbClr val="B23F1C"/>
                 </a:solidFill>
                 <a:latin typeface="Helvetica Neue"/>
+                <a:ea typeface="Hiragino Sans GB"/>
               </a:rPr>
               <a:t>更低的税收优惠 + 更高的薪资门槛 = 一道更昂贵、更挑剔的大门。</a:t>
             </a:r>
@@ -5239,6 +5260,7 @@
                   <a:srgbClr val="D8542A"/>
                 </a:solidFill>
                 <a:latin typeface="Courier New"/>
+                <a:ea typeface="Hiragino Sans GB"/>
               </a:rPr>
               <a:t>来源   </a:t>
             </a:r>
@@ -5248,6 +5270,7 @@
                   <a:srgbClr val="8A8478"/>
                 </a:solidFill>
                 <a:latin typeface="Courier New"/>
+                <a:ea typeface="Hiragino Sans GB"/>
               </a:rPr>
               <a:t>Business.gov.nl（30%→27% 优惠与收入标准，2027 年）；IND 与 OECD（申请量与入境人数）。</a:t>
             </a:r>
@@ -5294,6 +5317,7 @@
                   <a:srgbClr val="8A8478"/>
                 </a:solidFill>
                 <a:latin typeface="Courier New"/>
+                <a:ea typeface="Hiragino Sans GB"/>
               </a:rPr>
               <a:t>荷兰就业市场 · 2026   ·   用 slide-maker 制作的示例样稿</a:t>
             </a:r>
@@ -5340,6 +5364,7 @@
                   <a:srgbClr val="8A8478"/>
                 </a:solidFill>
                 <a:latin typeface="Courier New"/>
+                <a:ea typeface="Hiragino Sans GB"/>
               </a:rPr>
               <a:t>10 / 14</a:t>
             </a:r>
@@ -5448,6 +5473,7 @@
                   <a:srgbClr val="0E5C63"/>
                 </a:solidFill>
                 <a:latin typeface="Helvetica Neue"/>
+                <a:ea typeface="Hiragino Sans GB"/>
               </a:rPr>
               <a:t>地区差异</a:t>
             </a:r>
@@ -5494,6 +5520,7 @@
                   <a:srgbClr val="20242A"/>
                 </a:solidFill>
                 <a:latin typeface="Georgia"/>
+                <a:ea typeface="Hiragino Sans GB"/>
               </a:rPr>
               <a:t>处处紧张，局部更热</a:t>
             </a:r>
@@ -5540,6 +5567,7 @@
                   <a:srgbClr val="8A8478"/>
                 </a:solidFill>
                 <a:latin typeface="Courier New"/>
+                <a:ea typeface="Hiragino Sans GB"/>
               </a:rPr>
               <a:t>每 100 名失业者对应的空缺数</a:t>
             </a:r>
@@ -5586,6 +5614,7 @@
                   <a:srgbClr val="8A8478"/>
                 </a:solidFill>
                 <a:latin typeface="Helvetica Neue"/>
+                <a:ea typeface="Hiragino Sans GB"/>
               </a:rPr>
               <a:t>乌得勒支</a:t>
             </a:r>
@@ -5724,6 +5753,7 @@
                   <a:srgbClr val="20242A"/>
                 </a:solidFill>
                 <a:latin typeface="Helvetica Neue"/>
+                <a:ea typeface="Hiragino Sans GB"/>
               </a:rPr>
               <a:t>122</a:t>
             </a:r>
@@ -5770,6 +5800,7 @@
                   <a:srgbClr val="8A8478"/>
                 </a:solidFill>
                 <a:latin typeface="Helvetica Neue"/>
+                <a:ea typeface="Hiragino Sans GB"/>
               </a:rPr>
               <a:t>泽兰</a:t>
             </a:r>
@@ -5908,6 +5939,7 @@
                   <a:srgbClr val="20242A"/>
                 </a:solidFill>
                 <a:latin typeface="Helvetica Neue"/>
+                <a:ea typeface="Hiragino Sans GB"/>
               </a:rPr>
               <a:t>122</a:t>
             </a:r>
@@ -5954,6 +5986,7 @@
                   <a:srgbClr val="8A8478"/>
                 </a:solidFill>
                 <a:latin typeface="Helvetica Neue"/>
+                <a:ea typeface="Hiragino Sans GB"/>
               </a:rPr>
               <a:t>荷兰（平均）</a:t>
             </a:r>
@@ -6092,6 +6125,7 @@
                   <a:srgbClr val="20242A"/>
                 </a:solidFill>
                 <a:latin typeface="Helvetica Neue"/>
+                <a:ea typeface="Hiragino Sans GB"/>
               </a:rPr>
               <a:t>91</a:t>
             </a:r>
@@ -6138,6 +6172,7 @@
                   <a:srgbClr val="8A8478"/>
                 </a:solidFill>
                 <a:latin typeface="Helvetica Neue"/>
+                <a:ea typeface="Hiragino Sans GB"/>
               </a:rPr>
               <a:t>格罗宁根（复苏中）</a:t>
             </a:r>
@@ -6276,6 +6311,7 @@
                   <a:srgbClr val="20242A"/>
                 </a:solidFill>
                 <a:latin typeface="Helvetica Neue"/>
+                <a:ea typeface="Hiragino Sans GB"/>
               </a:rPr>
               <a:t>78</a:t>
             </a:r>
@@ -6370,6 +6406,7 @@
                   <a:srgbClr val="D8542A"/>
                 </a:solidFill>
                 <a:latin typeface="Helvetica Neue"/>
+                <a:ea typeface="Hiragino Sans GB"/>
               </a:rPr>
               <a:t>13/35</a:t>
             </a:r>
@@ -6379,6 +6416,7 @@
                   <a:srgbClr val="4A4E56"/>
                 </a:solidFill>
                 <a:latin typeface="Helvetica Neue"/>
+                <a:ea typeface="Hiragino Sans GB"/>
               </a:rPr>
               <a:t>  个地区</a:t>
             </a:r>
@@ -6425,6 +6463,7 @@
                   <a:srgbClr val="8A8478"/>
                 </a:solidFill>
                 <a:latin typeface="Helvetica Neue"/>
+                <a:ea typeface="Hiragino Sans GB"/>
               </a:rPr>
               <a:t>被列为“极度紧张”（每名求职者对应 5 个以上空缺）。</a:t>
             </a:r>
@@ -6515,6 +6554,7 @@
                   <a:srgbClr val="20242A"/>
                 </a:solidFill>
                 <a:latin typeface="Helvetica Neue"/>
+                <a:ea typeface="Hiragino Sans GB"/>
               </a:rPr>
               <a:t>兰斯塔德核心区最热</a:t>
             </a:r>
@@ -6561,6 +6601,7 @@
                   <a:srgbClr val="4A4E56"/>
                 </a:solidFill>
                 <a:latin typeface="Helvetica Neue"/>
+                <a:ea typeface="Hiragino Sans GB"/>
               </a:rPr>
               <a:t>乌得勒支与中部地带的紧张度居全国之首。</a:t>
             </a:r>
@@ -6651,6 +6692,7 @@
                   <a:srgbClr val="20242A"/>
                 </a:solidFill>
                 <a:latin typeface="Helvetica Neue"/>
+                <a:ea typeface="Hiragino Sans GB"/>
               </a:rPr>
               <a:t>仅两个省保持平稳</a:t>
             </a:r>
@@ -6697,6 +6739,7 @@
                   <a:srgbClr val="4A4E56"/>
                 </a:solidFill>
                 <a:latin typeface="Helvetica Neue"/>
+                <a:ea typeface="Hiragino Sans GB"/>
               </a:rPr>
               <a:t>2025 年除乌得勒支和林堡外，各地失业率普遍上升。</a:t>
             </a:r>
@@ -6743,6 +6786,7 @@
                   <a:srgbClr val="D8542A"/>
                 </a:solidFill>
                 <a:latin typeface="Courier New"/>
+                <a:ea typeface="Hiragino Sans GB"/>
               </a:rPr>
               <a:t>来源   </a:t>
             </a:r>
@@ -6752,6 +6796,7 @@
                   <a:srgbClr val="8A8478"/>
                 </a:solidFill>
                 <a:latin typeface="Courier New"/>
+                <a:ea typeface="Hiragino Sans GB"/>
               </a:rPr>
               <a:t>CBS 与 UWV（各省紧张比与 35 地区劳动力市场分类，2025–2026 年）。</a:t>
             </a:r>
@@ -6798,6 +6843,7 @@
                   <a:srgbClr val="8A8478"/>
                 </a:solidFill>
                 <a:latin typeface="Courier New"/>
+                <a:ea typeface="Hiragino Sans GB"/>
               </a:rPr>
               <a:t>荷兰就业市场 · 2026   ·   用 slide-maker 制作的示例样稿</a:t>
             </a:r>
@@ -6844,6 +6890,7 @@
                   <a:srgbClr val="8A8478"/>
                 </a:solidFill>
                 <a:latin typeface="Courier New"/>
+                <a:ea typeface="Hiragino Sans GB"/>
               </a:rPr>
               <a:t>11 / 14</a:t>
             </a:r>
@@ -6952,6 +6999,7 @@
                   <a:srgbClr val="0E5C63"/>
                 </a:solidFill>
                 <a:latin typeface="Courier New"/>
+                <a:ea typeface="Hiragino Sans GB"/>
               </a:rPr>
               <a:t>展望  ·  2026–2027</a:t>
             </a:r>
@@ -7042,6 +7090,7 @@
                   <a:srgbClr val="20242A"/>
                 </a:solidFill>
                 <a:latin typeface="Georgia"/>
+                <a:ea typeface="Hiragino Sans GB"/>
               </a:rPr>
               <a:t>顶端趋于平衡，底层依旧紧缺。</a:t>
             </a:r>
@@ -7206,6 +7255,7 @@
                   <a:srgbClr val="0E5C63"/>
                 </a:solidFill>
                 <a:latin typeface="Helvetica Neue"/>
+                <a:ea typeface="Hiragino Sans GB"/>
               </a:rPr>
               <a:t>4.2 → 4.4%</a:t>
             </a:r>
@@ -7252,6 +7302,7 @@
                   <a:srgbClr val="4A4E56"/>
                 </a:solidFill>
                 <a:latin typeface="Helvetica Neue"/>
+                <a:ea typeface="Hiragino Sans GB"/>
               </a:rPr>
               <a:t>增长保持温和，失业率到 2027 年略有上升——仍处历史低位。</a:t>
             </a:r>
@@ -7416,6 +7467,7 @@
                   <a:srgbClr val="2E8A8C"/>
                 </a:solidFill>
                 <a:latin typeface="Helvetica Neue"/>
+                <a:ea typeface="Hiragino Sans GB"/>
               </a:rPr>
               <a:t>+1.1%</a:t>
             </a:r>
@@ -7462,6 +7514,7 @@
                   <a:srgbClr val="4A4E56"/>
                 </a:solidFill>
                 <a:latin typeface="Helvetica Neue"/>
+                <a:ea typeface="Hiragino Sans GB"/>
               </a:rPr>
               <a:t>就业总量到 2027 年仍在增长（UWV）：是降温，而非收缩。</a:t>
             </a:r>
@@ -7626,6 +7679,7 @@
                   <a:srgbClr val="D8542A"/>
                 </a:solidFill>
                 <a:latin typeface="Helvetica Neue"/>
+                <a:ea typeface="Hiragino Sans GB"/>
               </a:rPr>
               <a:t>2/3</a:t>
             </a:r>
@@ -7672,6 +7726,7 @@
                   <a:srgbClr val="4A4E56"/>
                 </a:solidFill>
                 <a:latin typeface="Helvetica Neue"/>
+                <a:ea typeface="Hiragino Sans GB"/>
               </a:rPr>
               <a:t>的在职母亲从事兼职；老龄化的劳动力让短缺持续紧绷。</a:t>
             </a:r>
@@ -7718,6 +7773,7 @@
                   <a:srgbClr val="D8542A"/>
                 </a:solidFill>
                 <a:latin typeface="Courier New"/>
+                <a:ea typeface="Hiragino Sans GB"/>
               </a:rPr>
               <a:t>来源   </a:t>
             </a:r>
@@ -7727,6 +7783,7 @@
                   <a:srgbClr val="8A8478"/>
                 </a:solidFill>
                 <a:latin typeface="Courier New"/>
+                <a:ea typeface="Hiragino Sans GB"/>
               </a:rPr>
               <a:t>Rabobank、欧盟委员会与 ABN AMRO（2026–27 年预测）；UWV（就业增长与再培训展望）。</a:t>
             </a:r>
@@ -7773,6 +7830,7 @@
                   <a:srgbClr val="8A8478"/>
                 </a:solidFill>
                 <a:latin typeface="Courier New"/>
+                <a:ea typeface="Hiragino Sans GB"/>
               </a:rPr>
               <a:t>荷兰就业市场 · 2026   ·   用 slide-maker 制作的示例样稿</a:t>
             </a:r>
@@ -7819,6 +7877,7 @@
                   <a:srgbClr val="8A8478"/>
                 </a:solidFill>
                 <a:latin typeface="Courier New"/>
+                <a:ea typeface="Hiragino Sans GB"/>
               </a:rPr>
               <a:t>12 / 14</a:t>
             </a:r>
@@ -7927,6 +7986,7 @@
                   <a:srgbClr val="0E5C63"/>
                 </a:solidFill>
                 <a:latin typeface="Courier New"/>
+                <a:ea typeface="Hiragino Sans GB"/>
               </a:rPr>
               <a:t>总结</a:t>
             </a:r>
@@ -8017,6 +8077,7 @@
                   <a:srgbClr val="20242A"/>
                 </a:solidFill>
                 <a:latin typeface="Georgia"/>
+                <a:ea typeface="Hiragino Sans GB"/>
               </a:rPr>
               <a:t>值得记住的五件事</a:t>
             </a:r>
@@ -8063,6 +8124,7 @@
                   <a:srgbClr val="D8542A"/>
                 </a:solidFill>
                 <a:latin typeface="Georgia"/>
+                <a:ea typeface="Hiragino Sans GB"/>
               </a:rPr>
               <a:t>01</a:t>
             </a:r>
@@ -8109,6 +8171,7 @@
                   <a:srgbClr val="20242A"/>
                 </a:solidFill>
                 <a:latin typeface="Georgia"/>
+                <a:ea typeface="Hiragino Sans GB"/>
               </a:rPr>
               <a:t>降温，但不疲软</a:t>
             </a:r>
@@ -8155,6 +8218,7 @@
                   <a:srgbClr val="4A4E56"/>
                 </a:solidFill>
                 <a:latin typeface="Helvetica Neue"/>
+                <a:ea typeface="Hiragino Sans GB"/>
               </a:rPr>
               <a:t>空缺数如今与求职者大致持平——已从 2022 峰值回落，但仍是 2020 年前常态的约 3 倍。</a:t>
             </a:r>
@@ -8245,6 +8309,7 @@
                   <a:srgbClr val="D8542A"/>
                 </a:solidFill>
                 <a:latin typeface="Georgia"/>
+                <a:ea typeface="Hiragino Sans GB"/>
               </a:rPr>
               <a:t>02</a:t>
             </a:r>
@@ -8291,6 +8356,7 @@
                   <a:srgbClr val="20242A"/>
                 </a:solidFill>
                 <a:latin typeface="Georgia"/>
+                <a:ea typeface="Hiragino Sans GB"/>
               </a:rPr>
               <a:t>短缺是结构性的</a:t>
             </a:r>
@@ -8337,6 +8403,7 @@
                   <a:srgbClr val="4A4E56"/>
                 </a:solidFill>
                 <a:latin typeface="Helvetica Neue"/>
+                <a:ea typeface="Hiragino Sans GB"/>
               </a:rPr>
               <a:t>无论总量如何变化，照护、信息技术、技术工种、教育与物流始终极度缺人。</a:t>
             </a:r>
@@ -8427,6 +8494,7 @@
                   <a:srgbClr val="D8542A"/>
                 </a:solidFill>
                 <a:latin typeface="Georgia"/>
+                <a:ea typeface="Hiragino Sans GB"/>
               </a:rPr>
               <a:t>03</a:t>
             </a:r>
@@ -8473,6 +8541,7 @@
                   <a:srgbClr val="20242A"/>
                 </a:solidFill>
                 <a:latin typeface="Georgia"/>
+                <a:ea typeface="Hiragino Sans GB"/>
               </a:rPr>
               <a:t>工资在赢</a:t>
             </a:r>
@@ -8519,6 +8588,7 @@
                   <a:srgbClr val="4A4E56"/>
                 </a:solidFill>
                 <a:latin typeface="Helvetica Neue"/>
+                <a:ea typeface="Hiragino Sans GB"/>
               </a:rPr>
               <a:t>协议工资已连续三年跑赢通胀；实际收入正在上升。</a:t>
             </a:r>
@@ -8609,6 +8679,7 @@
                   <a:srgbClr val="D8542A"/>
                 </a:solidFill>
                 <a:latin typeface="Georgia"/>
+                <a:ea typeface="Hiragino Sans GB"/>
               </a:rPr>
               <a:t>04</a:t>
             </a:r>
@@ -8655,6 +8726,7 @@
                   <a:srgbClr val="20242A"/>
                 </a:solidFill>
                 <a:latin typeface="Georgia"/>
+                <a:ea typeface="Hiragino Sans GB"/>
               </a:rPr>
               <a:t>大门在收窄</a:t>
             </a:r>
@@ -8701,6 +8773,7 @@
                   <a:srgbClr val="4A4E56"/>
                 </a:solidFill>
                 <a:latin typeface="Helvetica Neue"/>
+                <a:ea typeface="Hiragino Sans GB"/>
               </a:rPr>
               <a:t>27% 的外籍税收优惠、更高的薪资门槛和更少的许可，使引进外籍人才更贵、更挑剔。</a:t>
             </a:r>
@@ -8791,6 +8864,7 @@
                   <a:srgbClr val="D8542A"/>
                 </a:solidFill>
                 <a:latin typeface="Georgia"/>
+                <a:ea typeface="Hiragino Sans GB"/>
               </a:rPr>
               <a:t>05</a:t>
             </a:r>
@@ -8837,6 +8911,7 @@
                   <a:srgbClr val="20242A"/>
                 </a:solidFill>
                 <a:latin typeface="Georgia"/>
+                <a:ea typeface="Hiragino Sans GB"/>
               </a:rPr>
               <a:t>人口结构决定底线</a:t>
             </a:r>
@@ -8883,6 +8958,7 @@
                   <a:srgbClr val="4A4E56"/>
                 </a:solidFill>
                 <a:latin typeface="Helvetica Neue"/>
+                <a:ea typeface="Hiragino Sans GB"/>
               </a:rPr>
               <a:t>老龄化、多兼职的劳动力让市场持续紧张——释压阀是再培训，而非闲置。</a:t>
             </a:r>
@@ -8929,6 +9005,7 @@
                   <a:srgbClr val="8A8478"/>
                 </a:solidFill>
                 <a:latin typeface="Courier New"/>
+                <a:ea typeface="Hiragino Sans GB"/>
               </a:rPr>
               <a:t>荷兰就业市场 · 2026   ·   用 slide-maker 制作的示例样稿</a:t>
             </a:r>
@@ -8975,6 +9052,7 @@
                   <a:srgbClr val="8A8478"/>
                 </a:solidFill>
                 <a:latin typeface="Courier New"/>
+                <a:ea typeface="Hiragino Sans GB"/>
               </a:rPr>
               <a:t>13 / 14</a:t>
             </a:r>
@@ -9083,6 +9161,7 @@
                   <a:srgbClr val="D8542A"/>
                 </a:solidFill>
                 <a:latin typeface="Courier New"/>
+                <a:ea typeface="Hiragino Sans GB"/>
               </a:rPr>
               <a:t>来源  ·  截至 2026 年 7 月 12 日核实</a:t>
             </a:r>
@@ -9173,6 +9252,7 @@
                   <a:srgbClr val="D8542A"/>
                 </a:solidFill>
                 <a:latin typeface="Courier New"/>
+                <a:ea typeface="Hiragino Sans GB"/>
               </a:rPr>
               <a:t>01  </a:t>
             </a:r>
@@ -9182,6 +9262,7 @@
                   <a:srgbClr val="20242A"/>
                 </a:solidFill>
                 <a:latin typeface="Courier New"/>
+                <a:ea typeface="Hiragino Sans GB"/>
               </a:rPr>
               <a:t>CBS — 失业率、空缺与紧张度、工资（CAO 指数）、劳动参与、平均薪资。</a:t>
             </a:r>
@@ -9228,6 +9309,7 @@
                   <a:srgbClr val="D8542A"/>
                 </a:solidFill>
                 <a:latin typeface="Courier New"/>
+                <a:ea typeface="Hiragino Sans GB"/>
               </a:rPr>
               <a:t>02  </a:t>
             </a:r>
@@ -9237,6 +9319,7 @@
                   <a:srgbClr val="20242A"/>
                 </a:solidFill>
                 <a:latin typeface="Courier New"/>
+                <a:ea typeface="Hiragino Sans GB"/>
               </a:rPr>
               <a:t>欧盟委员会 — 2025 年秋季预测，荷兰（2026–27 年失业率）。</a:t>
             </a:r>
@@ -9283,6 +9366,7 @@
                   <a:srgbClr val="D8542A"/>
                 </a:solidFill>
                 <a:latin typeface="Courier New"/>
+                <a:ea typeface="Hiragino Sans GB"/>
               </a:rPr>
               <a:t>03  </a:t>
             </a:r>
@@ -9292,6 +9376,7 @@
                   <a:srgbClr val="20242A"/>
                 </a:solidFill>
                 <a:latin typeface="Courier New"/>
+                <a:ea typeface="Hiragino Sans GB"/>
               </a:rPr>
               <a:t>Eurostat — 统一口径失业率，荷兰 vs 欧盟/欧元区（2026 年 5 月）。</a:t>
             </a:r>
@@ -9338,6 +9423,7 @@
                   <a:srgbClr val="D8542A"/>
                 </a:solidFill>
                 <a:latin typeface="Courier New"/>
+                <a:ea typeface="Hiragino Sans GB"/>
               </a:rPr>
               <a:t>04  </a:t>
             </a:r>
@@ -9347,6 +9433,7 @@
                   <a:srgbClr val="20242A"/>
                 </a:solidFill>
                 <a:latin typeface="Courier New"/>
+                <a:ea typeface="Hiragino Sans GB"/>
               </a:rPr>
               <a:t>UWV — 短缺职业、35 地区紧张度地图、2026–27 年就业增长展望。</a:t>
             </a:r>
@@ -9393,6 +9480,7 @@
                   <a:srgbClr val="D8542A"/>
                 </a:solidFill>
                 <a:latin typeface="Courier New"/>
+                <a:ea typeface="Hiragino Sans GB"/>
               </a:rPr>
               <a:t>05  </a:t>
             </a:r>
@@ -9402,6 +9490,7 @@
                   <a:srgbClr val="20242A"/>
                 </a:solidFill>
                 <a:latin typeface="Courier New"/>
+                <a:ea typeface="Hiragino Sans GB"/>
               </a:rPr>
               <a:t>IND — 2026 年高技能移民薪资门槛；认证雇主名录。</a:t>
             </a:r>
@@ -9448,6 +9537,7 @@
                   <a:srgbClr val="D8542A"/>
                 </a:solidFill>
                 <a:latin typeface="Courier New"/>
+                <a:ea typeface="Hiragino Sans GB"/>
               </a:rPr>
               <a:t>06  </a:t>
             </a:r>
@@ -9457,6 +9547,7 @@
                   <a:srgbClr val="20242A"/>
                 </a:solidFill>
                 <a:latin typeface="Courier New"/>
+                <a:ea typeface="Hiragino Sans GB"/>
               </a:rPr>
               <a:t>Business.gov.nl — 法定最低工资（2026 年 7 月）；30%→27% 外籍税收优惠（2027 年）。</a:t>
             </a:r>
@@ -9503,6 +9594,7 @@
                   <a:srgbClr val="D8542A"/>
                 </a:solidFill>
                 <a:latin typeface="Courier New"/>
+                <a:ea typeface="Hiragino Sans GB"/>
               </a:rPr>
               <a:t>07  </a:t>
             </a:r>
@@ -9512,6 +9604,7 @@
                   <a:srgbClr val="20242A"/>
                 </a:solidFill>
                 <a:latin typeface="Courier New"/>
+                <a:ea typeface="Hiragino Sans GB"/>
               </a:rPr>
               <a:t>OECD — 《2025 年国际移民展望》（许可、入境、国籍构成）。</a:t>
             </a:r>
@@ -9558,6 +9651,7 @@
                   <a:srgbClr val="D8542A"/>
                 </a:solidFill>
                 <a:latin typeface="Courier New"/>
+                <a:ea typeface="Hiragino Sans GB"/>
               </a:rPr>
               <a:t>08  </a:t>
             </a:r>
@@ -9567,6 +9661,7 @@
                   <a:srgbClr val="20242A"/>
                 </a:solidFill>
                 <a:latin typeface="Courier New"/>
+                <a:ea typeface="Hiragino Sans GB"/>
               </a:rPr>
               <a:t>Rabobank · ABN AMRO · DNB — 2026–27 年宏观与劳动力市场评论。</a:t>
             </a:r>
@@ -9613,6 +9708,7 @@
                   <a:srgbClr val="D8542A"/>
                 </a:solidFill>
                 <a:latin typeface="Courier New"/>
+                <a:ea typeface="Hiragino Sans GB"/>
               </a:rPr>
               <a:t>09  </a:t>
             </a:r>
@@ -9622,6 +9718,7 @@
                   <a:srgbClr val="20242A"/>
                 </a:solidFill>
                 <a:latin typeface="Courier New"/>
+                <a:ea typeface="Hiragino Sans GB"/>
               </a:rPr>
               <a:t>招聘薪酬指南 — 行业中位数估算（非官方统计）。</a:t>
             </a:r>
@@ -9712,6 +9809,7 @@
                   <a:srgbClr val="4A4E56"/>
                 </a:solidFill>
                 <a:latin typeface="Helvetica Neue"/>
+                <a:ea typeface="Hiragino Sans GB"/>
               </a:rPr>
               <a:t>这是 slide-maker 模板库的一份示例样稿。</a:t>
             </a:r>
@@ -9721,6 +9819,7 @@
                   <a:srgbClr val="B23F1C"/>
                 </a:solidFill>
                 <a:latin typeface="Helvetica Neue"/>
+                <a:ea typeface="Hiragino Sans GB"/>
               </a:rPr>
               <a:t>整套视觉系统可复用——替换成你自己核实过的内容即可。</a:t>
             </a:r>
@@ -9767,6 +9866,7 @@
                   <a:srgbClr val="8A8478"/>
                 </a:solidFill>
                 <a:latin typeface="Courier New"/>
+                <a:ea typeface="Hiragino Sans GB"/>
               </a:rPr>
               <a:t>荷兰就业市场 · 2026   ·   用 slide-maker 制作的示例样稿</a:t>
             </a:r>
@@ -9813,6 +9913,7 @@
                   <a:srgbClr val="8A8478"/>
                 </a:solidFill>
                 <a:latin typeface="Courier New"/>
+                <a:ea typeface="Hiragino Sans GB"/>
               </a:rPr>
               <a:t>14 / 14</a:t>
             </a:r>
@@ -9921,6 +10022,7 @@
                   <a:srgbClr val="D8542A"/>
                 </a:solidFill>
                 <a:latin typeface="Helvetica Neue"/>
+                <a:ea typeface="Hiragino Sans GB"/>
               </a:rPr>
               <a:t>核心摘要</a:t>
             </a:r>
@@ -9967,6 +10069,7 @@
                   <a:srgbClr val="20242A"/>
                 </a:solidFill>
                 <a:latin typeface="Georgia"/>
+                <a:ea typeface="Hiragino Sans GB"/>
               </a:rPr>
               <a:t>四个数字讲清整个故事</a:t>
             </a:r>
@@ -10013,6 +10116,7 @@
                   <a:srgbClr val="4A4E56"/>
                 </a:solidFill>
                 <a:latin typeface="Helvetica Neue"/>
+                <a:ea typeface="Hiragino Sans GB"/>
               </a:rPr>
               <a:t>就业强劲、紧张缓解、实际工资上涨——而通往海外人才的大门正悄然收窄。</a:t>
             </a:r>
@@ -10154,6 +10258,7 @@
                   <a:srgbClr val="8A8478"/>
                 </a:solidFill>
                 <a:latin typeface="Courier New"/>
+                <a:ea typeface="Hiragino Sans GB"/>
               </a:rPr>
               <a:t>失业率</a:t>
             </a:r>
@@ -10200,6 +10305,7 @@
                   <a:srgbClr val="0E5C63"/>
                 </a:solidFill>
                 <a:latin typeface="Helvetica Neue"/>
+                <a:ea typeface="Hiragino Sans GB"/>
               </a:rPr>
               <a:t>3.9%</a:t>
             </a:r>
@@ -10246,6 +10352,7 @@
                   <a:srgbClr val="4A4E56"/>
                 </a:solidFill>
                 <a:latin typeface="Helvetica Neue"/>
+                <a:ea typeface="Hiragino Sans GB"/>
               </a:rPr>
               <a:t>2026 年二季度 — 全欧盟最低之列</a:t>
             </a:r>
@@ -10387,6 +10494,7 @@
                   <a:srgbClr val="8A8478"/>
                 </a:solidFill>
                 <a:latin typeface="Courier New"/>
+                <a:ea typeface="Hiragino Sans GB"/>
               </a:rPr>
               <a:t>劳动力市场紧张度</a:t>
             </a:r>
@@ -10433,6 +10541,7 @@
                   <a:srgbClr val="D8542A"/>
                 </a:solidFill>
                 <a:latin typeface="Helvetica Neue"/>
+                <a:ea typeface="Hiragino Sans GB"/>
               </a:rPr>
               <a:t>91</a:t>
             </a:r>
@@ -10479,6 +10588,7 @@
                   <a:srgbClr val="4A4E56"/>
                 </a:solidFill>
                 <a:latin typeface="Helvetica Neue"/>
+                <a:ea typeface="Hiragino Sans GB"/>
               </a:rPr>
               <a:t>每 100 名失业者对应的空缺数（2026 一季度）</a:t>
             </a:r>
@@ -10620,6 +10730,7 @@
                   <a:srgbClr val="8A8478"/>
                 </a:solidFill>
                 <a:latin typeface="Courier New"/>
+                <a:ea typeface="Hiragino Sans GB"/>
               </a:rPr>
               <a:t>协议工资</a:t>
             </a:r>
@@ -10666,6 +10777,7 @@
                   <a:srgbClr val="0E5C63"/>
                 </a:solidFill>
                 <a:latin typeface="Helvetica Neue"/>
+                <a:ea typeface="Hiragino Sans GB"/>
               </a:rPr>
               <a:t>+4.5%</a:t>
             </a:r>
@@ -10712,6 +10824,7 @@
                   <a:srgbClr val="4A4E56"/>
                 </a:solidFill>
                 <a:latin typeface="Helvetica Neue"/>
+                <a:ea typeface="Hiragino Sans GB"/>
               </a:rPr>
               <a:t>同比，实际增长 +2.0%</a:t>
             </a:r>
@@ -10853,6 +10966,7 @@
                   <a:srgbClr val="8A8478"/>
                 </a:solidFill>
                 <a:latin typeface="Courier New"/>
+                <a:ea typeface="Hiragino Sans GB"/>
               </a:rPr>
               <a:t>女性就业率</a:t>
             </a:r>
@@ -10899,6 +11013,7 @@
                   <a:srgbClr val="0E5C63"/>
                 </a:solidFill>
                 <a:latin typeface="Helvetica Neue"/>
+                <a:ea typeface="Hiragino Sans GB"/>
               </a:rPr>
               <a:t>69%</a:t>
             </a:r>
@@ -10945,6 +11060,7 @@
                   <a:srgbClr val="4A4E56"/>
                 </a:solidFill>
                 <a:latin typeface="Helvetica Neue"/>
+                <a:ea typeface="Hiragino Sans GB"/>
               </a:rPr>
               <a:t>欧盟 27 国中最高</a:t>
             </a:r>
@@ -10991,6 +11107,7 @@
                   <a:srgbClr val="D8542A"/>
                 </a:solidFill>
                 <a:latin typeface="Courier New"/>
+                <a:ea typeface="Hiragino Sans GB"/>
               </a:rPr>
               <a:t>来源   </a:t>
             </a:r>
@@ -11000,6 +11117,7 @@
                   <a:srgbClr val="8A8478"/>
                 </a:solidFill>
                 <a:latin typeface="Courier New"/>
+                <a:ea typeface="Hiragino Sans GB"/>
               </a:rPr>
               <a:t>CBS（失业率、紧张度、工资、女性就业率）；Eurostat（欧盟平均值）。</a:t>
             </a:r>
@@ -11046,6 +11164,7 @@
                   <a:srgbClr val="8A8478"/>
                 </a:solidFill>
                 <a:latin typeface="Courier New"/>
+                <a:ea typeface="Hiragino Sans GB"/>
               </a:rPr>
               <a:t>荷兰就业市场 · 2026   ·   用 slide-maker 制作的示例样稿</a:t>
             </a:r>
@@ -11092,6 +11211,7 @@
                   <a:srgbClr val="8A8478"/>
                 </a:solidFill>
                 <a:latin typeface="Courier New"/>
+                <a:ea typeface="Hiragino Sans GB"/>
               </a:rPr>
               <a:t>02 / 14</a:t>
             </a:r>
@@ -11200,6 +11320,7 @@
                   <a:srgbClr val="D8542A"/>
                 </a:solidFill>
                 <a:latin typeface="Helvetica Neue"/>
+                <a:ea typeface="Hiragino Sans GB"/>
               </a:rPr>
               <a:t>宏观就业</a:t>
             </a:r>
@@ -11246,6 +11367,7 @@
                   <a:srgbClr val="20242A"/>
                 </a:solidFill>
                 <a:latin typeface="Georgia"/>
+                <a:ea typeface="Hiragino Sans GB"/>
               </a:rPr>
               <a:t>从历史低位温和降温</a:t>
             </a:r>
@@ -11292,6 +11414,7 @@
                   <a:srgbClr val="8A8478"/>
                 </a:solidFill>
                 <a:latin typeface="Courier New"/>
+                <a:ea typeface="Hiragino Sans GB"/>
               </a:rPr>
               <a:t>失业率，占劳动力比重 %</a:t>
             </a:r>
@@ -11356,6 +11479,7 @@
                   <a:srgbClr val="B23F1C"/>
                 </a:solidFill>
                 <a:latin typeface="Courier New"/>
+                <a:ea typeface="Hiragino Sans GB"/>
               </a:rPr>
               <a:t>底部依然稳固</a:t>
             </a:r>
@@ -11402,6 +11526,7 @@
                   <a:srgbClr val="D8542A"/>
                 </a:solidFill>
                 <a:latin typeface="Helvetica Neue"/>
+                <a:ea typeface="Hiragino Sans GB"/>
               </a:rPr>
               <a:t>3.9%</a:t>
             </a:r>
@@ -11448,6 +11573,7 @@
                   <a:srgbClr val="4A4E56"/>
                 </a:solidFill>
                 <a:latin typeface="Helvetica Neue"/>
+                <a:ea typeface="Hiragino Sans GB"/>
               </a:rPr>
               <a:t>随着增长放缓，失业率正略有回升——但起点是实实在在的低位。它远低于欧盟 6.0%、欧元区 6.2% 的平均水平。</a:t>
             </a:r>
@@ -11538,6 +11664,7 @@
                   <a:srgbClr val="0E5C63"/>
                 </a:solidFill>
                 <a:latin typeface="Helvetica Neue"/>
+                <a:ea typeface="Hiragino Sans GB"/>
               </a:rPr>
               <a:t>≈ 40 万</a:t>
             </a:r>
@@ -11547,6 +11674,7 @@
                   <a:srgbClr val="4A4E56"/>
                 </a:solidFill>
                 <a:latin typeface="Helvetica Neue"/>
+                <a:ea typeface="Hiragino Sans GB"/>
               </a:rPr>
               <a:t>  人失业</a:t>
             </a:r>
@@ -11593,6 +11721,7 @@
                   <a:srgbClr val="8A8478"/>
                 </a:solidFill>
                 <a:latin typeface="Helvetica Neue"/>
+                <a:ea typeface="Hiragino Sans GB"/>
               </a:rPr>
               <a:t>占约 1,000 万劳动力（CBS，2025 四季度）。</a:t>
             </a:r>
@@ -11639,6 +11768,7 @@
                   <a:srgbClr val="D8542A"/>
                 </a:solidFill>
                 <a:latin typeface="Courier New"/>
+                <a:ea typeface="Hiragino Sans GB"/>
               </a:rPr>
               <a:t>来源   </a:t>
             </a:r>
@@ -11648,6 +11778,7 @@
                   <a:srgbClr val="8A8478"/>
                 </a:solidFill>
                 <a:latin typeface="Courier New"/>
+                <a:ea typeface="Hiragino Sans GB"/>
               </a:rPr>
               <a:t>CBS 劳动力数据；欧盟委员会预测；Eurostat（2026 年 5 月）。</a:t>
             </a:r>
@@ -11694,6 +11825,7 @@
                   <a:srgbClr val="8A8478"/>
                 </a:solidFill>
                 <a:latin typeface="Courier New"/>
+                <a:ea typeface="Hiragino Sans GB"/>
               </a:rPr>
               <a:t>荷兰就业市场 · 2026   ·   用 slide-maker 制作的示例样稿</a:t>
             </a:r>
@@ -11740,6 +11872,7 @@
                   <a:srgbClr val="8A8478"/>
                 </a:solidFill>
                 <a:latin typeface="Courier New"/>
+                <a:ea typeface="Hiragino Sans GB"/>
               </a:rPr>
               <a:t>03 / 14</a:t>
             </a:r>
@@ -11848,6 +11981,7 @@
                   <a:srgbClr val="D8542A"/>
                 </a:solidFill>
                 <a:latin typeface="Helvetica Neue"/>
+                <a:ea typeface="Hiragino Sans GB"/>
               </a:rPr>
               <a:t>劳动力市场紧张度  ·  转折点</a:t>
             </a:r>
@@ -11894,6 +12028,7 @@
                   <a:srgbClr val="20242A"/>
                 </a:solidFill>
                 <a:latin typeface="Georgia"/>
+                <a:ea typeface="Hiragino Sans GB"/>
               </a:rPr>
               <a:t>从炽热降温——却远未宽松</a:t>
             </a:r>
@@ -11940,6 +12075,7 @@
                   <a:srgbClr val="8A8478"/>
                 </a:solidFill>
                 <a:latin typeface="Courier New"/>
+                <a:ea typeface="Hiragino Sans GB"/>
               </a:rPr>
               <a:t>每 100 名失业者对应的空缺数</a:t>
             </a:r>
@@ -12004,6 +12140,7 @@
                   <a:srgbClr val="B23F1C"/>
                 </a:solidFill>
                 <a:latin typeface="Courier New"/>
+                <a:ea typeface="Hiragino Sans GB"/>
               </a:rPr>
               <a:t>当下</a:t>
             </a:r>
@@ -12049,6 +12186,7 @@
                   <a:srgbClr val="D8542A"/>
                 </a:solidFill>
                 <a:latin typeface="Helvetica Neue"/>
+                <a:ea typeface="Hiragino Sans GB"/>
               </a:rPr>
               <a:t>91</a:t>
             </a:r>
@@ -12095,6 +12233,7 @@
                   <a:srgbClr val="4A4E56"/>
                 </a:solidFill>
                 <a:latin typeface="Helvetica Neue"/>
+                <a:ea typeface="Hiragino Sans GB"/>
               </a:rPr>
               <a:t>每 100 名求职者对应的空缺——略低于持平线，已从 2022 年 142 的峰值回落，但仍是</a:t>
             </a:r>
@@ -12104,6 +12243,7 @@
                   <a:srgbClr val="0E5C63"/>
                 </a:solidFill>
                 <a:latin typeface="Helvetica Neue"/>
+                <a:ea typeface="Hiragino Sans GB"/>
               </a:rPr>
               <a:t>2020 年前常态的约 3 倍</a:t>
             </a:r>
@@ -12113,6 +12253,7 @@
                   <a:srgbClr val="4A4E56"/>
                 </a:solidFill>
                 <a:latin typeface="Helvetica Neue"/>
+                <a:ea typeface="Hiragino Sans GB"/>
               </a:rPr>
               <a:t>（当时为 32）。</a:t>
             </a:r>
@@ -12249,6 +12390,7 @@
                   <a:srgbClr val="D8542A"/>
                 </a:solidFill>
                 <a:latin typeface="Helvetica Neue"/>
+                <a:ea typeface="Hiragino Sans GB"/>
               </a:rPr>
               <a:t>所以呢   </a:t>
             </a:r>
@@ -12258,6 +12400,7 @@
                   <a:srgbClr val="20242A"/>
                 </a:solidFill>
                 <a:latin typeface="Helvetica Neue"/>
+                <a:ea typeface="Hiragino Sans GB"/>
               </a:rPr>
               <a:t>总量上的平衡掩盖了结构性短缺：特定行业与地区依然极度缺人。</a:t>
             </a:r>
@@ -12304,6 +12447,7 @@
                   <a:srgbClr val="D8542A"/>
                 </a:solidFill>
                 <a:latin typeface="Courier New"/>
+                <a:ea typeface="Hiragino Sans GB"/>
               </a:rPr>
               <a:t>来源   </a:t>
             </a:r>
@@ -12313,6 +12457,7 @@
                   <a:srgbClr val="8A8478"/>
                 </a:solidFill>
                 <a:latin typeface="Courier New"/>
+                <a:ea typeface="Hiragino Sans GB"/>
               </a:rPr>
               <a:t>CBS（季度空缺与失业紧张比；2022 峰值与疫情前常态取自 CBS 序列）。</a:t>
             </a:r>
@@ -12359,6 +12504,7 @@
                   <a:srgbClr val="8A8478"/>
                 </a:solidFill>
                 <a:latin typeface="Courier New"/>
+                <a:ea typeface="Hiragino Sans GB"/>
               </a:rPr>
               <a:t>荷兰就业市场 · 2026   ·   用 slide-maker 制作的示例样稿</a:t>
             </a:r>
@@ -12405,6 +12551,7 @@
                   <a:srgbClr val="8A8478"/>
                 </a:solidFill>
                 <a:latin typeface="Courier New"/>
+                <a:ea typeface="Hiragino Sans GB"/>
               </a:rPr>
               <a:t>04 / 14</a:t>
             </a:r>
@@ -12513,6 +12660,7 @@
                   <a:srgbClr val="0E5C63"/>
                 </a:solidFill>
                 <a:latin typeface="Helvetica Neue"/>
+                <a:ea typeface="Hiragino Sans GB"/>
               </a:rPr>
               <a:t>结构性特征</a:t>
             </a:r>
@@ -12559,6 +12707,7 @@
                   <a:srgbClr val="20242A"/>
                 </a:solidFill>
                 <a:latin typeface="Georgia"/>
+                <a:ea typeface="Hiragino Sans GB"/>
               </a:rPr>
               <a:t>高参与、多兼职的经济体</a:t>
             </a:r>
@@ -12653,6 +12802,7 @@
                   <a:srgbClr val="0E5C63"/>
                 </a:solidFill>
                 <a:latin typeface="Courier New"/>
+                <a:ea typeface="Hiragino Sans GB"/>
               </a:rPr>
               <a:t>劳动参与</a:t>
             </a:r>
@@ -12699,6 +12849,7 @@
                   <a:srgbClr val="20242A"/>
                 </a:solidFill>
                 <a:latin typeface="Georgia"/>
+                <a:ea typeface="Hiragino Sans GB"/>
               </a:rPr>
               <a:t>全欧盟最高的</a:t>
             </a:r>
@@ -12721,6 +12872,7 @@
                   <a:srgbClr val="20242A"/>
                 </a:solidFill>
                 <a:latin typeface="Georgia"/>
+                <a:ea typeface="Hiragino Sans GB"/>
               </a:rPr>
               <a:t>女性就业率</a:t>
             </a:r>
@@ -12767,6 +12919,7 @@
                   <a:srgbClr val="8A8478"/>
                 </a:solidFill>
                 <a:latin typeface="Helvetica Neue"/>
+                <a:ea typeface="Hiragino Sans GB"/>
               </a:rPr>
               <a:t>女性就业率，15–74 岁</a:t>
             </a:r>
@@ -12905,6 +13058,7 @@
                   <a:srgbClr val="20242A"/>
                 </a:solidFill>
                 <a:latin typeface="Helvetica Neue"/>
+                <a:ea typeface="Hiragino Sans GB"/>
               </a:rPr>
               <a:t>69%</a:t>
             </a:r>
@@ -12951,6 +13105,7 @@
                   <a:srgbClr val="0E5C63"/>
                 </a:solidFill>
                 <a:latin typeface="Helvetica Neue"/>
+                <a:ea typeface="Hiragino Sans GB"/>
               </a:rPr>
               <a:t>+12.7 pp</a:t>
             </a:r>
@@ -12960,6 +13115,7 @@
                   <a:srgbClr val="4A4E56"/>
                 </a:solidFill>
                 <a:latin typeface="Helvetica Neue"/>
+                <a:ea typeface="Hiragino Sans GB"/>
               </a:rPr>
               <a:t>  高于欧盟平均</a:t>
             </a:r>
@@ -13054,6 +13210,7 @@
                   <a:srgbClr val="0E5C63"/>
                 </a:solidFill>
                 <a:latin typeface="Courier New"/>
+                <a:ea typeface="Hiragino Sans GB"/>
               </a:rPr>
               <a:t>兼职文化</a:t>
             </a:r>
@@ -13100,6 +13257,7 @@
                   <a:srgbClr val="20242A"/>
                 </a:solidFill>
                 <a:latin typeface="Georgia"/>
+                <a:ea typeface="Hiragino Sans GB"/>
               </a:rPr>
               <a:t>欧洲的兼职之都</a:t>
             </a:r>
@@ -13146,6 +13304,7 @@
                   <a:srgbClr val="D8542A"/>
                 </a:solidFill>
                 <a:latin typeface="Helvetica Neue"/>
+                <a:ea typeface="Hiragino Sans GB"/>
               </a:rPr>
               <a:t>约 190 万</a:t>
             </a:r>
@@ -13192,6 +13351,7 @@
                   <a:srgbClr val="4A4E56"/>
                 </a:solidFill>
                 <a:latin typeface="Helvetica Neue"/>
+                <a:ea typeface="Hiragino Sans GB"/>
               </a:rPr>
               <a:t>每周工作 28–35 小时——四年间增加了 30 万人。三分之二的在职母亲从事兼职：这是紧张的市场仍可动用的工时储备。</a:t>
             </a:r>
@@ -13238,6 +13398,7 @@
                   <a:srgbClr val="D8542A"/>
                 </a:solidFill>
                 <a:latin typeface="Courier New"/>
+                <a:ea typeface="Hiragino Sans GB"/>
               </a:rPr>
               <a:t>来源   </a:t>
             </a:r>
@@ -13247,6 +13408,7 @@
                   <a:srgbClr val="8A8478"/>
                 </a:solidFill>
                 <a:latin typeface="Courier New"/>
+                <a:ea typeface="Hiragino Sans GB"/>
               </a:rPr>
               <a:t>CBS 与 Eurostat（就业率与兼职比例，2025 年）。</a:t>
             </a:r>
@@ -13293,6 +13455,7 @@
                   <a:srgbClr val="8A8478"/>
                 </a:solidFill>
                 <a:latin typeface="Courier New"/>
+                <a:ea typeface="Hiragino Sans GB"/>
               </a:rPr>
               <a:t>荷兰就业市场 · 2026   ·   用 slide-maker 制作的示例样稿</a:t>
             </a:r>
@@ -13339,6 +13502,7 @@
                   <a:srgbClr val="8A8478"/>
                 </a:solidFill>
                 <a:latin typeface="Courier New"/>
+                <a:ea typeface="Hiragino Sans GB"/>
               </a:rPr>
               <a:t>05 / 14</a:t>
             </a:r>
@@ -13447,6 +13611,7 @@
                   <a:srgbClr val="D8542A"/>
                 </a:solidFill>
                 <a:latin typeface="Helvetica Neue"/>
+                <a:ea typeface="Hiragino Sans GB"/>
               </a:rPr>
               <a:t>短缺行业</a:t>
             </a:r>
@@ -13493,6 +13658,7 @@
                   <a:srgbClr val="20242A"/>
                 </a:solidFill>
                 <a:latin typeface="Georgia"/>
+                <a:ea typeface="Hiragino Sans GB"/>
               </a:rPr>
               <a:t>紧缺集中在哪里</a:t>
             </a:r>
@@ -13539,6 +13705,7 @@
                   <a:srgbClr val="4A4E56"/>
                 </a:solidFill>
                 <a:latin typeface="Helvetica Neue"/>
+                <a:ea typeface="Hiragino Sans GB"/>
               </a:rPr>
               <a:t>即便总量在降温，UWV 仍指出五个领域存在持续的结构性短缺——2025 年底，这些领域约 45% 的空缺岗位无人填补。</a:t>
             </a:r>
@@ -13745,6 +13912,7 @@
                   <a:srgbClr val="20242A"/>
                 </a:solidFill>
                 <a:latin typeface="Helvetica Neue"/>
+                <a:ea typeface="Hiragino Sans GB"/>
               </a:rPr>
               <a:t>医疗与社会照护</a:t>
             </a:r>
@@ -13791,6 +13959,7 @@
                   <a:srgbClr val="4A4E56"/>
                 </a:solidFill>
                 <a:latin typeface="Helvetica Neue"/>
+                <a:ea typeface="Hiragino Sans GB"/>
               </a:rPr>
               <a:t>护士、护理员与专科人员——人口老龄化留下的结构性缺口</a:t>
             </a:r>
@@ -13997,6 +14166,7 @@
                   <a:srgbClr val="20242A"/>
                 </a:solidFill>
                 <a:latin typeface="Helvetica Neue"/>
+                <a:ea typeface="Hiragino Sans GB"/>
               </a:rPr>
               <a:t>信息技术</a:t>
             </a:r>
@@ -14043,6 +14213,7 @@
                   <a:srgbClr val="4A4E56"/>
                 </a:solidFill>
                 <a:latin typeface="Helvetica Neue"/>
+                <a:ea typeface="Hiragino Sans GB"/>
               </a:rPr>
               <a:t>软件开发者与数据专才高居需求榜首</a:t>
             </a:r>
@@ -14249,6 +14420,7 @@
                   <a:srgbClr val="20242A"/>
                 </a:solidFill>
                 <a:latin typeface="Helvetica Neue"/>
+                <a:ea typeface="Hiragino Sans GB"/>
               </a:rPr>
               <a:t>技术工种</a:t>
             </a:r>
@@ -14295,6 +14467,7 @@
                   <a:srgbClr val="4A4E56"/>
                 </a:solidFill>
                 <a:latin typeface="Helvetica Neue"/>
+                <a:ea typeface="Hiragino Sans GB"/>
               </a:rPr>
               <a:t>电工、机修工、安装与维护技工</a:t>
             </a:r>
@@ -14501,6 +14674,7 @@
                   <a:srgbClr val="20242A"/>
                 </a:solidFill>
                 <a:latin typeface="Helvetica Neue"/>
+                <a:ea typeface="Hiragino Sans GB"/>
               </a:rPr>
               <a:t>教育</a:t>
             </a:r>
@@ -14547,6 +14721,7 @@
                   <a:srgbClr val="4A4E56"/>
                 </a:solidFill>
                 <a:latin typeface="Helvetica Neue"/>
+                <a:ea typeface="Hiragino Sans GB"/>
               </a:rPr>
               <a:t>小学教师与理工科师资长期供不应求</a:t>
             </a:r>
@@ -14753,6 +14928,7 @@
                   <a:srgbClr val="20242A"/>
                 </a:solidFill>
                 <a:latin typeface="Helvetica Neue"/>
+                <a:ea typeface="Hiragino Sans GB"/>
               </a:rPr>
               <a:t>运输与物流</a:t>
             </a:r>
@@ -14799,6 +14975,7 @@
                   <a:srgbClr val="4A4E56"/>
                 </a:solidFill>
                 <a:latin typeface="Helvetica Neue"/>
+                <a:ea typeface="Hiragino Sans GB"/>
               </a:rPr>
               <a:t>兰斯塔德城市带的司机与物流调度员</a:t>
             </a:r>
@@ -14845,6 +15022,7 @@
                   <a:srgbClr val="D8542A"/>
                 </a:solidFill>
                 <a:latin typeface="Courier New"/>
+                <a:ea typeface="Hiragino Sans GB"/>
               </a:rPr>
               <a:t>来源   </a:t>
             </a:r>
@@ -14854,6 +15032,7 @@
                   <a:srgbClr val="8A8478"/>
                 </a:solidFill>
                 <a:latin typeface="Courier New"/>
+                <a:ea typeface="Hiragino Sans GB"/>
               </a:rPr>
               <a:t>UWV（短缺职业与空缺未填补统计，2025–2026 年）。</a:t>
             </a:r>
@@ -14900,6 +15079,7 @@
                   <a:srgbClr val="8A8478"/>
                 </a:solidFill>
                 <a:latin typeface="Courier New"/>
+                <a:ea typeface="Hiragino Sans GB"/>
               </a:rPr>
               <a:t>荷兰就业市场 · 2026   ·   用 slide-maker 制作的示例样稿</a:t>
             </a:r>
@@ -14946,6 +15126,7 @@
                   <a:srgbClr val="8A8478"/>
                 </a:solidFill>
                 <a:latin typeface="Courier New"/>
+                <a:ea typeface="Hiragino Sans GB"/>
               </a:rPr>
               <a:t>06 / 14</a:t>
             </a:r>
@@ -15054,6 +15235,7 @@
                   <a:srgbClr val="0E5C63"/>
                 </a:solidFill>
                 <a:latin typeface="Helvetica Neue"/>
+                <a:ea typeface="Hiragino Sans GB"/>
               </a:rPr>
               <a:t>薪酬与工资</a:t>
             </a:r>
@@ -15100,6 +15282,7 @@
                   <a:srgbClr val="20242A"/>
                 </a:solidFill>
                 <a:latin typeface="Georgia"/>
+                <a:ea typeface="Hiragino Sans GB"/>
               </a:rPr>
               <a:t>工资再度跑赢通胀</a:t>
             </a:r>
@@ -15146,6 +15329,7 @@
                   <a:srgbClr val="8A8478"/>
                 </a:solidFill>
                 <a:latin typeface="Courier New"/>
+                <a:ea typeface="Hiragino Sans GB"/>
               </a:rPr>
               <a:t>协议（CAO）工资涨幅，同比 %</a:t>
             </a:r>
@@ -15210,6 +15394,7 @@
                   <a:srgbClr val="0E5C63"/>
                 </a:solidFill>
                 <a:latin typeface="Courier New"/>
+                <a:ea typeface="Hiragino Sans GB"/>
               </a:rPr>
               <a:t>实际增长，已连续三年</a:t>
             </a:r>
@@ -15256,6 +15441,7 @@
                   <a:srgbClr val="0E5C63"/>
                 </a:solidFill>
                 <a:latin typeface="Helvetica Neue"/>
+                <a:ea typeface="Hiragino Sans GB"/>
               </a:rPr>
               <a:t>+2.0%</a:t>
             </a:r>
@@ -15302,6 +15488,7 @@
                   <a:srgbClr val="4A4E56"/>
                 </a:solidFill>
                 <a:latin typeface="Helvetica Neue"/>
+                <a:ea typeface="Hiragino Sans GB"/>
               </a:rPr>
               <a:t>2026 年初协议工资上涨 4.5%——高出通胀 2.0 个百分点。家庭正实实在在地变富。</a:t>
             </a:r>
@@ -15392,6 +15579,7 @@
                   <a:srgbClr val="D8542A"/>
                 </a:solidFill>
                 <a:latin typeface="Helvetica Neue"/>
+                <a:ea typeface="Hiragino Sans GB"/>
               </a:rPr>
               <a:t>€14.99</a:t>
             </a:r>
@@ -15401,6 +15589,7 @@
                   <a:srgbClr val="4A4E56"/>
                 </a:solidFill>
                 <a:latin typeface="Helvetica Neue"/>
+                <a:ea typeface="Hiragino Sans GB"/>
               </a:rPr>
               <a:t>  /小时最低工资（21 岁以上）</a:t>
             </a:r>
@@ -15447,6 +15636,7 @@
                   <a:srgbClr val="8A8478"/>
                 </a:solidFill>
                 <a:latin typeface="Helvetica Neue"/>
+                <a:ea typeface="Hiragino Sans GB"/>
               </a:rPr>
               <a:t>自 2026 年 7 月 1 日起 · 平均薪酬 ≈ €5.34 万/年。</a:t>
             </a:r>
@@ -15493,6 +15683,7 @@
                   <a:srgbClr val="D8542A"/>
                 </a:solidFill>
                 <a:latin typeface="Courier New"/>
+                <a:ea typeface="Hiragino Sans GB"/>
               </a:rPr>
               <a:t>来源   </a:t>
             </a:r>
@@ -15502,6 +15693,7 @@
                   <a:srgbClr val="8A8478"/>
                 </a:solidFill>
                 <a:latin typeface="Courier New"/>
+                <a:ea typeface="Hiragino Sans GB"/>
               </a:rPr>
               <a:t>CBS（CAO 协议工资指数）；Business.gov.nl（最低工资）。2024 年数据为估算值。</a:t>
             </a:r>
@@ -15548,6 +15740,7 @@
                   <a:srgbClr val="8A8478"/>
                 </a:solidFill>
                 <a:latin typeface="Courier New"/>
+                <a:ea typeface="Hiragino Sans GB"/>
               </a:rPr>
               <a:t>荷兰就业市场 · 2026   ·   用 slide-maker 制作的示例样稿</a:t>
             </a:r>
@@ -15594,6 +15787,7 @@
                   <a:srgbClr val="8A8478"/>
                 </a:solidFill>
                 <a:latin typeface="Courier New"/>
+                <a:ea typeface="Hiragino Sans GB"/>
               </a:rPr>
               <a:t>07 / 14</a:t>
             </a:r>
@@ -15702,6 +15896,7 @@
                   <a:srgbClr val="D8542A"/>
                 </a:solidFill>
                 <a:latin typeface="Helvetica Neue"/>
+                <a:ea typeface="Hiragino Sans GB"/>
               </a:rPr>
               <a:t>薪资水平</a:t>
             </a:r>
@@ -15748,6 +15943,7 @@
                   <a:srgbClr val="20242A"/>
                 </a:solidFill>
                 <a:latin typeface="Georgia"/>
+                <a:ea typeface="Hiragino Sans GB"/>
               </a:rPr>
               <a:t>行业之间差距悬殊</a:t>
             </a:r>
@@ -15794,6 +15990,7 @@
                   <a:srgbClr val="8A8478"/>
                 </a:solidFill>
                 <a:latin typeface="Courier New"/>
+                <a:ea typeface="Hiragino Sans GB"/>
               </a:rPr>
               <a:t>税前年薪估算，欧元/年</a:t>
             </a:r>
@@ -15840,6 +16037,7 @@
                   <a:srgbClr val="8A8478"/>
                 </a:solidFill>
                 <a:latin typeface="Helvetica Neue"/>
+                <a:ea typeface="Hiragino Sans GB"/>
               </a:rPr>
               <a:t>信息技术（中级）</a:t>
             </a:r>
@@ -15978,6 +16176,7 @@
                   <a:srgbClr val="20242A"/>
                 </a:solidFill>
                 <a:latin typeface="Helvetica Neue"/>
+                <a:ea typeface="Hiragino Sans GB"/>
               </a:rPr>
               <a:t>€72k</a:t>
             </a:r>
@@ -16024,6 +16223,7 @@
                   <a:srgbClr val="8A8478"/>
                 </a:solidFill>
                 <a:latin typeface="Helvetica Neue"/>
+                <a:ea typeface="Hiragino Sans GB"/>
               </a:rPr>
               <a:t>工程</a:t>
             </a:r>
@@ -16162,6 +16362,7 @@
                   <a:srgbClr val="20242A"/>
                 </a:solidFill>
                 <a:latin typeface="Helvetica Neue"/>
+                <a:ea typeface="Hiragino Sans GB"/>
               </a:rPr>
               <a:t>€68k</a:t>
             </a:r>
@@ -16208,6 +16409,7 @@
                   <a:srgbClr val="8A8478"/>
                 </a:solidFill>
                 <a:latin typeface="Helvetica Neue"/>
+                <a:ea typeface="Hiragino Sans GB"/>
               </a:rPr>
               <a:t>金融与商业服务</a:t>
             </a:r>
@@ -16346,6 +16548,7 @@
                   <a:srgbClr val="20242A"/>
                 </a:solidFill>
                 <a:latin typeface="Helvetica Neue"/>
+                <a:ea typeface="Hiragino Sans GB"/>
               </a:rPr>
               <a:t>€65k</a:t>
             </a:r>
@@ -16392,6 +16595,7 @@
                   <a:srgbClr val="8A8478"/>
                 </a:solidFill>
                 <a:latin typeface="Helvetica Neue"/>
+                <a:ea typeface="Hiragino Sans GB"/>
               </a:rPr>
               <a:t>全国平均（CBS）</a:t>
             </a:r>
@@ -16530,6 +16734,7 @@
                   <a:srgbClr val="20242A"/>
                 </a:solidFill>
                 <a:latin typeface="Helvetica Neue"/>
+                <a:ea typeface="Hiragino Sans GB"/>
               </a:rPr>
               <a:t>€53k</a:t>
             </a:r>
@@ -16576,6 +16781,7 @@
                   <a:srgbClr val="8A8478"/>
                 </a:solidFill>
                 <a:latin typeface="Helvetica Neue"/>
+                <a:ea typeface="Hiragino Sans GB"/>
               </a:rPr>
               <a:t>医疗（注册护士）</a:t>
             </a:r>
@@ -16714,6 +16920,7 @@
                   <a:srgbClr val="20242A"/>
                 </a:solidFill>
                 <a:latin typeface="Helvetica Neue"/>
+                <a:ea typeface="Hiragino Sans GB"/>
               </a:rPr>
               <a:t>€45k</a:t>
             </a:r>
@@ -16760,6 +16967,7 @@
                   <a:srgbClr val="8A8478"/>
                 </a:solidFill>
                 <a:latin typeface="Helvetica Neue"/>
+                <a:ea typeface="Hiragino Sans GB"/>
               </a:rPr>
               <a:t>住宿餐饮与零售</a:t>
             </a:r>
@@ -16898,6 +17106,7 @@
                   <a:srgbClr val="20242A"/>
                 </a:solidFill>
                 <a:latin typeface="Helvetica Neue"/>
+                <a:ea typeface="Hiragino Sans GB"/>
               </a:rPr>
               <a:t>€33k</a:t>
             </a:r>
@@ -16944,6 +17153,7 @@
                   <a:srgbClr val="B23F1C"/>
                 </a:solidFill>
                 <a:latin typeface="Courier New"/>
+                <a:ea typeface="Hiragino Sans GB"/>
               </a:rPr>
               <a:t>差距</a:t>
             </a:r>
@@ -16990,6 +17200,7 @@
                   <a:srgbClr val="4A4E56"/>
                 </a:solidFill>
                 <a:latin typeface="Helvetica Neue"/>
+                <a:ea typeface="Hiragino Sans GB"/>
               </a:rPr>
               <a:t>科技行业的薪酬大约是住宿餐饮与零售的</a:t>
             </a:r>
@@ -16999,6 +17210,7 @@
                   <a:srgbClr val="D8542A"/>
                 </a:solidFill>
                 <a:latin typeface="Helvetica Neue"/>
+                <a:ea typeface="Hiragino Sans GB"/>
               </a:rPr>
               <a:t>两倍</a:t>
             </a:r>
@@ -17008,6 +17220,7 @@
                   <a:srgbClr val="4A4E56"/>
                 </a:solidFill>
                 <a:latin typeface="Helvetica Neue"/>
+                <a:ea typeface="Hiragino Sans GB"/>
               </a:rPr>
               <a:t>——这是两大行业间最悬殊的差距。</a:t>
             </a:r>
@@ -17102,6 +17315,7 @@
                   <a:srgbClr val="8A8478"/>
                 </a:solidFill>
                 <a:latin typeface="Helvetica Neue"/>
+                <a:ea typeface="Hiragino Sans GB"/>
               </a:rPr>
               <a:t>应读作区间而非精确点位。行业数字为招聘调研的估算中位数；€53.4k 的平均值来自 CBS。</a:t>
             </a:r>
@@ -17148,6 +17362,7 @@
                   <a:srgbClr val="D8542A"/>
                 </a:solidFill>
                 <a:latin typeface="Courier New"/>
+                <a:ea typeface="Hiragino Sans GB"/>
               </a:rPr>
               <a:t>来源   </a:t>
             </a:r>
@@ -17157,6 +17372,7 @@
                   <a:srgbClr val="8A8478"/>
                 </a:solidFill>
                 <a:latin typeface="Courier New"/>
+                <a:ea typeface="Hiragino Sans GB"/>
               </a:rPr>
               <a:t>CBS（全国平均薪资，2026 年）；行业中位数取自招聘薪酬指南——为估算值。</a:t>
             </a:r>
@@ -17203,6 +17419,7 @@
                   <a:srgbClr val="8A8478"/>
                 </a:solidFill>
                 <a:latin typeface="Courier New"/>
+                <a:ea typeface="Hiragino Sans GB"/>
               </a:rPr>
               <a:t>荷兰就业市场 · 2026   ·   用 slide-maker 制作的示例样稿</a:t>
             </a:r>
@@ -17249,6 +17466,7 @@
                   <a:srgbClr val="8A8478"/>
                 </a:solidFill>
                 <a:latin typeface="Courier New"/>
+                <a:ea typeface="Hiragino Sans GB"/>
               </a:rPr>
               <a:t>08 / 14</a:t>
             </a:r>
@@ -17357,6 +17575,7 @@
                   <a:srgbClr val="0E5C63"/>
                 </a:solidFill>
                 <a:latin typeface="Helvetica Neue"/>
+                <a:ea typeface="Hiragino Sans GB"/>
               </a:rPr>
               <a:t>国际人才</a:t>
             </a:r>
@@ -17403,6 +17622,7 @@
                   <a:srgbClr val="20242A"/>
                 </a:solidFill>
                 <a:latin typeface="Georgia"/>
+                <a:ea typeface="Hiragino Sans GB"/>
               </a:rPr>
               <a:t>高技能移民通道</a:t>
             </a:r>
@@ -17449,6 +17669,7 @@
                   <a:srgbClr val="4A4E56"/>
                 </a:solidFill>
                 <a:latin typeface="Helvetica Neue"/>
+                <a:ea typeface="Hiragino Sans GB"/>
               </a:rPr>
               <a:t>kennismigrant（高技能移民）计划不设劳动力市场测试——是否合格几乎完全取决于按年龄和身份设定的税前月薪门槛（2026 年，不含 8% 假期津贴）。</a:t>
             </a:r>
@@ -17590,6 +17811,7 @@
                   <a:srgbClr val="8A8478"/>
                 </a:solidFill>
                 <a:latin typeface="Courier New"/>
+                <a:ea typeface="Hiragino Sans GB"/>
               </a:rPr>
               <a:t>高技能移民</a:t>
             </a:r>
@@ -17636,6 +17858,7 @@
                   <a:srgbClr val="D8542A"/>
                 </a:solidFill>
                 <a:latin typeface="Helvetica Neue"/>
+                <a:ea typeface="Hiragino Sans GB"/>
               </a:rPr>
               <a:t>€5,942</a:t>
             </a:r>
@@ -17682,6 +17905,7 @@
                   <a:srgbClr val="8A8478"/>
                 </a:solidFill>
                 <a:latin typeface="Courier New"/>
+                <a:ea typeface="Hiragino Sans GB"/>
               </a:rPr>
               <a:t>税前 / 月</a:t>
             </a:r>
@@ -17772,6 +17996,7 @@
                   <a:srgbClr val="20242A"/>
                 </a:solidFill>
                 <a:latin typeface="Helvetica Neue"/>
+                <a:ea typeface="Hiragino Sans GB"/>
               </a:rPr>
               <a:t>30 岁及以上</a:t>
             </a:r>
@@ -17913,6 +18138,7 @@
                   <a:srgbClr val="8A8478"/>
                 </a:solidFill>
                 <a:latin typeface="Courier New"/>
+                <a:ea typeface="Hiragino Sans GB"/>
               </a:rPr>
               <a:t>高技能移民</a:t>
             </a:r>
@@ -17959,6 +18185,7 @@
                   <a:srgbClr val="0E5C63"/>
                 </a:solidFill>
                 <a:latin typeface="Helvetica Neue"/>
+                <a:ea typeface="Hiragino Sans GB"/>
               </a:rPr>
               <a:t>€4,357</a:t>
             </a:r>
@@ -18005,6 +18232,7 @@
                   <a:srgbClr val="8A8478"/>
                 </a:solidFill>
                 <a:latin typeface="Courier New"/>
+                <a:ea typeface="Hiragino Sans GB"/>
               </a:rPr>
               <a:t>税前 / 月</a:t>
             </a:r>
@@ -18095,6 +18323,7 @@
                   <a:srgbClr val="20242A"/>
                 </a:solidFill>
                 <a:latin typeface="Helvetica Neue"/>
+                <a:ea typeface="Hiragino Sans GB"/>
               </a:rPr>
               <a:t>30 岁以下</a:t>
             </a:r>
@@ -18236,6 +18465,7 @@
                   <a:srgbClr val="8A8478"/>
                 </a:solidFill>
                 <a:latin typeface="Courier New"/>
+                <a:ea typeface="Hiragino Sans GB"/>
               </a:rPr>
               <a:t>应届毕业生</a:t>
             </a:r>
@@ -18282,6 +18512,7 @@
                   <a:srgbClr val="C08A2E"/>
                 </a:solidFill>
                 <a:latin typeface="Helvetica Neue"/>
+                <a:ea typeface="Hiragino Sans GB"/>
               </a:rPr>
               <a:t>€3,122</a:t>
             </a:r>
@@ -18328,6 +18559,7 @@
                   <a:srgbClr val="8A8478"/>
                 </a:solidFill>
                 <a:latin typeface="Courier New"/>
+                <a:ea typeface="Hiragino Sans GB"/>
               </a:rPr>
               <a:t>税前 / 月</a:t>
             </a:r>
@@ -18418,6 +18650,7 @@
                   <a:srgbClr val="20242A"/>
                 </a:solidFill>
                 <a:latin typeface="Helvetica Neue"/>
+                <a:ea typeface="Hiragino Sans GB"/>
               </a:rPr>
               <a:t>求职年签证</a:t>
             </a:r>
@@ -18559,6 +18792,7 @@
                   <a:srgbClr val="8A8478"/>
                 </a:solidFill>
                 <a:latin typeface="Courier New"/>
+                <a:ea typeface="Hiragino Sans GB"/>
               </a:rPr>
               <a:t>学术研究人员</a:t>
             </a:r>
@@ -18605,6 +18839,7 @@
                   <a:srgbClr val="3E6B57"/>
                 </a:solidFill>
                 <a:latin typeface="Helvetica Neue"/>
+                <a:ea typeface="Hiragino Sans GB"/>
               </a:rPr>
               <a:t>€3,583</a:t>
             </a:r>
@@ -18651,6 +18886,7 @@
                   <a:srgbClr val="8A8478"/>
                 </a:solidFill>
                 <a:latin typeface="Courier New"/>
+                <a:ea typeface="Hiragino Sans GB"/>
               </a:rPr>
               <a:t>税前 / 月</a:t>
             </a:r>
@@ -18741,6 +18977,7 @@
                   <a:srgbClr val="20242A"/>
                 </a:solidFill>
                 <a:latin typeface="Helvetica Neue"/>
+                <a:ea typeface="Hiragino Sans GB"/>
               </a:rPr>
               <a:t>公立科研机构</a:t>
             </a:r>
@@ -18787,6 +19024,7 @@
                   <a:srgbClr val="0E5C63"/>
                 </a:solidFill>
                 <a:latin typeface="Helvetica Neue"/>
+                <a:ea typeface="Hiragino Sans GB"/>
               </a:rPr>
               <a:t>约 1 万家</a:t>
             </a:r>
@@ -18796,6 +19034,7 @@
                   <a:srgbClr val="4A4E56"/>
                 </a:solidFill>
                 <a:latin typeface="Helvetica Neue"/>
+                <a:ea typeface="Hiragino Sans GB"/>
               </a:rPr>
               <a:t>  认证雇主    ·    主要来源国：</a:t>
             </a:r>
@@ -18805,6 +19044,7 @@
                   <a:srgbClr val="20242A"/>
                 </a:solidFill>
                 <a:latin typeface="Helvetica Neue"/>
+                <a:ea typeface="Hiragino Sans GB"/>
               </a:rPr>
               <a:t>印度、土耳其、中国</a:t>
             </a:r>
@@ -18814,6 +19054,7 @@
                   <a:srgbClr val="4A4E56"/>
                 </a:solidFill>
                 <a:latin typeface="Helvetica Neue"/>
+                <a:ea typeface="Hiragino Sans GB"/>
               </a:rPr>
               <a:t>    ·    门槛每年随指数调整</a:t>
             </a:r>
@@ -18860,6 +19101,7 @@
                   <a:srgbClr val="D8542A"/>
                 </a:solidFill>
                 <a:latin typeface="Courier New"/>
+                <a:ea typeface="Hiragino Sans GB"/>
               </a:rPr>
               <a:t>来源   </a:t>
             </a:r>
@@ -18869,6 +19111,7 @@
                   <a:srgbClr val="8A8478"/>
                 </a:solidFill>
                 <a:latin typeface="Courier New"/>
+                <a:ea typeface="Hiragino Sans GB"/>
               </a:rPr>
               <a:t>IND（2026 年所需薪资标准；认证雇主名录）；OECD（国籍构成）。</a:t>
             </a:r>
@@ -18915,6 +19158,7 @@
                   <a:srgbClr val="8A8478"/>
                 </a:solidFill>
                 <a:latin typeface="Courier New"/>
+                <a:ea typeface="Hiragino Sans GB"/>
               </a:rPr>
               <a:t>荷兰就业市场 · 2026   ·   用 slide-maker 制作的示例样稿</a:t>
             </a:r>
@@ -18961,6 +19205,7 @@
                   <a:srgbClr val="8A8478"/>
                 </a:solidFill>
                 <a:latin typeface="Courier New"/>
+                <a:ea typeface="Hiragino Sans GB"/>
               </a:rPr>
               <a:t>09 / 14</a:t>
             </a:r>

--- a/templates/decks/zh/nl-job-market-2026/template.pptx
+++ b/templates/decks/zh/nl-job-market-2026/template.pptx
@@ -7008,51 +7008,7 @@
       </p:sp>
       <p:sp>
         <p:nvSpPr>
-          <p:cNvPr id="4" name="Rectangle 3"/>
-          <p:cNvSpPr/>
-          <p:nvPr/>
-        </p:nvSpPr>
-        <p:spPr>
-          <a:xfrm>
-            <a:off x="566928" y="841248"/>
-            <a:ext cx="1188720" cy="50292"/>
-          </a:xfrm>
-          <a:prstGeom prst="rect">
-            <a:avLst/>
-          </a:prstGeom>
-          <a:solidFill>
-            <a:srgbClr val="D8542A"/>
-          </a:solidFill>
-          <a:ln>
-            <a:noFill/>
-          </a:ln>
-          <a:effectLst/>
-        </p:spPr>
-        <p:style>
-          <a:lnRef idx="1">
-            <a:schemeClr val="accent1"/>
-          </a:lnRef>
-          <a:fillRef idx="3">
-            <a:schemeClr val="accent1"/>
-          </a:fillRef>
-          <a:effectRef idx="2">
-            <a:schemeClr val="accent1"/>
-          </a:effectRef>
-          <a:fontRef idx="minor">
-            <a:schemeClr val="lt1"/>
-          </a:fontRef>
-        </p:style>
-        <p:txBody>
-          <a:bodyPr rtlCol="0" anchor="ctr"/>
-          <a:lstStyle/>
-          <a:p>
-            <a:pPr algn="ctr"/>
-          </a:p>
-        </p:txBody>
-      </p:sp>
-      <p:sp>
-        <p:nvSpPr>
-          <p:cNvPr id="5" name="TextBox 4"/>
+          <p:cNvPr id="4" name="TextBox 3"/>
           <p:cNvSpPr txBox="1"/>
           <p:nvPr/>
         </p:nvSpPr>
@@ -7099,7 +7055,7 @@
       </p:sp>
       <p:sp>
         <p:nvSpPr>
-          <p:cNvPr id="6" name="Rounded Rectangle 5"/>
+          <p:cNvPr id="5" name="Rounded Rectangle 4"/>
           <p:cNvSpPr/>
           <p:nvPr/>
         </p:nvSpPr>
@@ -7147,7 +7103,7 @@
       </p:sp>
       <p:sp>
         <p:nvSpPr>
-          <p:cNvPr id="7" name="Rounded Rectangle 6"/>
+          <p:cNvPr id="6" name="Rounded Rectangle 5"/>
           <p:cNvSpPr/>
           <p:nvPr/>
         </p:nvSpPr>
@@ -7193,7 +7149,7 @@
       </p:sp>
       <p:pic>
         <p:nvPicPr>
-          <p:cNvPr id="8" name="Picture 7" descr="trending-up_0E5C63.png"/>
+          <p:cNvPr id="7" name="Picture 6" descr="trending-up_0E5C63.png"/>
           <p:cNvPicPr>
             <a:picLocks noChangeAspect="1"/>
           </p:cNvPicPr>
@@ -7217,7 +7173,7 @@
       </p:pic>
       <p:sp>
         <p:nvSpPr>
-          <p:cNvPr id="9" name="TextBox 8"/>
+          <p:cNvPr id="8" name="TextBox 7"/>
           <p:cNvSpPr txBox="1"/>
           <p:nvPr/>
         </p:nvSpPr>
@@ -7264,7 +7220,7 @@
       </p:sp>
       <p:sp>
         <p:nvSpPr>
-          <p:cNvPr id="10" name="TextBox 9"/>
+          <p:cNvPr id="9" name="TextBox 8"/>
           <p:cNvSpPr txBox="1"/>
           <p:nvPr/>
         </p:nvSpPr>
@@ -7311,7 +7267,7 @@
       </p:sp>
       <p:sp>
         <p:nvSpPr>
-          <p:cNvPr id="11" name="Rounded Rectangle 10"/>
+          <p:cNvPr id="10" name="Rounded Rectangle 9"/>
           <p:cNvSpPr/>
           <p:nvPr/>
         </p:nvSpPr>
@@ -7359,7 +7315,7 @@
       </p:sp>
       <p:sp>
         <p:nvSpPr>
-          <p:cNvPr id="12" name="Rounded Rectangle 11"/>
+          <p:cNvPr id="11" name="Rounded Rectangle 10"/>
           <p:cNvSpPr/>
           <p:nvPr/>
         </p:nvSpPr>
@@ -7405,7 +7361,7 @@
       </p:sp>
       <p:pic>
         <p:nvPicPr>
-          <p:cNvPr id="13" name="Picture 12" descr="chart-line_2E8A8C.png"/>
+          <p:cNvPr id="12" name="Picture 11" descr="chart-line_2E8A8C.png"/>
           <p:cNvPicPr>
             <a:picLocks noChangeAspect="1"/>
           </p:cNvPicPr>
@@ -7429,7 +7385,7 @@
       </p:pic>
       <p:sp>
         <p:nvSpPr>
-          <p:cNvPr id="14" name="TextBox 13"/>
+          <p:cNvPr id="13" name="TextBox 12"/>
           <p:cNvSpPr txBox="1"/>
           <p:nvPr/>
         </p:nvSpPr>
@@ -7476,7 +7432,7 @@
       </p:sp>
       <p:sp>
         <p:nvSpPr>
-          <p:cNvPr id="15" name="TextBox 14"/>
+          <p:cNvPr id="14" name="TextBox 13"/>
           <p:cNvSpPr txBox="1"/>
           <p:nvPr/>
         </p:nvSpPr>
@@ -7523,7 +7479,7 @@
       </p:sp>
       <p:sp>
         <p:nvSpPr>
-          <p:cNvPr id="16" name="Rounded Rectangle 15"/>
+          <p:cNvPr id="15" name="Rounded Rectangle 14"/>
           <p:cNvSpPr/>
           <p:nvPr/>
         </p:nvSpPr>
@@ -7571,7 +7527,7 @@
       </p:sp>
       <p:sp>
         <p:nvSpPr>
-          <p:cNvPr id="17" name="Rounded Rectangle 16"/>
+          <p:cNvPr id="16" name="Rounded Rectangle 15"/>
           <p:cNvSpPr/>
           <p:nvPr/>
         </p:nvSpPr>
@@ -7617,7 +7573,7 @@
       </p:sp>
       <p:pic>
         <p:nvPicPr>
-          <p:cNvPr id="18" name="Picture 17" descr="users_D8542A.png"/>
+          <p:cNvPr id="17" name="Picture 16" descr="users_D8542A.png"/>
           <p:cNvPicPr>
             <a:picLocks noChangeAspect="1"/>
           </p:cNvPicPr>
@@ -7641,7 +7597,7 @@
       </p:pic>
       <p:sp>
         <p:nvSpPr>
-          <p:cNvPr id="19" name="TextBox 18"/>
+          <p:cNvPr id="18" name="TextBox 17"/>
           <p:cNvSpPr txBox="1"/>
           <p:nvPr/>
         </p:nvSpPr>
@@ -7688,7 +7644,7 @@
       </p:sp>
       <p:sp>
         <p:nvSpPr>
-          <p:cNvPr id="20" name="TextBox 19"/>
+          <p:cNvPr id="19" name="TextBox 18"/>
           <p:cNvSpPr txBox="1"/>
           <p:nvPr/>
         </p:nvSpPr>
@@ -7735,7 +7691,7 @@
       </p:sp>
       <p:sp>
         <p:nvSpPr>
-          <p:cNvPr id="21" name="TextBox 20"/>
+          <p:cNvPr id="20" name="TextBox 19"/>
           <p:cNvSpPr txBox="1"/>
           <p:nvPr/>
         </p:nvSpPr>
@@ -7792,7 +7748,7 @@
       </p:sp>
       <p:sp>
         <p:nvSpPr>
-          <p:cNvPr id="22" name="TextBox 21"/>
+          <p:cNvPr id="21" name="TextBox 20"/>
           <p:cNvSpPr txBox="1"/>
           <p:nvPr/>
         </p:nvSpPr>
@@ -7839,7 +7795,7 @@
       </p:sp>
       <p:sp>
         <p:nvSpPr>
-          <p:cNvPr id="23" name="TextBox 22"/>
+          <p:cNvPr id="22" name="TextBox 21"/>
           <p:cNvSpPr txBox="1"/>
           <p:nvPr/>
         </p:nvSpPr>
@@ -7995,51 +7951,7 @@
       </p:sp>
       <p:sp>
         <p:nvSpPr>
-          <p:cNvPr id="4" name="Rectangle 3"/>
-          <p:cNvSpPr/>
-          <p:nvPr/>
-        </p:nvSpPr>
-        <p:spPr>
-          <a:xfrm>
-            <a:off x="566928" y="841248"/>
-            <a:ext cx="1188720" cy="50292"/>
-          </a:xfrm>
-          <a:prstGeom prst="rect">
-            <a:avLst/>
-          </a:prstGeom>
-          <a:solidFill>
-            <a:srgbClr val="D8542A"/>
-          </a:solidFill>
-          <a:ln>
-            <a:noFill/>
-          </a:ln>
-          <a:effectLst/>
-        </p:spPr>
-        <p:style>
-          <a:lnRef idx="1">
-            <a:schemeClr val="accent1"/>
-          </a:lnRef>
-          <a:fillRef idx="3">
-            <a:schemeClr val="accent1"/>
-          </a:fillRef>
-          <a:effectRef idx="2">
-            <a:schemeClr val="accent1"/>
-          </a:effectRef>
-          <a:fontRef idx="minor">
-            <a:schemeClr val="lt1"/>
-          </a:fontRef>
-        </p:style>
-        <p:txBody>
-          <a:bodyPr rtlCol="0" anchor="ctr"/>
-          <a:lstStyle/>
-          <a:p>
-            <a:pPr algn="ctr"/>
-          </a:p>
-        </p:txBody>
-      </p:sp>
-      <p:sp>
-        <p:nvSpPr>
-          <p:cNvPr id="5" name="TextBox 4"/>
+          <p:cNvPr id="4" name="TextBox 3"/>
           <p:cNvSpPr txBox="1"/>
           <p:nvPr/>
         </p:nvSpPr>
@@ -8086,7 +7998,7 @@
       </p:sp>
       <p:sp>
         <p:nvSpPr>
-          <p:cNvPr id="6" name="TextBox 5"/>
+          <p:cNvPr id="5" name="TextBox 4"/>
           <p:cNvSpPr txBox="1"/>
           <p:nvPr/>
         </p:nvSpPr>
@@ -8133,7 +8045,7 @@
       </p:sp>
       <p:sp>
         <p:nvSpPr>
-          <p:cNvPr id="7" name="TextBox 6"/>
+          <p:cNvPr id="6" name="TextBox 5"/>
           <p:cNvSpPr txBox="1"/>
           <p:nvPr/>
         </p:nvSpPr>
@@ -8180,7 +8092,7 @@
       </p:sp>
       <p:sp>
         <p:nvSpPr>
-          <p:cNvPr id="8" name="TextBox 7"/>
+          <p:cNvPr id="7" name="TextBox 6"/>
           <p:cNvSpPr txBox="1"/>
           <p:nvPr/>
         </p:nvSpPr>
@@ -8227,7 +8139,7 @@
       </p:sp>
       <p:sp>
         <p:nvSpPr>
-          <p:cNvPr id="9" name="Rectangle 8"/>
+          <p:cNvPr id="8" name="Rectangle 7"/>
           <p:cNvSpPr/>
           <p:nvPr/>
         </p:nvSpPr>
@@ -8271,7 +8183,7 @@
       </p:sp>
       <p:sp>
         <p:nvSpPr>
-          <p:cNvPr id="10" name="TextBox 9"/>
+          <p:cNvPr id="9" name="TextBox 8"/>
           <p:cNvSpPr txBox="1"/>
           <p:nvPr/>
         </p:nvSpPr>
@@ -8318,7 +8230,7 @@
       </p:sp>
       <p:sp>
         <p:nvSpPr>
-          <p:cNvPr id="11" name="TextBox 10"/>
+          <p:cNvPr id="10" name="TextBox 9"/>
           <p:cNvSpPr txBox="1"/>
           <p:nvPr/>
         </p:nvSpPr>
@@ -8365,7 +8277,7 @@
       </p:sp>
       <p:sp>
         <p:nvSpPr>
-          <p:cNvPr id="12" name="TextBox 11"/>
+          <p:cNvPr id="11" name="TextBox 10"/>
           <p:cNvSpPr txBox="1"/>
           <p:nvPr/>
         </p:nvSpPr>
@@ -8412,7 +8324,7 @@
       </p:sp>
       <p:sp>
         <p:nvSpPr>
-          <p:cNvPr id="13" name="Rectangle 12"/>
+          <p:cNvPr id="12" name="Rectangle 11"/>
           <p:cNvSpPr/>
           <p:nvPr/>
         </p:nvSpPr>
@@ -8456,7 +8368,7 @@
       </p:sp>
       <p:sp>
         <p:nvSpPr>
-          <p:cNvPr id="14" name="TextBox 13"/>
+          <p:cNvPr id="13" name="TextBox 12"/>
           <p:cNvSpPr txBox="1"/>
           <p:nvPr/>
         </p:nvSpPr>
@@ -8503,7 +8415,7 @@
       </p:sp>
       <p:sp>
         <p:nvSpPr>
-          <p:cNvPr id="15" name="TextBox 14"/>
+          <p:cNvPr id="14" name="TextBox 13"/>
           <p:cNvSpPr txBox="1"/>
           <p:nvPr/>
         </p:nvSpPr>
@@ -8550,7 +8462,7 @@
       </p:sp>
       <p:sp>
         <p:nvSpPr>
-          <p:cNvPr id="16" name="TextBox 15"/>
+          <p:cNvPr id="15" name="TextBox 14"/>
           <p:cNvSpPr txBox="1"/>
           <p:nvPr/>
         </p:nvSpPr>
@@ -8597,7 +8509,7 @@
       </p:sp>
       <p:sp>
         <p:nvSpPr>
-          <p:cNvPr id="17" name="Rectangle 16"/>
+          <p:cNvPr id="16" name="Rectangle 15"/>
           <p:cNvSpPr/>
           <p:nvPr/>
         </p:nvSpPr>
@@ -8641,7 +8553,7 @@
       </p:sp>
       <p:sp>
         <p:nvSpPr>
-          <p:cNvPr id="18" name="TextBox 17"/>
+          <p:cNvPr id="17" name="TextBox 16"/>
           <p:cNvSpPr txBox="1"/>
           <p:nvPr/>
         </p:nvSpPr>
@@ -8688,7 +8600,7 @@
       </p:sp>
       <p:sp>
         <p:nvSpPr>
-          <p:cNvPr id="19" name="TextBox 18"/>
+          <p:cNvPr id="18" name="TextBox 17"/>
           <p:cNvSpPr txBox="1"/>
           <p:nvPr/>
         </p:nvSpPr>
@@ -8735,7 +8647,7 @@
       </p:sp>
       <p:sp>
         <p:nvSpPr>
-          <p:cNvPr id="20" name="TextBox 19"/>
+          <p:cNvPr id="19" name="TextBox 18"/>
           <p:cNvSpPr txBox="1"/>
           <p:nvPr/>
         </p:nvSpPr>
@@ -8782,7 +8694,7 @@
       </p:sp>
       <p:sp>
         <p:nvSpPr>
-          <p:cNvPr id="21" name="Rectangle 20"/>
+          <p:cNvPr id="20" name="Rectangle 19"/>
           <p:cNvSpPr/>
           <p:nvPr/>
         </p:nvSpPr>
@@ -8826,7 +8738,7 @@
       </p:sp>
       <p:sp>
         <p:nvSpPr>
-          <p:cNvPr id="22" name="TextBox 21"/>
+          <p:cNvPr id="21" name="TextBox 20"/>
           <p:cNvSpPr txBox="1"/>
           <p:nvPr/>
         </p:nvSpPr>
@@ -8873,7 +8785,7 @@
       </p:sp>
       <p:sp>
         <p:nvSpPr>
-          <p:cNvPr id="23" name="TextBox 22"/>
+          <p:cNvPr id="22" name="TextBox 21"/>
           <p:cNvSpPr txBox="1"/>
           <p:nvPr/>
         </p:nvSpPr>
@@ -8920,7 +8832,7 @@
       </p:sp>
       <p:sp>
         <p:nvSpPr>
-          <p:cNvPr id="24" name="TextBox 23"/>
+          <p:cNvPr id="23" name="TextBox 22"/>
           <p:cNvSpPr txBox="1"/>
           <p:nvPr/>
         </p:nvSpPr>
@@ -8967,7 +8879,7 @@
       </p:sp>
       <p:sp>
         <p:nvSpPr>
-          <p:cNvPr id="25" name="TextBox 24"/>
+          <p:cNvPr id="24" name="TextBox 23"/>
           <p:cNvSpPr txBox="1"/>
           <p:nvPr/>
         </p:nvSpPr>
@@ -9014,7 +8926,7 @@
       </p:sp>
       <p:sp>
         <p:nvSpPr>
-          <p:cNvPr id="26" name="TextBox 25"/>
+          <p:cNvPr id="25" name="TextBox 24"/>
           <p:cNvSpPr txBox="1"/>
           <p:nvPr/>
         </p:nvSpPr>

--- a/templates/decks/zh/nl-job-market-2026/template.pptx
+++ b/templates/decks/zh/nl-job-market-2026/template.pptx
@@ -9082,51 +9082,7 @@
       </p:sp>
       <p:sp>
         <p:nvSpPr>
-          <p:cNvPr id="4" name="Rectangle 3"/>
-          <p:cNvSpPr/>
-          <p:nvPr/>
-        </p:nvSpPr>
-        <p:spPr>
-          <a:xfrm>
-            <a:off x="640080" y="932688"/>
-            <a:ext cx="1097280" cy="45720"/>
-          </a:xfrm>
-          <a:prstGeom prst="rect">
-            <a:avLst/>
-          </a:prstGeom>
-          <a:solidFill>
-            <a:srgbClr val="D8542A"/>
-          </a:solidFill>
-          <a:ln>
-            <a:noFill/>
-          </a:ln>
-          <a:effectLst/>
-        </p:spPr>
-        <p:style>
-          <a:lnRef idx="1">
-            <a:schemeClr val="accent1"/>
-          </a:lnRef>
-          <a:fillRef idx="3">
-            <a:schemeClr val="accent1"/>
-          </a:fillRef>
-          <a:effectRef idx="2">
-            <a:schemeClr val="accent1"/>
-          </a:effectRef>
-          <a:fontRef idx="minor">
-            <a:schemeClr val="lt1"/>
-          </a:fontRef>
-        </p:style>
-        <p:txBody>
-          <a:bodyPr rtlCol="0" anchor="ctr"/>
-          <a:lstStyle/>
-          <a:p>
-            <a:pPr algn="ctr"/>
-          </a:p>
-        </p:txBody>
-      </p:sp>
-      <p:sp>
-        <p:nvSpPr>
-          <p:cNvPr id="5" name="TextBox 4"/>
+          <p:cNvPr id="4" name="TextBox 3"/>
           <p:cNvSpPr txBox="1"/>
           <p:nvPr/>
         </p:nvSpPr>
@@ -9183,7 +9139,7 @@
       </p:sp>
       <p:sp>
         <p:nvSpPr>
-          <p:cNvPr id="6" name="TextBox 5"/>
+          <p:cNvPr id="5" name="TextBox 4"/>
           <p:cNvSpPr txBox="1"/>
           <p:nvPr/>
         </p:nvSpPr>
@@ -9240,7 +9196,7 @@
       </p:sp>
       <p:sp>
         <p:nvSpPr>
-          <p:cNvPr id="7" name="TextBox 6"/>
+          <p:cNvPr id="6" name="TextBox 5"/>
           <p:cNvSpPr txBox="1"/>
           <p:nvPr/>
         </p:nvSpPr>
@@ -9297,7 +9253,7 @@
       </p:sp>
       <p:sp>
         <p:nvSpPr>
-          <p:cNvPr id="8" name="TextBox 7"/>
+          <p:cNvPr id="7" name="TextBox 6"/>
           <p:cNvSpPr txBox="1"/>
           <p:nvPr/>
         </p:nvSpPr>
@@ -9354,7 +9310,7 @@
       </p:sp>
       <p:sp>
         <p:nvSpPr>
-          <p:cNvPr id="9" name="TextBox 8"/>
+          <p:cNvPr id="8" name="TextBox 7"/>
           <p:cNvSpPr txBox="1"/>
           <p:nvPr/>
         </p:nvSpPr>
@@ -9411,7 +9367,7 @@
       </p:sp>
       <p:sp>
         <p:nvSpPr>
-          <p:cNvPr id="10" name="TextBox 9"/>
+          <p:cNvPr id="9" name="TextBox 8"/>
           <p:cNvSpPr txBox="1"/>
           <p:nvPr/>
         </p:nvSpPr>
@@ -9468,7 +9424,7 @@
       </p:sp>
       <p:sp>
         <p:nvSpPr>
-          <p:cNvPr id="11" name="TextBox 10"/>
+          <p:cNvPr id="10" name="TextBox 9"/>
           <p:cNvSpPr txBox="1"/>
           <p:nvPr/>
         </p:nvSpPr>
@@ -9525,7 +9481,7 @@
       </p:sp>
       <p:sp>
         <p:nvSpPr>
-          <p:cNvPr id="12" name="TextBox 11"/>
+          <p:cNvPr id="11" name="TextBox 10"/>
           <p:cNvSpPr txBox="1"/>
           <p:nvPr/>
         </p:nvSpPr>
@@ -9582,7 +9538,7 @@
       </p:sp>
       <p:sp>
         <p:nvSpPr>
-          <p:cNvPr id="13" name="TextBox 12"/>
+          <p:cNvPr id="12" name="TextBox 11"/>
           <p:cNvSpPr txBox="1"/>
           <p:nvPr/>
         </p:nvSpPr>
@@ -9639,7 +9595,7 @@
       </p:sp>
       <p:sp>
         <p:nvSpPr>
-          <p:cNvPr id="14" name="Rectangle 13"/>
+          <p:cNvPr id="13" name="Rectangle 12"/>
           <p:cNvSpPr/>
           <p:nvPr/>
         </p:nvSpPr>
@@ -9683,7 +9639,7 @@
       </p:sp>
       <p:sp>
         <p:nvSpPr>
-          <p:cNvPr id="15" name="TextBox 14"/>
+          <p:cNvPr id="14" name="TextBox 13"/>
           <p:cNvSpPr txBox="1"/>
           <p:nvPr/>
         </p:nvSpPr>
@@ -9740,7 +9696,7 @@
       </p:sp>
       <p:sp>
         <p:nvSpPr>
-          <p:cNvPr id="16" name="TextBox 15"/>
+          <p:cNvPr id="15" name="TextBox 14"/>
           <p:cNvSpPr txBox="1"/>
           <p:nvPr/>
         </p:nvSpPr>
@@ -9787,7 +9743,7 @@
       </p:sp>
       <p:sp>
         <p:nvSpPr>
-          <p:cNvPr id="17" name="TextBox 16"/>
+          <p:cNvPr id="16" name="TextBox 15"/>
           <p:cNvSpPr txBox="1"/>
           <p:nvPr/>
         </p:nvSpPr>
